--- a/pitch/TEDUH-pitch-deck.pptx
+++ b/pitch/TEDUH-pitch-deck.pptx
@@ -4,9 +4,6 @@
   <p:sldMasterIdLst>
     <p:sldMasterId id="2147483648" r:id="rId1"/>
   </p:sldMasterIdLst>
-  <p:notesMasterIdLst>
-    <p:notesMasterId r:id="rId19"/>
-  </p:notesMasterIdLst>
   <p:sldIdLst>
     <p:sldId id="256" r:id="rId2"/>
     <p:sldId id="257" r:id="rId3"/>
@@ -26,6 +23,9 @@
     <p:sldId id="271" r:id="rId17"/>
     <p:sldId id="272" r:id="rId18"/>
   </p:sldIdLst>
+  <p:notesMasterIdLst>
+    <p:notesMasterId r:id="rId19"/>
+  </p:notesMasterIdLst>
   <p:sldSz cx="12192000" cy="6858000"/>
   <p:notesSz cx="6858000" cy="12192000"/>
   <p:defaultTextStyle>
@@ -123,7 +123,7 @@
   <p:extLst>
     <p:ext uri="{521415D9-36F7-43E2-AB2F-B90AF26B5E84}">
       <p14:sectionLst xmlns:p14="http://schemas.microsoft.com/office/powerpoint/2010/main">
-        <p14:section name="Story" id="{8EC00636-71D2-CEEB-1CD8-4B74FA164271}">
+        <p14:section name="Story" id="{d8f6f963-be9f-9d14-ff21-d74d07e1bd45}">
           <p14:sldIdLst>
             <p14:sldId id="256"/>
             <p14:sldId id="257"/>
@@ -131,21 +131,21 @@
             <p14:sldId id="259"/>
           </p14:sldIdLst>
         </p14:section>
-        <p14:section name="Proof" id="{B1555B9B-432C-2CD8-F0B4-5546570A2E5C}">
+        <p14:section name="Proof" id="{274c9746-b611-4858-373e-168f32ca0f38}">
           <p14:sldIdLst>
             <p14:sldId id="260"/>
             <p14:sldId id="261"/>
             <p14:sldId id="262"/>
           </p14:sldIdLst>
         </p14:section>
-        <p14:section name="Plan" id="{1811AFC1-C82A-9955-300A-3CFF51B28E5E}">
+        <p14:section name="Plan" id="{741facff-dd67-0cc1-8cde-b5fd21564b93}">
           <p14:sldIdLst>
             <p14:sldId id="263"/>
             <p14:sldId id="264"/>
             <p14:sldId id="265"/>
           </p14:sldIdLst>
         </p14:section>
-        <p14:section name="Appendix" id="{3814AB47-593E-0978-289F-AE8243DC051E}">
+        <p14:section name="Appendix" id="{bedc8f63-df2d-4b4d-ed16-6701ac8a4f1c}">
           <p14:sldIdLst>
             <p14:sldId id="266"/>
             <p14:sldId id="267"/>
@@ -187,10 +187,234 @@
           <a:chExt cx="0" cy="0"/>
         </a:xfrm>
       </p:grpSpPr>
+      <p:sp>
+        <p:nvSpPr>
+          <p:cNvPr id="2" name="Header Placeholder 1"/>
+          <p:cNvSpPr>
+            <a:spLocks noGrp="1"/>
+          </p:cNvSpPr>
+          <p:nvPr>
+            <p:ph type="hdr" sz="quarter"/>
+          </p:nvPr>
+        </p:nvSpPr>
+        <p:spPr>
+          <a:xfrm>
+            <a:off x="0" y="0"/>
+            <a:ext cx="2971800" cy="458788"/>
+          </a:xfrm>
+          <a:prstGeom prst="rect">
+            <a:avLst/>
+          </a:prstGeom>
+        </p:spPr>
+        <p:txBody>
+          <a:bodyPr vert="horz" lIns="91440" tIns="45720" rIns="91440" bIns="45720" rtlCol="0"/>
+          <a:lstStyle>
+            <a:lvl1pPr algn="l">
+              <a:defRPr sz="1200"/>
+            </a:lvl1pPr>
+          </a:lstStyle>
+          <a:p>
+            <a:endParaRPr lang="en-US"/>
+          </a:p>
+        </p:txBody>
+      </p:sp>
+      <p:sp>
+        <p:nvSpPr>
+          <p:cNvPr id="3" name="Date Placeholder 2"/>
+          <p:cNvSpPr>
+            <a:spLocks noGrp="1"/>
+          </p:cNvSpPr>
+          <p:nvPr>
+            <p:ph type="dt" idx="1"/>
+          </p:nvPr>
+        </p:nvSpPr>
+        <p:spPr>
+          <a:xfrm>
+            <a:off x="3884613" y="0"/>
+            <a:ext cx="2971800" cy="458788"/>
+          </a:xfrm>
+          <a:prstGeom prst="rect">
+            <a:avLst/>
+          </a:prstGeom>
+        </p:spPr>
+        <p:txBody>
+          <a:bodyPr vert="horz" lIns="91440" tIns="45720" rIns="91440" bIns="45720" rtlCol="0"/>
+          <a:lstStyle>
+            <a:lvl1pPr algn="r">
+              <a:defRPr sz="1200"/>
+            </a:lvl1pPr>
+          </a:lstStyle>
+          <a:p>
+            <a:fld id="{5282F153-3F37-0F45-9E97-73ACFA13230C}" type="datetimeFigureOut">
+              <a:rPr lang="en-US"/>
+              <a:t>7/23/19</a:t>
+            </a:fld>
+            <a:endParaRPr lang="en-US"/>
+          </a:p>
+        </p:txBody>
+      </p:sp>
+      <p:sp>
+        <p:nvSpPr>
+          <p:cNvPr id="4" name="Slide Image Placeholder 3"/>
+          <p:cNvSpPr>
+            <a:spLocks noGrp="1" noRot="1" noChangeAspect="1"/>
+          </p:cNvSpPr>
+          <p:nvPr>
+            <p:ph type="sldImg" idx="2"/>
+          </p:nvPr>
+        </p:nvSpPr>
+        <p:spPr>
+          <a:xfrm>
+            <a:off x="685800" y="1143000"/>
+            <a:ext cx="5486400" cy="3086100"/>
+          </a:xfrm>
+          <a:prstGeom prst="rect">
+            <a:avLst/>
+          </a:prstGeom>
+          <a:noFill/>
+          <a:ln w="12700">
+            <a:solidFill>
+              <a:prstClr val="black"/>
+            </a:solidFill>
+          </a:ln>
+        </p:spPr>
+        <p:txBody>
+          <a:bodyPr vert="horz" lIns="91440" tIns="45720" rIns="91440" bIns="45720" rtlCol="0" anchor="ctr"/>
+          <a:lstStyle/>
+          <a:p>
+            <a:endParaRPr lang="en-US"/>
+          </a:p>
+        </p:txBody>
+      </p:sp>
+      <p:sp>
+        <p:nvSpPr>
+          <p:cNvPr id="5" name="Notes Placeholder 4"/>
+          <p:cNvSpPr>
+            <a:spLocks noGrp="1"/>
+          </p:cNvSpPr>
+          <p:nvPr>
+            <p:ph type="body" sz="quarter" idx="3"/>
+          </p:nvPr>
+        </p:nvSpPr>
+        <p:spPr>
+          <a:xfrm>
+            <a:off x="685800" y="4400550"/>
+            <a:ext cx="5486400" cy="3600450"/>
+          </a:xfrm>
+          <a:prstGeom prst="rect">
+            <a:avLst/>
+          </a:prstGeom>
+        </p:spPr>
+        <p:txBody>
+          <a:bodyPr vert="horz" lIns="91440" tIns="45720" rIns="91440" bIns="45720" rtlCol="0"/>
+          <a:lstStyle/>
+          <a:p>
+            <a:pPr lvl="0"/>
+            <a:r>
+              <a:rPr lang="en-US"/>
+              <a:t>Click to edit Master text styles</a:t>
+            </a:r>
+          </a:p>
+          <a:p>
+            <a:pPr lvl="1"/>
+            <a:r>
+              <a:rPr lang="en-US"/>
+              <a:t>Second level</a:t>
+            </a:r>
+          </a:p>
+          <a:p>
+            <a:pPr lvl="2"/>
+            <a:r>
+              <a:rPr lang="en-US"/>
+              <a:t>Third level</a:t>
+            </a:r>
+          </a:p>
+          <a:p>
+            <a:pPr lvl="3"/>
+            <a:r>
+              <a:rPr lang="en-US"/>
+              <a:t>Fourth level</a:t>
+            </a:r>
+          </a:p>
+          <a:p>
+            <a:pPr lvl="4"/>
+            <a:r>
+              <a:rPr lang="en-US"/>
+              <a:t>Fifth level</a:t>
+            </a:r>
+          </a:p>
+        </p:txBody>
+      </p:sp>
+      <p:sp>
+        <p:nvSpPr>
+          <p:cNvPr id="6" name="Footer Placeholder 5"/>
+          <p:cNvSpPr>
+            <a:spLocks noGrp="1"/>
+          </p:cNvSpPr>
+          <p:nvPr>
+            <p:ph type="ftr" sz="quarter" idx="4"/>
+          </p:nvPr>
+        </p:nvSpPr>
+        <p:spPr>
+          <a:xfrm>
+            <a:off x="0" y="8685213"/>
+            <a:ext cx="2971800" cy="458787"/>
+          </a:xfrm>
+          <a:prstGeom prst="rect">
+            <a:avLst/>
+          </a:prstGeom>
+        </p:spPr>
+        <p:txBody>
+          <a:bodyPr vert="horz" lIns="91440" tIns="45720" rIns="91440" bIns="45720" rtlCol="0" anchor="b"/>
+          <a:lstStyle>
+            <a:lvl1pPr algn="l">
+              <a:defRPr sz="1200"/>
+            </a:lvl1pPr>
+          </a:lstStyle>
+          <a:p>
+            <a:endParaRPr lang="en-US"/>
+          </a:p>
+        </p:txBody>
+      </p:sp>
+      <p:sp>
+        <p:nvSpPr>
+          <p:cNvPr id="7" name="Slide Number Placeholder 6"/>
+          <p:cNvSpPr>
+            <a:spLocks noGrp="1"/>
+          </p:cNvSpPr>
+          <p:nvPr>
+            <p:ph type="sldNum" sz="quarter" idx="5"/>
+          </p:nvPr>
+        </p:nvSpPr>
+        <p:spPr>
+          <a:xfrm>
+            <a:off x="3884613" y="8685213"/>
+            <a:ext cx="2971800" cy="458787"/>
+          </a:xfrm>
+          <a:prstGeom prst="rect">
+            <a:avLst/>
+          </a:prstGeom>
+        </p:spPr>
+        <p:txBody>
+          <a:bodyPr vert="horz" lIns="91440" tIns="45720" rIns="91440" bIns="45720" rtlCol="0" anchor="b"/>
+          <a:lstStyle>
+            <a:lvl1pPr algn="r">
+              <a:defRPr sz="1200"/>
+            </a:lvl1pPr>
+          </a:lstStyle>
+          <a:p>
+            <a:fld id="{CE5E9CC1-C706-0F49-92D6-E571CC5EEA8F}" type="slidenum">
+              <a:rPr lang="en-US"/>
+              <a:t>‹#›</a:t>
+            </a:fld>
+            <a:endParaRPr lang="en-US"/>
+          </a:p>
+        </p:txBody>
+      </p:sp>
     </p:spTree>
     <p:extLst>
       <p:ext uri="{BB962C8B-B14F-4D97-AF65-F5344CB8AC3E}">
-        <p14:creationId xmlns:p14="http://schemas.microsoft.com/office/powerpoint/2010/main" val="1624327852"/>
+        <p14:creationId xmlns:p14="http://schemas.microsoft.com/office/powerpoint/2010/main" val="1024086991"/>
       </p:ext>
     </p:extLst>
   </p:cSld>
@@ -337,10 +561,11 @@
             <a:r>
               <a:rPr lang="en-US" dirty="0"/>
               <a:t>TIME 0:00–0:15 (15 s) in the 5-minute run
-[0:00] THIEN GEN
-SAY: “Hi, we are [team name]. I’m Thien Gen, this is Steven. Teduh is Malay for shaded or sheltered. Our track is Planet, focus climate resilience.”
+[0:00] STEVEN
+SAY: “Hi, we are Team One. I’m Steven, this is Thien Gen. Teduh is Malay for shaded or sheltered. Our track is Planet, focus climate resilience.”
 DO: Deck on the cover slide.</a:t>
             </a:r>
+            <a:endParaRPr lang="en-US" dirty="0"/>
           </a:p>
         </p:txBody>
       </p:sp>
@@ -427,10 +652,11 @@
             <a:r>
               <a:rPr lang="en-US" dirty="0"/>
               <a:t>TIME 4:45–5:00 (15 s) in the 5-minute run
-[4:45] THIEN GEN
+[4:45] STEVEN
 SAY: “Our ask: one SDP township to pilot, a landscape contact and a small budget line. Survey, build, measure in six months. Thank you.”
 DO: Next slide: Implementation. Stop at 5:00.</a:t>
             </a:r>
+            <a:endParaRPr lang="en-US" dirty="0"/>
           </a:p>
         </p:txBody>
       </p:sp>
@@ -518,6 +744,7 @@
               <a:rPr lang="en-US" dirty="0"/>
               <a:t>Backup material for Q&amp;A, not part of the 5-minute run. If the live demo fails, use the screen slides that follow to tell the same story.</a:t>
             </a:r>
+            <a:endParaRPr lang="en-US" dirty="0"/>
           </a:p>
         </p:txBody>
       </p:sp>
@@ -604,15 +831,16 @@
             <a:r>
               <a:rPr lang="en-US" dirty="0"/>
               <a:t>10-MINUTE VERSION (14 Nov, if Top 10)
-Same opening and close as Part A. Slow the demo down and add these after the AI scan step. Do the Ara Damansara lookup once the evening before in the same browser: it is saved there, so on the day you can pick it from the Area dropdown if the Wi-Fi is slow.
-[3:45] STEVEN: “Time of day matters.”  DO: 1 Map &amp; routes: drag Time of day from 2 pm to 5 pm and back. Exposed paths change.
-[4:15] STEVEN: “Managers know their site. They can place their own.”  DO: 2 Plan builder → Plant a tree row → click 2–3 connected paths on the map → Add. It is priced and scored like the others.
-[5:00] THIEN GEN: “A written summary for the manager, built only from the numbers on screen.”  DO: Steven: 4 AI scan → Explain this plan (about 20 s). A TEMPLATE badge means the model’s text was rejected for inventing a figure; say so, it is a safeguard.
-[5:30] STEVEN: “And it works on SDP’s own township.”  DO: Look up a place → Ara Damansara → Search → pick Petaling Jaya, Petaling, Selangor. About 40 s while Thien Gen covers How it works. Then click the Demo button for Ara Damansara.
-[6:30] BOTH: “Change the budget, untick a candidate, prioritise the college.”  DO: Hand the mouse to a judge. Everything recalculates instantly.
-[7:30] THIEN GEN: Impact, Innovation, Feasibility and Implementation slides, about 40 s each.
-[10:00] BOTH: End. Q&amp;A.</a:t>
-            </a:r>
+Same split: Steven presents, Thien Gen demos. Same opening as Part A; Thien Gen’s demo runs longer, adding these after the AI scan step (at 3:35 Thien Gen carries on instead of handing back), and Steven takes back at 7:30. Do the Ara Damansara lookup once the evening before in the same browser: it is saved there, so on the day you can pick it from the Area dropdown if the Wi-Fi is slow.
+[3:45] THIEN GEN: “Time of day matters.”  DO: 1 Map &amp; routes: drag Time of day from 2 pm to 5 pm and back. Exposed paths change.
+[4:15] THIEN GEN: “Managers know their site. They can place their own.”  DO: 2 Plan builder → Plant a tree row → click 2–3 connected paths on the map → Add. It is priced and scored like the others.
+[5:00] THIEN GEN: “A written summary for the manager, built only from the numbers on screen.”  DO: 4 AI scan → Explain this plan (about 20 s). A TEMPLATE badge means the model’s text was rejected for inventing a figure; say so, it is a safeguard.
+[5:30] THIEN GEN: “And it works on SDP’s own township.”  DO: Look up a place → Ara Damansara → Search → pick Petaling Jaya, Petaling, Selangor. About 40 s: talk over it (“it is downloading streets, buildings and bus stops from OpenStreetMap and running the same model”). Then click the Demo button for Ara Damansara.
+[6:30] THIEN GEN: “Change the budget, untick a candidate, prioritise the college.”  DO: Hand the mouse to a judge. Everything recalculates instantly. At 7:25 say “Back to Steven”, Alt+Tab to the deck and hand back.
+[7:30] STEVEN: How it works, Impact, Innovation, Feasibility and Implementation slides, about 30 s each.  DO: Advance the slides.
+[10:00] STEVEN: “Thank you. We’re happy to take questions.” Q&amp;A: Thien Gen takes the technical ones.</a:t>
+            </a:r>
+            <a:endParaRPr lang="en-US" dirty="0"/>
           </a:p>
         </p:txBody>
       </p:sp>
@@ -700,6 +928,7 @@
               <a:rPr lang="en-US" dirty="0"/>
               <a:t>Use in Q&amp;A when judges ask how accurate it is. Key line: every number in the app carries a label (surveyed, estimated, AI-confirmed or missing), and the pilot is designed to replace estimates with measurements.</a:t>
             </a:r>
+            <a:endParaRPr lang="en-US" dirty="0"/>
           </a:p>
         </p:txBody>
       </p:sp>
@@ -787,6 +1016,7 @@
               <a:rPr lang="en-US" dirty="0"/>
               <a:t>Backup for the spec pack step (2:55) if the live demo fails.</a:t>
             </a:r>
+            <a:endParaRPr lang="en-US" dirty="0"/>
           </a:p>
         </p:txBody>
       </p:sp>
@@ -874,6 +1104,7 @@
               <a:rPr lang="en-US" dirty="0"/>
               <a:t>Backup for the AI scan step (3:15) if the live demo fails.</a:t>
             </a:r>
+            <a:endParaRPr lang="en-US" dirty="0"/>
           </a:p>
         </p:txBody>
       </p:sp>
@@ -961,6 +1192,7 @@
               <a:rPr lang="en-US" dirty="0"/>
               <a:t>Backup for the Future and Grow step (2:30) if the live demo fails.</a:t>
             </a:r>
+            <a:endParaRPr lang="en-US" dirty="0"/>
           </a:p>
         </p:txBody>
       </p:sp>
@@ -1048,6 +1280,7 @@
               <a:rPr lang="en-US" dirty="0"/>
               <a:t>Reference slide. No need to present.</a:t>
             </a:r>
+            <a:endParaRPr lang="en-US" dirty="0"/>
           </a:p>
         </p:txBody>
       </p:sp>
@@ -1134,11 +1367,12 @@
             <a:r>
               <a:rPr lang="en-US" dirty="0"/>
               <a:t>TIME 0:15–0:50 (35 s) in the 5-minute run
-[0:15] THIEN GEN
+[0:15] STEVEN
 SAY: “Picture SS 15 in Subang Jaya at 2 pm. About 5,000 people leave the LRT station on a weekday; that is real Prasarana ticket-gate data. Our model sends about 590 of them a day to the mall next door, and on that walk there’s a 218-metre stretch with no shade at all. The township has trees and footpaths. The problem is the gaps between them, and a manager with a small budget can’t see which gap matters most.”
 DO: Next slide: Problem.
 CHECK: ◆592 and ◆218 m on the slide</a:t>
             </a:r>
+            <a:endParaRPr lang="en-US" dirty="0"/>
           </a:p>
         </p:txBody>
       </p:sp>
@@ -1225,10 +1459,11 @@
             <a:r>
               <a:rPr lang="en-US" dirty="0"/>
               <a:t>TIME 0:50–1:10 (20 s) in the 5-minute run
-[0:50] THIEN GEN
+[0:50] STEVEN
 SAY: “Our user is the person who holds the budget: the township manager. The landscape team builds it, and residents on foot benefit.”
 DO: Next slide: Target user.</a:t>
             </a:r>
+            <a:endParaRPr lang="en-US" dirty="0"/>
           </a:p>
         </p:txBody>
       </p:sp>
@@ -1316,10 +1551,10 @@
               <a:rPr lang="en-US" dirty="0"/>
               <a:t>TIME 1:10–1:30 (20 s) in the 5-minute run
 [1:10] STEVEN
-SAY: “Teduh answers one question: with this budget, which shade helps the most walks? It recommends trees and covered walkways, shows before and after, and hands off a build pack. Let me show you.”
-DO: Next slide: Solution, then the Live demo slide. Alt+Tab to the app.
-CHECK: The app, on 1 Map &amp; routes</a:t>
-            </a:r>
+SAY: “Teduh answers one question: with this budget, which shade helps the most walks? It recommends trees and covered walkways, shows before and after, and hands off a build pack. Thien Gen will show you on a real township.”
+DO: Next slide: Solution, then the Live demo slide. Move aside; Thien Gen takes the keyboard.</a:t>
+            </a:r>
+            <a:endParaRPr lang="en-US" dirty="0"/>
           </a:p>
         </p:txBody>
       </p:sp>
@@ -1406,44 +1641,46 @@
             <a:r>
               <a:rPr lang="en-US" dirty="0"/>
               <a:t>TIME 1:30–3:45 (135 s) in the 5-minute run
-[1:30] STEVEN
-SAY: “This is the real SS 15. Streets and buildings are from OpenStreetMap. Here is the 2 pm walk from the LRT station to the mall.”
-DO: Left panel: click Demo: 2 pm walk from the LRT station to the shopping mall.
+[1:30] THIEN GEN
+SAY: “Thanks, Steven. This is the real SS 15. Streets and buildings are from OpenStreetMap. Here is the 2 pm walk from the LRT station to the mall.”
+DO: Alt+Tab to the app. Left panel: click Demo: 2 pm walk from the LRT station to the shopping mall.
 CHECK: Headline ◆12.7. Under Journeys: LRT station → Shopping mall, “sun 3.0 → 1.9 min · exposed 218 → 149 m”
-[1:45] STEVEN
+[1:45] THIEN GEN
 SAY: “With RM 100,000, Teduh tried every affordable combination and recommends one covered walkway and two tree rows, for RM 94,100. The walkway from the station on Jengka Avenue does most of the work.”
 DO: Top bar: 2 Plan builder. Point at the Best card, then scroll to What each one adds.
 CHECK: Best: 1 covered walkway + 2 tree rows, RM ◆94,100 · ◆12.7. Walkway ◆539 min/day
-[2:05] STEVEN
+[2:05] THIEN GEN
 SAY: “Before on the left, after on the right.”
 DO: On the map, drag the round ⇄ handle from the middle to the left, slowly, past the LRT station marker.
 CHECK: Amber dashed paths by the station turn solid green
 [2:20] THIEN GEN
 SAY: “That’s the key idea: one walkway on a shared stretch helps the mall, the college and the clinic walks at once.”
-DO: Steven keeps the mouse still.
-[2:30] STEVEN
+DO: Keep the mouse still on the walkway.
+[2:30] THIEN GEN
 SAY: “Trees take years; a walkway works on day one. Let’s grow them ten years.”
 DO: Top of the map: Future, then Grow. Wait about 5 s for Year 10.
 CHECK: Best plan flips to 5 tree rows, RM ◆51,700 · ◆26.5
 [2:50] THIEN GEN
 SAY: “Twice the benefit for about half the money, if you can wait, and if the trees grow as modelled.”
-[2:55] STEVEN
+[2:55] THIEN GEN
 SAY: “Every item comes with a spec pack a contractor can quote from.”
 DO: Click Now. Left panel, under Candidates: Details next to Covered walkway from the LRT station on Jengka Avenue (69 m).
 CHECK: 3 Spec pack: ◆69 m, RM ◆79,000, drawing, bill of materials, Download CSV
-[3:15] STEVEN
+[3:15] THIEN GEN
 SAY: “OpenStreetMap has almost no trees mapped here, so our shade is a model. A survey photo fills that gap. A vision model running on this laptop estimates the shade, and nothing reaches the map until a person confirms it.”
 DO: 4 AI scan. Path segment already reads Jengka Avenue (Main road) · seg-116. Choose File → photo → Estimate shade.
 CHECK: “Estimating…” for about 10 s
 [3:25] THIEN GEN
 SAY: Talk over the wait: “Photos stay on this laptop, and there’s no cloud cost per photo.”
 CHECK: “AI estimate: N% shaded”, “Estimated by a local model (qwen2.5vl:7b)”
-[3:35] STEVEN
-SAY: “I’ll check it against the photo, adjust, and confirm.”
-DO: Drag Your value if needed, then Confirm and apply to map.
+[3:35] THIEN GEN
+SAY: “I’ll check it against the photo, adjust, and confirm. Back to Steven.”
+DO: Drag Your value if needed, then Confirm and apply to map. Alt+Tab back to the deck and hand the keyboard back.
 CHECK: “Applied … as AI-CONFIRMED”. The headline may drop: see the note below
-If the headline drops after Confirm (for example 12.7 → 7.9), that is correct: the photo says the walkway’s path already has some shade, so the walkway is worth less. With time to spare, say: “One photo changed the decision. That’s why the survey matters.” Before the next run, click Undo all, or the Demo button again.</a:t>
-            </a:r>
+If the headline drops after Confirm (for example 12.7 → 7.9), that is correct: the photo says the walkway’s path already has some shade, so the walkway is worth less. With time to spare, say: “One photo changed the decision. That’s why the survey matters.” Before the next run, click Undo all, or the Demo button again.
+HANDOVER: One laptop. Steven sits at the keyboard and advances the slides (arrow keys or a clicker). At 1:30 Thien Gen takes the mouse and keyboard and Alt+Tabs to the app. At 3:40 Thien Gen Alt+Tabs back to the deck and hands back. Steven stays silent during the demo; Thien Gen stays silent during the slides.</a:t>
+            </a:r>
+            <a:endParaRPr lang="en-US" dirty="0"/>
           </a:p>
         </p:txBody>
       </p:sp>
@@ -1532,8 +1769,9 @@
               <a:t>TIME 3:45–4:05 (20 s) in the 5-minute run
 [3:45] STEVEN
 SAY: “Under the hood: open map data, the real sun position, real station counts, and a score anyone can inspect: hours walked in direct sun, avoided.”
-DO: Alt+Tab to the deck: How it works.</a:t>
-            </a:r>
+DO: Next slide: How it works.</a:t>
+            </a:r>
+            <a:endParaRPr lang="en-US" dirty="0"/>
           </a:p>
         </p:txBody>
       </p:sp>
@@ -1620,10 +1858,11 @@
             <a:r>
               <a:rPr lang="en-US" dirty="0"/>
               <a:t>TIME 4:05–4:20 (15 s) in the 5-minute run
-[4:05] THIEN GEN
+[4:05] STEVEN
 SAY: “In this scenario, RM 94,000 takes 12.7 pedestrian-hours a day out of direct sun. These are model estimates; a pilot measures the real effect.”
 DO: Next slide: Impact.</a:t>
             </a:r>
+            <a:endParaRPr lang="en-US" dirty="0"/>
           </a:p>
         </p:txBody>
       </p:sp>
@@ -1710,10 +1949,11 @@
             <a:r>
               <a:rPr lang="en-US" dirty="0"/>
               <a:t>TIME 4:20–4:30 (10 s) in the 5-minute run
-[4:20] THIEN GEN
+[4:20] STEVEN
 SAY: “Routing apps like Singapore’s Undercover help a walker. Teduh helps a township decide what to build.”
 DO: Next slide: Innovation.</a:t>
             </a:r>
+            <a:endParaRPr lang="en-US" dirty="0"/>
           </a:p>
         </p:txBody>
       </p:sp>
@@ -1801,9 +2041,10 @@
               <a:rPr lang="en-US" dirty="0"/>
               <a:t>TIME 4:30–4:45 (15 s) in the 5-minute run
 [4:30] STEVEN
-SAY: “It already runs on 15 Klang Valley areas and any other place in about 40 seconds: this is SDP’s Ara Damansara.”
+SAY: “It already runs on 15 Klang Valley areas and any other place in about 40 seconds: this is SDP’s own Ara Damansara.”
 DO: Next slide: Feasibility.</a:t>
             </a:r>
+            <a:endParaRPr lang="en-US" dirty="0"/>
           </a:p>
         </p:txBody>
       </p:sp>
@@ -1881,7 +2122,6 @@
         <a:solidFill>
           <a:schemeClr val="bg2"/>
         </a:solidFill>
-        <a:effectLst/>
       </p:bgPr>
     </p:bg>
     <p:spTree>
@@ -1901,11 +2141,9 @@
       <p:sp>
         <p:nvSpPr>
           <p:cNvPr id="2" name="Text 0"/>
-          <p:cNvSpPr>
-            <a:spLocks noGrp="1"/>
-          </p:cNvSpPr>
+          <p:cNvSpPr/>
           <p:nvPr>
-            <p:ph type="body" idx="100" hasCustomPrompt="1"/>
+            <p:ph idx="100" type="body" hasCustomPrompt="1"/>
           </p:nvPr>
         </p:nvSpPr>
         <p:spPr>
@@ -1922,7 +2160,7 @@
         <p:txBody>
           <a:bodyPr wrap="square" rtlCol="0"/>
           <a:lstStyle>
-            <a:lvl1pPr marL="0" indent="0" algn="l">
+            <a:lvl1pPr algn="l" indent="0" marL="0">
               <a:buNone/>
               <a:defRPr lang="en-US" sz="1200" b="1" dirty="0">
                 <a:solidFill>
@@ -1932,7 +2170,7 @@
             </a:lvl1pPr>
           </a:lstStyle>
           <a:p>
-            <a:pPr marL="0" indent="0" algn="l">
+            <a:pPr algn="l" indent="0" marL="0">
               <a:buNone/>
             </a:pPr>
             <a:endParaRPr lang="en-US" sz="1200" dirty="0"/>
@@ -1942,11 +2180,9 @@
       <p:sp>
         <p:nvSpPr>
           <p:cNvPr id="3" name="Text 0"/>
-          <p:cNvSpPr>
-            <a:spLocks noGrp="1"/>
-          </p:cNvSpPr>
+          <p:cNvSpPr/>
           <p:nvPr>
-            <p:ph type="title" idx="101" hasCustomPrompt="1"/>
+            <p:ph idx="101" type="title" hasCustomPrompt="1"/>
           </p:nvPr>
         </p:nvSpPr>
         <p:spPr>
@@ -1963,7 +2199,7 @@
         <p:txBody>
           <a:bodyPr wrap="square" rtlCol="0"/>
           <a:lstStyle>
-            <a:lvl1pPr marL="0" indent="0" algn="l">
+            <a:lvl1pPr algn="l" indent="0" marL="0">
               <a:buNone/>
               <a:defRPr lang="en-US" sz="3400" b="1" dirty="0">
                 <a:solidFill>
@@ -1973,7 +2209,7 @@
             </a:lvl1pPr>
           </a:lstStyle>
           <a:p>
-            <a:pPr marL="0" indent="0" algn="l">
+            <a:pPr algn="l" indent="0" marL="0">
               <a:buNone/>
             </a:pPr>
             <a:endParaRPr lang="en-US" sz="3400" dirty="0"/>
@@ -2000,7 +2236,7 @@
           </a:prstGeom>
           <a:extLst>
             <a:ext uri="{C572A759-6A51-4108-AA02-DFA0A04FC94B}">
-              <ma14:wrappingTextBoxFlag xmlns:ma14="http://schemas.microsoft.com/office/mac/drawingml/2011/main" xmlns="" val="0"/>
+              <ma14:wrappingTextBoxFlag xmlns:ma14="http://schemas.microsoft.com/office/mac/drawingml/2011/main" val="0"/>
             </a:ext>
           </a:extLst>
         </p:spPr>
@@ -2018,8 +2254,8 @@
           <a:p>
             <a:pPr algn="r"/>
             <a:fld id="{F7021451-1387-4CA6-816F-3879F97B5CBC}" type="slidenum">
-              <a:rPr lang="en-US" b="0"/>
-              <a:t>‹#›</a:t>
+              <a:rPr b="0" lang="en-US"/>
+              <a:t>1002</a:t>
             </a:fld>
             <a:endParaRPr lang="en-US"/>
           </a:p>
@@ -2041,7 +2277,6 @@
         <a:solidFill>
           <a:schemeClr val="accent5"/>
         </a:solidFill>
-        <a:effectLst/>
       </p:bgPr>
     </p:bg>
     <p:spTree>
@@ -2061,11 +2296,9 @@
       <p:sp>
         <p:nvSpPr>
           <p:cNvPr id="2" name="Text 0"/>
-          <p:cNvSpPr>
-            <a:spLocks noGrp="1"/>
-          </p:cNvSpPr>
+          <p:cNvSpPr/>
           <p:nvPr>
-            <p:ph type="body" idx="100" hasCustomPrompt="1"/>
+            <p:ph idx="100" type="body" hasCustomPrompt="1"/>
           </p:nvPr>
         </p:nvSpPr>
         <p:spPr>
@@ -2082,7 +2315,7 @@
         <p:txBody>
           <a:bodyPr wrap="square" rtlCol="0"/>
           <a:lstStyle>
-            <a:lvl1pPr marL="0" indent="0" algn="l">
+            <a:lvl1pPr algn="l" indent="0" marL="0">
               <a:buNone/>
               <a:defRPr lang="en-US" sz="1200" b="1" dirty="0">
                 <a:solidFill>
@@ -2092,7 +2325,7 @@
             </a:lvl1pPr>
           </a:lstStyle>
           <a:p>
-            <a:pPr marL="0" indent="0" algn="l">
+            <a:pPr algn="l" indent="0" marL="0">
               <a:buNone/>
             </a:pPr>
             <a:endParaRPr lang="en-US" sz="1200" dirty="0"/>
@@ -2102,11 +2335,9 @@
       <p:sp>
         <p:nvSpPr>
           <p:cNvPr id="3" name="Text 0"/>
-          <p:cNvSpPr>
-            <a:spLocks noGrp="1"/>
-          </p:cNvSpPr>
+          <p:cNvSpPr/>
           <p:nvPr>
-            <p:ph type="title" idx="101" hasCustomPrompt="1"/>
+            <p:ph idx="101" type="title" hasCustomPrompt="1"/>
           </p:nvPr>
         </p:nvSpPr>
         <p:spPr>
@@ -2123,7 +2354,7 @@
         <p:txBody>
           <a:bodyPr wrap="square" rtlCol="0"/>
           <a:lstStyle>
-            <a:lvl1pPr marL="0" indent="0" algn="l">
+            <a:lvl1pPr algn="l" indent="0" marL="0">
               <a:buNone/>
               <a:defRPr lang="en-US" sz="3400" b="1" dirty="0">
                 <a:solidFill>
@@ -2133,7 +2364,7 @@
             </a:lvl1pPr>
           </a:lstStyle>
           <a:p>
-            <a:pPr marL="0" indent="0" algn="l">
+            <a:pPr algn="l" indent="0" marL="0">
               <a:buNone/>
             </a:pPr>
             <a:endParaRPr lang="en-US" sz="3400" dirty="0"/>
@@ -2160,7 +2391,7 @@
           </a:prstGeom>
           <a:extLst>
             <a:ext uri="{C572A759-6A51-4108-AA02-DFA0A04FC94B}">
-              <ma14:wrappingTextBoxFlag xmlns:ma14="http://schemas.microsoft.com/office/mac/drawingml/2011/main" xmlns="" val="0"/>
+              <ma14:wrappingTextBoxFlag xmlns:ma14="http://schemas.microsoft.com/office/mac/drawingml/2011/main" val="0"/>
             </a:ext>
           </a:extLst>
         </p:spPr>
@@ -2178,8 +2409,8 @@
           <a:p>
             <a:pPr algn="r"/>
             <a:fld id="{F7021451-1387-4CA6-816F-3879F97B5CBC}" type="slidenum">
-              <a:rPr lang="en-US" b="0"/>
-              <a:t>‹#›</a:t>
+              <a:rPr b="0" lang="en-US"/>
+              <a:t>1003</a:t>
             </a:fld>
             <a:endParaRPr lang="en-US"/>
           </a:p>
@@ -2201,7 +2432,6 @@
         <a:solidFill>
           <a:schemeClr val="tx1"/>
         </a:solidFill>
-        <a:effectLst/>
       </p:bgPr>
     </p:bg>
     <p:spTree>
@@ -2221,11 +2451,9 @@
       <p:sp>
         <p:nvSpPr>
           <p:cNvPr id="2" name="Text 0"/>
-          <p:cNvSpPr>
-            <a:spLocks noGrp="1"/>
-          </p:cNvSpPr>
+          <p:cNvSpPr/>
           <p:nvPr>
-            <p:ph type="body" idx="100" hasCustomPrompt="1"/>
+            <p:ph idx="100" type="body" hasCustomPrompt="1"/>
           </p:nvPr>
         </p:nvSpPr>
         <p:spPr>
@@ -2242,7 +2470,7 @@
         <p:txBody>
           <a:bodyPr wrap="square" rtlCol="0"/>
           <a:lstStyle>
-            <a:lvl1pPr marL="0" indent="0" algn="l">
+            <a:lvl1pPr algn="l" indent="0" marL="0">
               <a:buNone/>
               <a:defRPr lang="en-US" sz="1200" b="1" dirty="0">
                 <a:solidFill>
@@ -2252,7 +2480,7 @@
             </a:lvl1pPr>
           </a:lstStyle>
           <a:p>
-            <a:pPr marL="0" indent="0" algn="l">
+            <a:pPr algn="l" indent="0" marL="0">
               <a:buNone/>
             </a:pPr>
             <a:endParaRPr lang="en-US" sz="1200" dirty="0"/>
@@ -2262,11 +2490,9 @@
       <p:sp>
         <p:nvSpPr>
           <p:cNvPr id="3" name="Text 0"/>
-          <p:cNvSpPr>
-            <a:spLocks noGrp="1"/>
-          </p:cNvSpPr>
+          <p:cNvSpPr/>
           <p:nvPr>
-            <p:ph type="title" idx="101" hasCustomPrompt="1"/>
+            <p:ph idx="101" type="title" hasCustomPrompt="1"/>
           </p:nvPr>
         </p:nvSpPr>
         <p:spPr>
@@ -2283,7 +2509,7 @@
         <p:txBody>
           <a:bodyPr wrap="square" rtlCol="0"/>
           <a:lstStyle>
-            <a:lvl1pPr marL="0" indent="0" algn="l">
+            <a:lvl1pPr algn="l" indent="0" marL="0">
               <a:buNone/>
               <a:defRPr lang="en-US" sz="3400" b="1" dirty="0">
                 <a:solidFill>
@@ -2293,7 +2519,7 @@
             </a:lvl1pPr>
           </a:lstStyle>
           <a:p>
-            <a:pPr marL="0" indent="0" algn="l">
+            <a:pPr algn="l" indent="0" marL="0">
               <a:buNone/>
             </a:pPr>
             <a:endParaRPr lang="en-US" sz="3400" dirty="0"/>
@@ -2320,7 +2546,7 @@
           </a:prstGeom>
           <a:extLst>
             <a:ext uri="{C572A759-6A51-4108-AA02-DFA0A04FC94B}">
-              <ma14:wrappingTextBoxFlag xmlns:ma14="http://schemas.microsoft.com/office/mac/drawingml/2011/main" xmlns="" val="0"/>
+              <ma14:wrappingTextBoxFlag xmlns:ma14="http://schemas.microsoft.com/office/mac/drawingml/2011/main" val="0"/>
             </a:ext>
           </a:extLst>
         </p:spPr>
@@ -2338,8 +2564,8 @@
           <a:p>
             <a:pPr algn="r"/>
             <a:fld id="{F7021451-1387-4CA6-816F-3879F97B5CBC}" type="slidenum">
-              <a:rPr lang="en-US" b="0"/>
-              <a:t>‹#›</a:t>
+              <a:rPr b="0" lang="en-US"/>
+              <a:t>1004</a:t>
             </a:fld>
             <a:endParaRPr lang="en-US"/>
           </a:p>
@@ -2361,7 +2587,6 @@
         <a:solidFill>
           <a:schemeClr val="accent1"/>
         </a:solidFill>
-        <a:effectLst/>
       </p:bgPr>
     </p:bg>
     <p:spTree>
@@ -2381,11 +2606,9 @@
       <p:sp>
         <p:nvSpPr>
           <p:cNvPr id="2" name="Text 0"/>
-          <p:cNvSpPr>
-            <a:spLocks noGrp="1"/>
-          </p:cNvSpPr>
+          <p:cNvSpPr/>
           <p:nvPr>
-            <p:ph type="body" idx="100" hasCustomPrompt="1"/>
+            <p:ph idx="100" type="body" hasCustomPrompt="1"/>
           </p:nvPr>
         </p:nvSpPr>
         <p:spPr>
@@ -2402,7 +2625,7 @@
         <p:txBody>
           <a:bodyPr wrap="square" rtlCol="0"/>
           <a:lstStyle>
-            <a:lvl1pPr marL="0" indent="0" algn="l">
+            <a:lvl1pPr algn="l" indent="0" marL="0">
               <a:buNone/>
               <a:defRPr lang="en-US" sz="1600" b="1" dirty="0">
                 <a:solidFill>
@@ -2412,7 +2635,7 @@
             </a:lvl1pPr>
           </a:lstStyle>
           <a:p>
-            <a:pPr marL="0" indent="0" algn="l">
+            <a:pPr algn="l" indent="0" marL="0">
               <a:buNone/>
             </a:pPr>
             <a:endParaRPr lang="en-US" sz="1600" dirty="0"/>
@@ -2422,11 +2645,9 @@
       <p:sp>
         <p:nvSpPr>
           <p:cNvPr id="3" name="Text 0"/>
-          <p:cNvSpPr>
-            <a:spLocks noGrp="1"/>
-          </p:cNvSpPr>
+          <p:cNvSpPr/>
           <p:nvPr>
-            <p:ph type="title" idx="101" hasCustomPrompt="1"/>
+            <p:ph idx="101" type="title" hasCustomPrompt="1"/>
           </p:nvPr>
         </p:nvSpPr>
         <p:spPr>
@@ -2443,7 +2664,7 @@
         <p:txBody>
           <a:bodyPr wrap="square" rtlCol="0"/>
           <a:lstStyle>
-            <a:lvl1pPr marL="0" indent="0" algn="l">
+            <a:lvl1pPr algn="l" indent="0" marL="0">
               <a:buNone/>
               <a:defRPr lang="en-US" sz="5400" b="1" dirty="0">
                 <a:solidFill>
@@ -2453,7 +2674,7 @@
             </a:lvl1pPr>
           </a:lstStyle>
           <a:p>
-            <a:pPr marL="0" indent="0" algn="l">
+            <a:pPr algn="l" indent="0" marL="0">
               <a:buNone/>
             </a:pPr>
             <a:endParaRPr lang="en-US" sz="5400" dirty="0"/>
@@ -2480,7 +2701,7 @@
           </a:prstGeom>
           <a:extLst>
             <a:ext uri="{C572A759-6A51-4108-AA02-DFA0A04FC94B}">
-              <ma14:wrappingTextBoxFlag xmlns:ma14="http://schemas.microsoft.com/office/mac/drawingml/2011/main" xmlns="" val="0"/>
+              <ma14:wrappingTextBoxFlag xmlns:ma14="http://schemas.microsoft.com/office/mac/drawingml/2011/main" val="0"/>
             </a:ext>
           </a:extLst>
         </p:spPr>
@@ -2498,8 +2719,8 @@
           <a:p>
             <a:pPr algn="r"/>
             <a:fld id="{F7021451-1387-4CA6-816F-3879F97B5CBC}" type="slidenum">
-              <a:rPr lang="en-US" b="0"/>
-              <a:t>‹#›</a:t>
+              <a:rPr b="0" lang="en-US"/>
+              <a:t>1005</a:t>
             </a:fld>
             <a:endParaRPr lang="en-US"/>
           </a:p>
@@ -2516,11 +2737,6 @@
 <file path=ppt/slideMasters/slideMaster1.xml><?xml version="1.0" encoding="utf-8"?>
 <p:sldMaster xmlns:a="http://schemas.openxmlformats.org/drawingml/2006/main" xmlns:r="http://schemas.openxmlformats.org/officeDocument/2006/relationships" xmlns:p="http://schemas.openxmlformats.org/presentationml/2006/main">
   <p:cSld>
-    <p:bg>
-      <p:bgRef idx="1001">
-        <a:schemeClr val="bg1"/>
-      </p:bgRef>
-    </p:bg>
     <p:spTree>
       <p:nvGrpSpPr>
         <p:cNvPr id="1" name=""/>
@@ -2555,7 +2771,7 @@
           </a:prstGeom>
           <a:extLst>
             <a:ext uri="{C572A759-6A51-4108-AA02-DFA0A04FC94B}">
-              <ma14:wrappingTextBoxFlag xmlns:ma14="http://schemas.microsoft.com/office/mac/drawingml/2011/main" xmlns="" val="0"/>
+              <ma14:wrappingTextBoxFlag xmlns:ma14="http://schemas.microsoft.com/office/mac/drawingml/2011/main" val="0"/>
             </a:ext>
           </a:extLst>
         </p:spPr>
@@ -2573,8 +2789,8 @@
           <a:p>
             <a:pPr algn="r"/>
             <a:fld id="{F7021451-1387-4CA6-816F-3879F97B5CBC}" type="slidenum">
-              <a:rPr lang="en-US" b="0"/>
-              <a:t>‹#›</a:t>
+              <a:rPr b="0" lang="en-US"/>
+              <a:t>null</a:t>
             </a:fld>
             <a:endParaRPr lang="en-US"/>
           </a:p>
@@ -2882,11 +3098,11 @@
           <a:bodyPr wrap="square" lIns="0" tIns="0" rIns="0" bIns="0" rtlCol="0" anchor="ctr"/>
           <a:lstStyle/>
           <a:p>
-            <a:pPr marL="0" indent="0">
-              <a:buNone/>
-            </a:pPr>
-            <a:r>
-              <a:rPr lang="en-US" sz="1400" b="1" kern="0" spc="400" dirty="0">
+            <a:pPr indent="0" marL="0">
+              <a:buNone/>
+            </a:pPr>
+            <a:r>
+              <a:rPr lang="en-US" sz="1400" b="1" spc="400" kern="0" dirty="0">
                 <a:solidFill>
                   <a:schemeClr val="accent1"/>
                 </a:solidFill>
@@ -2918,7 +3134,7 @@
           <a:bodyPr wrap="square" lIns="0" tIns="0" rIns="0" bIns="0" rtlCol="0" anchor="ctr"/>
           <a:lstStyle/>
           <a:p>
-            <a:pPr marL="0" indent="0">
+            <a:pPr indent="0" marL="0">
               <a:buNone/>
             </a:pPr>
             <a:r>
@@ -2957,7 +3173,7 @@
           <a:bodyPr wrap="square" lIns="0" tIns="0" rIns="0" bIns="0" rtlCol="0" anchor="ctr"/>
           <a:lstStyle/>
           <a:p>
-            <a:pPr marL="0" indent="0">
+            <a:pPr indent="0" marL="0">
               <a:buNone/>
             </a:pPr>
             <a:r>
@@ -2996,7 +3212,7 @@
           <a:bodyPr wrap="square" lIns="0" tIns="0" rIns="0" bIns="0" rtlCol="0" anchor="ctr"/>
           <a:lstStyle/>
           <a:p>
-            <a:pPr marL="0" indent="0">
+            <a:pPr indent="0" marL="0">
               <a:buNone/>
             </a:pPr>
             <a:r>
@@ -3019,8 +3235,8 @@
         </p:nvSpPr>
         <p:spPr>
           <a:xfrm>
-            <a:off x="548640" y="5577840"/>
-            <a:ext cx="6858000" cy="411480"/>
+            <a:off x="548640" y="5257800"/>
+            <a:ext cx="6858000" cy="731520"/>
           </a:xfrm>
           <a:prstGeom prst="rect">
             <a:avLst/>
@@ -3032,7 +3248,7 @@
           <a:bodyPr wrap="square" lIns="0" tIns="0" rIns="0" bIns="0" rtlCol="0" anchor="ctr"/>
           <a:lstStyle/>
           <a:p>
-            <a:pPr marL="0" indent="0">
+            <a:pPr indent="0" marL="0">
               <a:buNone/>
             </a:pPr>
             <a:r>
@@ -3041,35 +3257,12 @@
                   <a:schemeClr val="bg2"/>
                 </a:solidFill>
               </a:rPr>
-              <a:t>Hong Thien Gen, Evan Lo Jen Zhen</a:t>
-            </a:r>
-            <a:r>
-              <a:rPr lang="en-US" sz="1800" dirty="0">
-                <a:solidFill>
-                  <a:schemeClr val="bg2"/>
-                </a:solidFill>
-              </a:rPr>
-              <a:t> &amp; </a:t>
-            </a:r>
-            <a:r>
-              <a:rPr lang="en-US" sz="1800" b="1" dirty="0">
-                <a:solidFill>
-                  <a:schemeClr val="bg2"/>
-                </a:solidFill>
-              </a:rPr>
-              <a:t>Chang Juan Jue</a:t>
-            </a:r>
-            <a:r>
-              <a:rPr lang="en-US" sz="1800" dirty="0">
-                <a:solidFill>
-                  <a:schemeClr val="bg2"/>
-                </a:solidFill>
-              </a:rPr>
-              <a:t>  </a:t>
-            </a:r>
-          </a:p>
-          <a:p>
-            <a:pPr marL="0" indent="0">
+              <a:t>Hong Thien Gen, Evan Lo Jen Zhen &amp; Chang Juan Jue</a:t>
+            </a:r>
+            <a:endParaRPr lang="en-US" sz="1800" dirty="0"/>
+          </a:p>
+          <a:p>
+            <a:pPr indent="0" marL="0">
               <a:buNone/>
             </a:pPr>
             <a:r>
@@ -3105,7 +3298,7 @@
           <a:bodyPr wrap="square" lIns="0" tIns="0" rIns="0" bIns="0" rtlCol="0" anchor="ctr"/>
           <a:lstStyle/>
           <a:p>
-            <a:pPr marL="0" indent="0" algn="r">
+            <a:pPr algn="r" indent="0" marL="0">
               <a:buNone/>
             </a:pPr>
             <a:r>
@@ -3117,6 +3310,66 @@
               <a:t>Sime Darby Property University Hackathon 2026 · Township of Tomorrow</a:t>
             </a:r>
             <a:endParaRPr lang="en-US" sz="1200" dirty="0"/>
+          </a:p>
+        </p:txBody>
+      </p:sp>
+      <p:sp>
+        <p:nvSpPr>
+          <p:cNvPr id="9" name="Text 0"/>
+          <p:cNvSpPr/>
+          <p:nvPr>
+            <p:ph idx="100" type="body" hasCustomPrompt="1"/>
+          </p:nvPr>
+        </p:nvSpPr>
+        <p:spPr>
+          <a:xfrm>
+            <a:off x="548640" y="411480"/>
+            <a:ext cx="11094415" cy="320040"/>
+          </a:xfrm>
+          <a:prstGeom prst="rect">
+            <a:avLst/>
+          </a:prstGeom>
+          <a:noFill/>
+          <a:ln/>
+        </p:spPr>
+        <p:txBody>
+          <a:bodyPr wrap="square" lIns="0" tIns="0" rIns="0" bIns="0" rtlCol="0" anchor="t"/>
+          <a:lstStyle/>
+          <a:p>
+            <a:pPr algn="l" indent="0" marL="0">
+              <a:buNone/>
+            </a:pPr>
+            <a:endParaRPr lang="en-US" sz="1200" dirty="0"/>
+          </a:p>
+        </p:txBody>
+      </p:sp>
+      <p:sp>
+        <p:nvSpPr>
+          <p:cNvPr id="10" name="Text 0"/>
+          <p:cNvSpPr/>
+          <p:nvPr>
+            <p:ph idx="101" type="title" hasCustomPrompt="1"/>
+          </p:nvPr>
+        </p:nvSpPr>
+        <p:spPr>
+          <a:xfrm>
+            <a:off x="548640" y="749808"/>
+            <a:ext cx="11094415" cy="1097280"/>
+          </a:xfrm>
+          <a:prstGeom prst="rect">
+            <a:avLst/>
+          </a:prstGeom>
+          <a:noFill/>
+          <a:ln/>
+        </p:spPr>
+        <p:txBody>
+          <a:bodyPr wrap="square" lIns="0" tIns="0" rIns="0" bIns="0" rtlCol="0" anchor="t"/>
+          <a:lstStyle/>
+          <a:p>
+            <a:pPr algn="l" indent="0" marL="0">
+              <a:buNone/>
+            </a:pPr>
+            <a:endParaRPr lang="en-US" sz="3400" dirty="0"/>
           </a:p>
         </p:txBody>
       </p:sp>
@@ -3140,7 +3393,7 @@
           </a:prstGeom>
           <a:extLst>
             <a:ext uri="{C572A759-6A51-4108-AA02-DFA0A04FC94B}">
-              <ma14:wrappingTextBoxFlag xmlns:ma14="http://schemas.microsoft.com/office/mac/drawingml/2011/main" xmlns="" val="0"/>
+              <ma14:wrappingTextBoxFlag xmlns:ma14="http://schemas.microsoft.com/office/mac/drawingml/2011/main" val="0"/>
             </a:ext>
           </a:extLst>
         </p:spPr>
@@ -3158,7 +3411,7 @@
           <a:p>
             <a:pPr algn="r"/>
             <a:fld id="{F7021451-1387-4CA6-816F-3879F97B5CBC}" type="slidenum">
-              <a:rPr lang="en-US" b="0"/>
+              <a:rPr b="0" lang="en-US"/>
               <a:t>1</a:t>
             </a:fld>
             <a:endParaRPr lang="en-US"/>
@@ -3193,11 +3446,9 @@
       <p:sp>
         <p:nvSpPr>
           <p:cNvPr id="2" name="Text 0"/>
-          <p:cNvSpPr>
-            <a:spLocks noGrp="1"/>
-          </p:cNvSpPr>
+          <p:cNvSpPr/>
           <p:nvPr>
-            <p:ph type="body" idx="100" hasCustomPrompt="1"/>
+            <p:ph idx="100" type="body" hasCustomPrompt="1"/>
           </p:nvPr>
         </p:nvSpPr>
         <p:spPr>
@@ -3215,11 +3466,11 @@
           <a:bodyPr wrap="square" lIns="0" tIns="0" rIns="0" bIns="0" rtlCol="0" anchor="t"/>
           <a:lstStyle/>
           <a:p>
-            <a:pPr marL="0" indent="0" algn="l">
-              <a:buNone/>
-            </a:pPr>
-            <a:r>
-              <a:rPr lang="en-US" sz="1200" b="1" kern="0" spc="300" dirty="0">
+            <a:pPr algn="l" indent="0" marL="0">
+              <a:buNone/>
+            </a:pPr>
+            <a:r>
+              <a:rPr lang="en-US" sz="1200" b="1" spc="300" kern="0" dirty="0">
                 <a:solidFill>
                   <a:schemeClr val="accent3"/>
                 </a:solidFill>
@@ -3233,11 +3484,9 @@
       <p:sp>
         <p:nvSpPr>
           <p:cNvPr id="3" name="Text 0"/>
-          <p:cNvSpPr>
-            <a:spLocks noGrp="1"/>
-          </p:cNvSpPr>
+          <p:cNvSpPr/>
           <p:nvPr>
-            <p:ph type="title" idx="101" hasCustomPrompt="1"/>
+            <p:ph idx="101" type="title" hasCustomPrompt="1"/>
           </p:nvPr>
         </p:nvSpPr>
         <p:spPr>
@@ -3255,7 +3504,7 @@
           <a:bodyPr wrap="square" lIns="0" tIns="0" rIns="0" bIns="0" rtlCol="0" anchor="t"/>
           <a:lstStyle/>
           <a:p>
-            <a:pPr marL="0" indent="0" algn="l">
+            <a:pPr algn="l" indent="0" marL="0">
               <a:buNone/>
             </a:pPr>
             <a:r>
@@ -3291,20 +3540,13 @@
           </a:solidFill>
           <a:ln/>
           <a:effectLst>
-            <a:outerShdw blurRad="127000" dist="38100" dir="5400000" algn="bl" rotWithShape="0">
+            <a:outerShdw sx="100000" sy="100000" kx="0" ky="0" algn="bl" rotWithShape="0" blurRad="127000" dist="38100" dir="5400000">
               <a:srgbClr val="173D2E">
                 <a:alpha val="14000"/>
               </a:srgbClr>
             </a:outerShdw>
           </a:effectLst>
         </p:spPr>
-        <p:txBody>
-          <a:bodyPr/>
-          <a:lstStyle/>
-          <a:p>
-            <a:endParaRPr lang="en-MY"/>
-          </a:p>
-        </p:txBody>
       </p:sp>
       <p:sp>
         <p:nvSpPr>
@@ -3327,7 +3569,7 @@
           <a:bodyPr wrap="square" lIns="0" tIns="0" rIns="0" bIns="0" rtlCol="0" anchor="t"/>
           <a:lstStyle/>
           <a:p>
-            <a:pPr marL="0" indent="0">
+            <a:pPr indent="0" marL="0">
               <a:spcAft>
                 <a:spcPts val="400"/>
               </a:spcAft>
@@ -3344,7 +3586,7 @@
             <a:endParaRPr lang="en-US" sz="1300" dirty="0"/>
           </a:p>
           <a:p>
-            <a:pPr marL="0" indent="0">
+            <a:pPr indent="0" marL="0">
               <a:spcAft>
                 <a:spcPts val="400"/>
               </a:spcAft>
@@ -3364,7 +3606,7 @@
             <a:endParaRPr lang="en-US" sz="1300" dirty="0"/>
           </a:p>
           <a:p>
-            <a:pPr marL="0" indent="0">
+            <a:pPr indent="0" marL="0">
               <a:spcAft>
                 <a:spcPts val="400"/>
               </a:spcAft>
@@ -3401,13 +3643,6 @@
           </a:solidFill>
           <a:ln/>
         </p:spPr>
-        <p:txBody>
-          <a:bodyPr/>
-          <a:lstStyle/>
-          <a:p>
-            <a:endParaRPr lang="en-MY"/>
-          </a:p>
-        </p:txBody>
       </p:sp>
       <p:sp>
         <p:nvSpPr>
@@ -3430,20 +3665,13 @@
           </a:solidFill>
           <a:ln/>
           <a:effectLst>
-            <a:outerShdw blurRad="127000" dist="38100" dir="5400000" algn="bl" rotWithShape="0">
+            <a:outerShdw sx="100000" sy="100000" kx="0" ky="0" algn="bl" rotWithShape="0" blurRad="127000" dist="38100" dir="5400000">
               <a:srgbClr val="173D2E">
                 <a:alpha val="14000"/>
               </a:srgbClr>
             </a:outerShdw>
           </a:effectLst>
         </p:spPr>
-        <p:txBody>
-          <a:bodyPr/>
-          <a:lstStyle/>
-          <a:p>
-            <a:endParaRPr lang="en-MY"/>
-          </a:p>
-        </p:txBody>
       </p:sp>
       <p:sp>
         <p:nvSpPr>
@@ -3466,7 +3694,7 @@
           <a:bodyPr wrap="square" lIns="0" tIns="0" rIns="0" bIns="0" rtlCol="0" anchor="t"/>
           <a:lstStyle/>
           <a:p>
-            <a:pPr marL="0" indent="0">
+            <a:pPr indent="0" marL="0">
               <a:spcAft>
                 <a:spcPts val="400"/>
               </a:spcAft>
@@ -3483,7 +3711,7 @@
             <a:endParaRPr lang="en-US" sz="1300" dirty="0"/>
           </a:p>
           <a:p>
-            <a:pPr marL="0" indent="0">
+            <a:pPr indent="0" marL="0">
               <a:spcAft>
                 <a:spcPts val="400"/>
               </a:spcAft>
@@ -3503,7 +3731,7 @@
             <a:endParaRPr lang="en-US" sz="1300" dirty="0"/>
           </a:p>
           <a:p>
-            <a:pPr marL="0" indent="0">
+            <a:pPr indent="0" marL="0">
               <a:spcAft>
                 <a:spcPts val="400"/>
               </a:spcAft>
@@ -3540,13 +3768,6 @@
           </a:solidFill>
           <a:ln/>
         </p:spPr>
-        <p:txBody>
-          <a:bodyPr/>
-          <a:lstStyle/>
-          <a:p>
-            <a:endParaRPr lang="en-MY"/>
-          </a:p>
-        </p:txBody>
       </p:sp>
       <p:sp>
         <p:nvSpPr>
@@ -3569,20 +3790,13 @@
           </a:solidFill>
           <a:ln/>
           <a:effectLst>
-            <a:outerShdw blurRad="127000" dist="38100" dir="5400000" algn="bl" rotWithShape="0">
+            <a:outerShdw sx="100000" sy="100000" kx="0" ky="0" algn="bl" rotWithShape="0" blurRad="127000" dist="38100" dir="5400000">
               <a:srgbClr val="173D2E">
                 <a:alpha val="14000"/>
               </a:srgbClr>
             </a:outerShdw>
           </a:effectLst>
         </p:spPr>
-        <p:txBody>
-          <a:bodyPr/>
-          <a:lstStyle/>
-          <a:p>
-            <a:endParaRPr lang="en-MY"/>
-          </a:p>
-        </p:txBody>
       </p:sp>
       <p:sp>
         <p:nvSpPr>
@@ -3605,7 +3819,7 @@
           <a:bodyPr wrap="square" lIns="0" tIns="0" rIns="0" bIns="0" rtlCol="0" anchor="t"/>
           <a:lstStyle/>
           <a:p>
-            <a:pPr marL="0" indent="0">
+            <a:pPr indent="0" marL="0">
               <a:spcAft>
                 <a:spcPts val="400"/>
               </a:spcAft>
@@ -3622,7 +3836,7 @@
             <a:endParaRPr lang="en-US" sz="1300" dirty="0"/>
           </a:p>
           <a:p>
-            <a:pPr marL="0" indent="0">
+            <a:pPr indent="0" marL="0">
               <a:spcAft>
                 <a:spcPts val="400"/>
               </a:spcAft>
@@ -3642,7 +3856,7 @@
             <a:endParaRPr lang="en-US" sz="1300" dirty="0"/>
           </a:p>
           <a:p>
-            <a:pPr marL="0" indent="0">
+            <a:pPr indent="0" marL="0">
               <a:spcAft>
                 <a:spcPts val="400"/>
               </a:spcAft>
@@ -3681,20 +3895,13 @@
           </a:solidFill>
           <a:ln/>
           <a:effectLst>
-            <a:outerShdw blurRad="127000" dist="38100" dir="5400000" algn="bl" rotWithShape="0">
+            <a:outerShdw sx="100000" sy="100000" kx="0" ky="0" algn="bl" rotWithShape="0" blurRad="127000" dist="38100" dir="5400000">
               <a:srgbClr val="173D2E">
                 <a:alpha val="14000"/>
               </a:srgbClr>
             </a:outerShdw>
           </a:effectLst>
         </p:spPr>
-        <p:txBody>
-          <a:bodyPr/>
-          <a:lstStyle/>
-          <a:p>
-            <a:endParaRPr lang="en-MY"/>
-          </a:p>
-        </p:txBody>
       </p:sp>
       <p:sp>
         <p:nvSpPr>
@@ -3717,7 +3924,7 @@
           <a:bodyPr wrap="square" lIns="0" tIns="0" rIns="0" bIns="0" rtlCol="0" anchor="t"/>
           <a:lstStyle/>
           <a:p>
-            <a:pPr marL="0" indent="0">
+            <a:pPr indent="0" marL="0">
               <a:spcAft>
                 <a:spcPts val="400"/>
               </a:spcAft>
@@ -3734,7 +3941,7 @@
             <a:endParaRPr lang="en-US" sz="1300" dirty="0"/>
           </a:p>
           <a:p>
-            <a:pPr marL="0" indent="0">
+            <a:pPr indent="0" marL="0">
               <a:spcAft>
                 <a:spcPts val="400"/>
               </a:spcAft>
@@ -3773,20 +3980,13 @@
           </a:solidFill>
           <a:ln/>
           <a:effectLst>
-            <a:outerShdw blurRad="127000" dist="38100" dir="5400000" algn="bl" rotWithShape="0">
+            <a:outerShdw sx="100000" sy="100000" kx="0" ky="0" algn="bl" rotWithShape="0" blurRad="127000" dist="38100" dir="5400000">
               <a:srgbClr val="173D2E">
                 <a:alpha val="14000"/>
               </a:srgbClr>
             </a:outerShdw>
           </a:effectLst>
         </p:spPr>
-        <p:txBody>
-          <a:bodyPr/>
-          <a:lstStyle/>
-          <a:p>
-            <a:endParaRPr lang="en-MY"/>
-          </a:p>
-        </p:txBody>
       </p:sp>
       <p:sp>
         <p:nvSpPr>
@@ -3809,7 +4009,7 @@
           <a:bodyPr wrap="square" lIns="0" tIns="0" rIns="0" bIns="0" rtlCol="0" anchor="t"/>
           <a:lstStyle/>
           <a:p>
-            <a:pPr marL="0" indent="0">
+            <a:pPr indent="0" marL="0">
               <a:spcAft>
                 <a:spcPts val="400"/>
               </a:spcAft>
@@ -3826,7 +4026,7 @@
             <a:endParaRPr lang="en-US" sz="1300" dirty="0"/>
           </a:p>
           <a:p>
-            <a:pPr marL="0" indent="0">
+            <a:pPr indent="0" marL="0">
               <a:spcAft>
                 <a:spcPts val="400"/>
               </a:spcAft>
@@ -3864,7 +4064,7 @@
           </a:prstGeom>
           <a:extLst>
             <a:ext uri="{C572A759-6A51-4108-AA02-DFA0A04FC94B}">
-              <ma14:wrappingTextBoxFlag xmlns:ma14="http://schemas.microsoft.com/office/mac/drawingml/2011/main" xmlns="" val="0"/>
+              <ma14:wrappingTextBoxFlag xmlns:ma14="http://schemas.microsoft.com/office/mac/drawingml/2011/main" val="0"/>
             </a:ext>
           </a:extLst>
         </p:spPr>
@@ -3882,7 +4082,7 @@
           <a:p>
             <a:pPr algn="r"/>
             <a:fld id="{F7021451-1387-4CA6-816F-3879F97B5CBC}" type="slidenum">
-              <a:rPr lang="en-US" b="0"/>
+              <a:rPr b="0" lang="en-US"/>
               <a:t>10</a:t>
             </a:fld>
             <a:endParaRPr lang="en-US"/>
@@ -3935,11 +4135,11 @@
           <a:bodyPr wrap="square" lIns="0" tIns="0" rIns="0" bIns="0" rtlCol="0" anchor="ctr"/>
           <a:lstStyle/>
           <a:p>
-            <a:pPr marL="0" indent="0">
-              <a:buNone/>
-            </a:pPr>
-            <a:r>
-              <a:rPr lang="en-US" sz="1600" b="1" kern="0" spc="400" dirty="0">
+            <a:pPr indent="0" marL="0">
+              <a:buNone/>
+            </a:pPr>
+            <a:r>
+              <a:rPr lang="en-US" sz="1600" b="1" spc="400" kern="0" dirty="0">
                 <a:solidFill>
                   <a:schemeClr val="accent1"/>
                 </a:solidFill>
@@ -3971,7 +4171,7 @@
           <a:bodyPr wrap="square" lIns="0" tIns="0" rIns="0" bIns="0" rtlCol="0" anchor="ctr"/>
           <a:lstStyle/>
           <a:p>
-            <a:pPr marL="0" indent="0">
+            <a:pPr indent="0" marL="0">
               <a:buNone/>
             </a:pPr>
             <a:r>
@@ -4010,7 +4210,7 @@
           <a:bodyPr wrap="square" lIns="0" tIns="0" rIns="0" bIns="0" rtlCol="0" anchor="ctr"/>
           <a:lstStyle/>
           <a:p>
-            <a:pPr marL="0" indent="0">
+            <a:pPr indent="0" marL="0">
               <a:buNone/>
             </a:pPr>
             <a:r>
@@ -4028,11 +4228,9 @@
       <p:sp>
         <p:nvSpPr>
           <p:cNvPr id="6" name="Text 0"/>
-          <p:cNvSpPr>
-            <a:spLocks noGrp="1"/>
-          </p:cNvSpPr>
+          <p:cNvSpPr/>
           <p:nvPr>
-            <p:ph type="body" idx="100" hasCustomPrompt="1"/>
+            <p:ph idx="100" type="body" hasCustomPrompt="1"/>
           </p:nvPr>
         </p:nvSpPr>
         <p:spPr>
@@ -4050,7 +4248,7 @@
           <a:bodyPr wrap="square" lIns="0" tIns="0" rIns="0" bIns="0" rtlCol="0" anchor="t"/>
           <a:lstStyle/>
           <a:p>
-            <a:pPr marL="0" indent="0" algn="l">
+            <a:pPr algn="l" indent="0" marL="0">
               <a:buNone/>
             </a:pPr>
             <a:endParaRPr lang="en-US" sz="1200" dirty="0"/>
@@ -4060,11 +4258,9 @@
       <p:sp>
         <p:nvSpPr>
           <p:cNvPr id="7" name="Text 0"/>
-          <p:cNvSpPr>
-            <a:spLocks noGrp="1"/>
-          </p:cNvSpPr>
+          <p:cNvSpPr/>
           <p:nvPr>
-            <p:ph type="title" idx="101" hasCustomPrompt="1"/>
+            <p:ph idx="101" type="title" hasCustomPrompt="1"/>
           </p:nvPr>
         </p:nvSpPr>
         <p:spPr>
@@ -4082,7 +4278,7 @@
           <a:bodyPr wrap="square" lIns="0" tIns="0" rIns="0" bIns="0" rtlCol="0" anchor="t"/>
           <a:lstStyle/>
           <a:p>
-            <a:pPr marL="0" indent="0" algn="l">
+            <a:pPr algn="l" indent="0" marL="0">
               <a:buNone/>
             </a:pPr>
             <a:endParaRPr lang="en-US" sz="3400" dirty="0"/>
@@ -4109,7 +4305,7 @@
           </a:prstGeom>
           <a:extLst>
             <a:ext uri="{C572A759-6A51-4108-AA02-DFA0A04FC94B}">
-              <ma14:wrappingTextBoxFlag xmlns:ma14="http://schemas.microsoft.com/office/mac/drawingml/2011/main" xmlns="" val="0"/>
+              <ma14:wrappingTextBoxFlag xmlns:ma14="http://schemas.microsoft.com/office/mac/drawingml/2011/main" val="0"/>
             </a:ext>
           </a:extLst>
         </p:spPr>
@@ -4127,7 +4323,7 @@
           <a:p>
             <a:pPr algn="r"/>
             <a:fld id="{F7021451-1387-4CA6-816F-3879F97B5CBC}" type="slidenum">
-              <a:rPr lang="en-US" b="0"/>
+              <a:rPr b="0" lang="en-US"/>
               <a:t>11</a:t>
             </a:fld>
             <a:endParaRPr lang="en-US"/>
@@ -4162,11 +4358,9 @@
       <p:sp>
         <p:nvSpPr>
           <p:cNvPr id="2" name="Text 0"/>
-          <p:cNvSpPr>
-            <a:spLocks noGrp="1"/>
-          </p:cNvSpPr>
+          <p:cNvSpPr/>
           <p:nvPr>
-            <p:ph type="body" idx="100" hasCustomPrompt="1"/>
+            <p:ph idx="100" type="body" hasCustomPrompt="1"/>
           </p:nvPr>
         </p:nvSpPr>
         <p:spPr>
@@ -4184,11 +4378,11 @@
           <a:bodyPr wrap="square" lIns="0" tIns="0" rIns="0" bIns="0" rtlCol="0" anchor="t"/>
           <a:lstStyle/>
           <a:p>
-            <a:pPr marL="0" indent="0" algn="l">
-              <a:buNone/>
-            </a:pPr>
-            <a:r>
-              <a:rPr lang="en-US" sz="1200" b="1" kern="0" spc="300" dirty="0">
+            <a:pPr algn="l" indent="0" marL="0">
+              <a:buNone/>
+            </a:pPr>
+            <a:r>
+              <a:rPr lang="en-US" sz="1200" b="1" spc="300" kern="0" dirty="0">
                 <a:solidFill>
                   <a:schemeClr val="accent3"/>
                 </a:solidFill>
@@ -4202,11 +4396,9 @@
       <p:sp>
         <p:nvSpPr>
           <p:cNvPr id="3" name="Text 0"/>
-          <p:cNvSpPr>
-            <a:spLocks noGrp="1"/>
-          </p:cNvSpPr>
+          <p:cNvSpPr/>
           <p:nvPr>
-            <p:ph type="title" idx="101" hasCustomPrompt="1"/>
+            <p:ph idx="101" type="title" hasCustomPrompt="1"/>
           </p:nvPr>
         </p:nvSpPr>
         <p:spPr>
@@ -4224,7 +4416,7 @@
           <a:bodyPr wrap="square" lIns="0" tIns="0" rIns="0" bIns="0" rtlCol="0" anchor="t"/>
           <a:lstStyle/>
           <a:p>
-            <a:pPr marL="0" indent="0" algn="l">
+            <a:pPr algn="l" indent="0" marL="0">
               <a:buNone/>
             </a:pPr>
             <a:r>
@@ -4233,7 +4425,7 @@
                   <a:schemeClr val="tx1"/>
                 </a:solidFill>
               </a:rPr>
-              <a:t>Five minutes, two presenters</a:t>
+              <a:t>Steven presents, Thien Gen demos</a:t>
             </a:r>
             <a:endParaRPr lang="en-US" sz="3400" dirty="0"/>
           </a:p>
@@ -4255,41 +4447,17 @@
         </p:nvGraphicFramePr>
         <p:xfrm>
           <a:off x="548640" y="1965960"/>
-          <a:ext cx="7680960" cy="3352800"/>
+          <a:ext cx="7680960" cy="914400"/>
         </p:xfrm>
         <a:graphic>
           <a:graphicData uri="http://schemas.openxmlformats.org/drawingml/2006/table">
             <a:tbl>
               <a:tblPr/>
               <a:tblGrid>
-                <a:gridCol w="1463040">
-                  <a:extLst>
-                    <a:ext uri="{9D8B030D-6E8A-4147-A177-3AD203B41FA5}">
-                      <a16:colId xmlns:a16="http://schemas.microsoft.com/office/drawing/2014/main" val="20000"/>
-                    </a:ext>
-                  </a:extLst>
-                </a:gridCol>
-                <a:gridCol w="3017520">
-                  <a:extLst>
-                    <a:ext uri="{9D8B030D-6E8A-4147-A177-3AD203B41FA5}">
-                      <a16:colId xmlns:a16="http://schemas.microsoft.com/office/drawing/2014/main" val="20001"/>
-                    </a:ext>
-                  </a:extLst>
-                </a:gridCol>
-                <a:gridCol w="2194560">
-                  <a:extLst>
-                    <a:ext uri="{9D8B030D-6E8A-4147-A177-3AD203B41FA5}">
-                      <a16:colId xmlns:a16="http://schemas.microsoft.com/office/drawing/2014/main" val="20002"/>
-                    </a:ext>
-                  </a:extLst>
-                </a:gridCol>
-                <a:gridCol w="1005840">
-                  <a:extLst>
-                    <a:ext uri="{9D8B030D-6E8A-4147-A177-3AD203B41FA5}">
-                      <a16:colId xmlns:a16="http://schemas.microsoft.com/office/drawing/2014/main" val="20003"/>
-                    </a:ext>
-                  </a:extLst>
-                </a:gridCol>
+                <a:gridCol w="1463040"/>
+                <a:gridCol w="3017520"/>
+                <a:gridCol w="2194560"/>
+                <a:gridCol w="1005840"/>
               </a:tblGrid>
               <a:tr h="0">
                 <a:tc>
@@ -4297,7 +4465,7 @@
                     <a:bodyPr/>
                     <a:lstStyle/>
                     <a:p>
-                      <a:pPr marL="0" indent="0">
+                      <a:pPr indent="0" marL="0">
                         <a:buNone/>
                       </a:pPr>
                       <a:r>
@@ -4311,7 +4479,7 @@
                       <a:endParaRPr lang="en-US" sz="1400" dirty="0"/>
                     </a:p>
                   </a:txBody>
-                  <a:tcPr marL="109728" marR="109728">
+                  <a:tcPr marL="109728" marR="109728" marT="45720" marB="45720">
                     <a:lnL w="9525" cap="flat" cmpd="sng" algn="ctr">
                       <a:solidFill>
                         <a:srgbClr val="D9CFB6"/>
@@ -4358,7 +4526,7 @@
                     <a:bodyPr/>
                     <a:lstStyle/>
                     <a:p>
-                      <a:pPr marL="0" indent="0">
+                      <a:pPr indent="0" marL="0">
                         <a:buNone/>
                       </a:pPr>
                       <a:r>
@@ -4372,7 +4540,7 @@
                       <a:endParaRPr lang="en-US" sz="1400" dirty="0"/>
                     </a:p>
                   </a:txBody>
-                  <a:tcPr marL="109728" marR="109728">
+                  <a:tcPr marL="109728" marR="109728" marT="45720" marB="45720">
                     <a:lnL w="9525" cap="flat" cmpd="sng" algn="ctr">
                       <a:solidFill>
                         <a:srgbClr val="D9CFB6"/>
@@ -4419,7 +4587,7 @@
                     <a:bodyPr/>
                     <a:lstStyle/>
                     <a:p>
-                      <a:pPr marL="0" indent="0">
+                      <a:pPr indent="0" marL="0">
                         <a:buNone/>
                       </a:pPr>
                       <a:r>
@@ -4433,7 +4601,7 @@
                       <a:endParaRPr lang="en-US" sz="1400" dirty="0"/>
                     </a:p>
                   </a:txBody>
-                  <a:tcPr marL="109728" marR="109728">
+                  <a:tcPr marL="109728" marR="109728" marT="45720" marB="45720">
                     <a:lnL w="9525" cap="flat" cmpd="sng" algn="ctr">
                       <a:solidFill>
                         <a:srgbClr val="D9CFB6"/>
@@ -4480,7 +4648,7 @@
                     <a:bodyPr/>
                     <a:lstStyle/>
                     <a:p>
-                      <a:pPr marL="0" indent="0">
+                      <a:pPr indent="0" marL="0">
                         <a:buNone/>
                       </a:pPr>
                       <a:r>
@@ -4494,7 +4662,7 @@
                       <a:endParaRPr lang="en-US" sz="1400" dirty="0"/>
                     </a:p>
                   </a:txBody>
-                  <a:tcPr marL="109728" marR="109728">
+                  <a:tcPr marL="109728" marR="109728" marT="45720" marB="45720">
                     <a:lnL w="9525" cap="flat" cmpd="sng" algn="ctr">
                       <a:solidFill>
                         <a:srgbClr val="D9CFB6"/>
@@ -4536,11 +4704,6 @@
                     </a:solidFill>
                   </a:tcPr>
                 </a:tc>
-                <a:extLst>
-                  <a:ext uri="{0D108BD9-81ED-4DB2-BD59-A6C34878D82A}">
-                    <a16:rowId xmlns:a16="http://schemas.microsoft.com/office/drawing/2014/main" val="10000"/>
-                  </a:ext>
-                </a:extLst>
               </a:tr>
               <a:tr h="0">
                 <a:tc>
@@ -4548,7 +4711,7 @@
                     <a:bodyPr/>
                     <a:lstStyle/>
                     <a:p>
-                      <a:pPr marL="0" indent="0">
+                      <a:pPr indent="0" marL="0">
                         <a:buNone/>
                       </a:pPr>
                       <a:r>
@@ -4562,7 +4725,7 @@
                       <a:endParaRPr lang="en-US" sz="1400" dirty="0"/>
                     </a:p>
                   </a:txBody>
-                  <a:tcPr marL="109728" marR="109728">
+                  <a:tcPr marL="109728" marR="109728" marT="45720" marB="45720">
                     <a:lnL w="9525" cap="flat" cmpd="sng" algn="ctr">
                       <a:solidFill>
                         <a:srgbClr val="D9CFB6"/>
@@ -4606,7 +4769,7 @@
                     <a:bodyPr/>
                     <a:lstStyle/>
                     <a:p>
-                      <a:pPr marL="0" indent="0">
+                      <a:pPr indent="0" marL="0">
                         <a:buNone/>
                       </a:pPr>
                       <a:r>
@@ -4620,7 +4783,7 @@
                       <a:endParaRPr lang="en-US" sz="1400" dirty="0"/>
                     </a:p>
                   </a:txBody>
-                  <a:tcPr marL="109728" marR="109728">
+                  <a:tcPr marL="109728" marR="109728" marT="45720" marB="45720">
                     <a:lnL w="9525" cap="flat" cmpd="sng" algn="ctr">
                       <a:solidFill>
                         <a:srgbClr val="D9CFB6"/>
@@ -4664,7 +4827,955 @@
                     <a:bodyPr/>
                     <a:lstStyle/>
                     <a:p>
-                      <a:pPr marL="0" indent="0">
+                      <a:pPr indent="0" marL="0">
+                        <a:buNone/>
+                      </a:pPr>
+                      <a:r>
+                        <a:rPr lang="en-US" sz="1400" dirty="0">
+                          <a:solidFill>
+                            <a:srgbClr val="173D2E"/>
+                          </a:solidFill>
+                        </a:rPr>
+                        <a:t>Steven</a:t>
+                      </a:r>
+                      <a:endParaRPr lang="en-US" sz="1400" dirty="0"/>
+                    </a:p>
+                  </a:txBody>
+                  <a:tcPr marL="109728" marR="109728" marT="45720" marB="45720">
+                    <a:lnL w="9525" cap="flat" cmpd="sng" algn="ctr">
+                      <a:solidFill>
+                        <a:srgbClr val="D9CFB6"/>
+                      </a:solidFill>
+                      <a:prstDash val="solid"/>
+                      <a:round/>
+                      <a:headEnd type="none" w="med" len="med"/>
+                      <a:tailEnd type="none" w="med" len="med"/>
+                    </a:lnL>
+                    <a:lnR w="9525" cap="flat" cmpd="sng" algn="ctr">
+                      <a:solidFill>
+                        <a:srgbClr val="D9CFB6"/>
+                      </a:solidFill>
+                      <a:prstDash val="solid"/>
+                      <a:round/>
+                      <a:headEnd type="none" w="med" len="med"/>
+                      <a:tailEnd type="none" w="med" len="med"/>
+                    </a:lnR>
+                    <a:lnT w="9525" cap="flat" cmpd="sng" algn="ctr">
+                      <a:solidFill>
+                        <a:srgbClr val="D9CFB6"/>
+                      </a:solidFill>
+                      <a:prstDash val="solid"/>
+                      <a:round/>
+                      <a:headEnd type="none" w="med" len="med"/>
+                      <a:tailEnd type="none" w="med" len="med"/>
+                    </a:lnT>
+                    <a:lnB w="9525" cap="flat" cmpd="sng" algn="ctr">
+                      <a:solidFill>
+                        <a:srgbClr val="D9CFB6"/>
+                      </a:solidFill>
+                      <a:prstDash val="solid"/>
+                      <a:round/>
+                      <a:headEnd type="none" w="med" len="med"/>
+                      <a:tailEnd type="none" w="med" len="med"/>
+                    </a:lnB>
+                    <a:solidFill>
+                      <a:srgbClr val="D8E8F2"/>
+                    </a:solidFill>
+                  </a:tcPr>
+                </a:tc>
+                <a:tc>
+                  <a:txBody>
+                    <a:bodyPr/>
+                    <a:lstStyle/>
+                    <a:p>
+                      <a:pPr indent="0" marL="0">
+                        <a:buNone/>
+                      </a:pPr>
+                      <a:r>
+                        <a:rPr lang="en-US" sz="1400" dirty="0">
+                          <a:solidFill>
+                            <a:srgbClr val="173D2E"/>
+                          </a:solidFill>
+                        </a:rPr>
+                        <a:t>15 s</a:t>
+                      </a:r>
+                      <a:endParaRPr lang="en-US" sz="1400" dirty="0"/>
+                    </a:p>
+                  </a:txBody>
+                  <a:tcPr marL="109728" marR="109728" marT="45720" marB="45720">
+                    <a:lnL w="9525" cap="flat" cmpd="sng" algn="ctr">
+                      <a:solidFill>
+                        <a:srgbClr val="D9CFB6"/>
+                      </a:solidFill>
+                      <a:prstDash val="solid"/>
+                      <a:round/>
+                      <a:headEnd type="none" w="med" len="med"/>
+                      <a:tailEnd type="none" w="med" len="med"/>
+                    </a:lnL>
+                    <a:lnR w="9525" cap="flat" cmpd="sng" algn="ctr">
+                      <a:solidFill>
+                        <a:srgbClr val="D9CFB6"/>
+                      </a:solidFill>
+                      <a:prstDash val="solid"/>
+                      <a:round/>
+                      <a:headEnd type="none" w="med" len="med"/>
+                      <a:tailEnd type="none" w="med" len="med"/>
+                    </a:lnR>
+                    <a:lnT w="9525" cap="flat" cmpd="sng" algn="ctr">
+                      <a:solidFill>
+                        <a:srgbClr val="D9CFB6"/>
+                      </a:solidFill>
+                      <a:prstDash val="solid"/>
+                      <a:round/>
+                      <a:headEnd type="none" w="med" len="med"/>
+                      <a:tailEnd type="none" w="med" len="med"/>
+                    </a:lnT>
+                    <a:lnB w="9525" cap="flat" cmpd="sng" algn="ctr">
+                      <a:solidFill>
+                        <a:srgbClr val="D9CFB6"/>
+                      </a:solidFill>
+                      <a:prstDash val="solid"/>
+                      <a:round/>
+                      <a:headEnd type="none" w="med" len="med"/>
+                      <a:tailEnd type="none" w="med" len="med"/>
+                    </a:lnB>
+                  </a:tcPr>
+                </a:tc>
+              </a:tr>
+              <a:tr h="0">
+                <a:tc>
+                  <a:txBody>
+                    <a:bodyPr/>
+                    <a:lstStyle/>
+                    <a:p>
+                      <a:pPr indent="0" marL="0">
+                        <a:buNone/>
+                      </a:pPr>
+                      <a:r>
+                        <a:rPr lang="en-US" sz="1400" b="1" dirty="0">
+                          <a:solidFill>
+                            <a:srgbClr val="96590A"/>
+                          </a:solidFill>
+                        </a:rPr>
+                        <a:t>0:15–0:50</a:t>
+                      </a:r>
+                      <a:endParaRPr lang="en-US" sz="1400" dirty="0"/>
+                    </a:p>
+                  </a:txBody>
+                  <a:tcPr marL="109728" marR="109728" marT="45720" marB="45720">
+                    <a:lnL w="9525" cap="flat" cmpd="sng" algn="ctr">
+                      <a:solidFill>
+                        <a:srgbClr val="D9CFB6"/>
+                      </a:solidFill>
+                      <a:prstDash val="solid"/>
+                      <a:round/>
+                      <a:headEnd type="none" w="med" len="med"/>
+                      <a:tailEnd type="none" w="med" len="med"/>
+                    </a:lnL>
+                    <a:lnR w="9525" cap="flat" cmpd="sng" algn="ctr">
+                      <a:solidFill>
+                        <a:srgbClr val="D9CFB6"/>
+                      </a:solidFill>
+                      <a:prstDash val="solid"/>
+                      <a:round/>
+                      <a:headEnd type="none" w="med" len="med"/>
+                      <a:tailEnd type="none" w="med" len="med"/>
+                    </a:lnR>
+                    <a:lnT w="9525" cap="flat" cmpd="sng" algn="ctr">
+                      <a:solidFill>
+                        <a:srgbClr val="D9CFB6"/>
+                      </a:solidFill>
+                      <a:prstDash val="solid"/>
+                      <a:round/>
+                      <a:headEnd type="none" w="med" len="med"/>
+                      <a:tailEnd type="none" w="med" len="med"/>
+                    </a:lnT>
+                    <a:lnB w="9525" cap="flat" cmpd="sng" algn="ctr">
+                      <a:solidFill>
+                        <a:srgbClr val="D9CFB6"/>
+                      </a:solidFill>
+                      <a:prstDash val="solid"/>
+                      <a:round/>
+                      <a:headEnd type="none" w="med" len="med"/>
+                      <a:tailEnd type="none" w="med" len="med"/>
+                    </a:lnB>
+                  </a:tcPr>
+                </a:tc>
+                <a:tc>
+                  <a:txBody>
+                    <a:bodyPr/>
+                    <a:lstStyle/>
+                    <a:p>
+                      <a:pPr indent="0" marL="0">
+                        <a:buNone/>
+                      </a:pPr>
+                      <a:r>
+                        <a:rPr lang="en-US" sz="1400" dirty="0">
+                          <a:solidFill>
+                            <a:srgbClr val="173D2E"/>
+                          </a:solidFill>
+                        </a:rPr>
+                        <a:t>Problem</a:t>
+                      </a:r>
+                      <a:endParaRPr lang="en-US" sz="1400" dirty="0"/>
+                    </a:p>
+                  </a:txBody>
+                  <a:tcPr marL="109728" marR="109728" marT="45720" marB="45720">
+                    <a:lnL w="9525" cap="flat" cmpd="sng" algn="ctr">
+                      <a:solidFill>
+                        <a:srgbClr val="D9CFB6"/>
+                      </a:solidFill>
+                      <a:prstDash val="solid"/>
+                      <a:round/>
+                      <a:headEnd type="none" w="med" len="med"/>
+                      <a:tailEnd type="none" w="med" len="med"/>
+                    </a:lnL>
+                    <a:lnR w="9525" cap="flat" cmpd="sng" algn="ctr">
+                      <a:solidFill>
+                        <a:srgbClr val="D9CFB6"/>
+                      </a:solidFill>
+                      <a:prstDash val="solid"/>
+                      <a:round/>
+                      <a:headEnd type="none" w="med" len="med"/>
+                      <a:tailEnd type="none" w="med" len="med"/>
+                    </a:lnR>
+                    <a:lnT w="9525" cap="flat" cmpd="sng" algn="ctr">
+                      <a:solidFill>
+                        <a:srgbClr val="D9CFB6"/>
+                      </a:solidFill>
+                      <a:prstDash val="solid"/>
+                      <a:round/>
+                      <a:headEnd type="none" w="med" len="med"/>
+                      <a:tailEnd type="none" w="med" len="med"/>
+                    </a:lnT>
+                    <a:lnB w="9525" cap="flat" cmpd="sng" algn="ctr">
+                      <a:solidFill>
+                        <a:srgbClr val="D9CFB6"/>
+                      </a:solidFill>
+                      <a:prstDash val="solid"/>
+                      <a:round/>
+                      <a:headEnd type="none" w="med" len="med"/>
+                      <a:tailEnd type="none" w="med" len="med"/>
+                    </a:lnB>
+                  </a:tcPr>
+                </a:tc>
+                <a:tc>
+                  <a:txBody>
+                    <a:bodyPr/>
+                    <a:lstStyle/>
+                    <a:p>
+                      <a:pPr indent="0" marL="0">
+                        <a:buNone/>
+                      </a:pPr>
+                      <a:r>
+                        <a:rPr lang="en-US" sz="1400" dirty="0">
+                          <a:solidFill>
+                            <a:srgbClr val="173D2E"/>
+                          </a:solidFill>
+                        </a:rPr>
+                        <a:t>Steven</a:t>
+                      </a:r>
+                      <a:endParaRPr lang="en-US" sz="1400" dirty="0"/>
+                    </a:p>
+                  </a:txBody>
+                  <a:tcPr marL="109728" marR="109728" marT="45720" marB="45720">
+                    <a:lnL w="9525" cap="flat" cmpd="sng" algn="ctr">
+                      <a:solidFill>
+                        <a:srgbClr val="D9CFB6"/>
+                      </a:solidFill>
+                      <a:prstDash val="solid"/>
+                      <a:round/>
+                      <a:headEnd type="none" w="med" len="med"/>
+                      <a:tailEnd type="none" w="med" len="med"/>
+                    </a:lnL>
+                    <a:lnR w="9525" cap="flat" cmpd="sng" algn="ctr">
+                      <a:solidFill>
+                        <a:srgbClr val="D9CFB6"/>
+                      </a:solidFill>
+                      <a:prstDash val="solid"/>
+                      <a:round/>
+                      <a:headEnd type="none" w="med" len="med"/>
+                      <a:tailEnd type="none" w="med" len="med"/>
+                    </a:lnR>
+                    <a:lnT w="9525" cap="flat" cmpd="sng" algn="ctr">
+                      <a:solidFill>
+                        <a:srgbClr val="D9CFB6"/>
+                      </a:solidFill>
+                      <a:prstDash val="solid"/>
+                      <a:round/>
+                      <a:headEnd type="none" w="med" len="med"/>
+                      <a:tailEnd type="none" w="med" len="med"/>
+                    </a:lnT>
+                    <a:lnB w="9525" cap="flat" cmpd="sng" algn="ctr">
+                      <a:solidFill>
+                        <a:srgbClr val="D9CFB6"/>
+                      </a:solidFill>
+                      <a:prstDash val="solid"/>
+                      <a:round/>
+                      <a:headEnd type="none" w="med" len="med"/>
+                      <a:tailEnd type="none" w="med" len="med"/>
+                    </a:lnB>
+                    <a:solidFill>
+                      <a:srgbClr val="D8E8F2"/>
+                    </a:solidFill>
+                  </a:tcPr>
+                </a:tc>
+                <a:tc>
+                  <a:txBody>
+                    <a:bodyPr/>
+                    <a:lstStyle/>
+                    <a:p>
+                      <a:pPr indent="0" marL="0">
+                        <a:buNone/>
+                      </a:pPr>
+                      <a:r>
+                        <a:rPr lang="en-US" sz="1400" dirty="0">
+                          <a:solidFill>
+                            <a:srgbClr val="173D2E"/>
+                          </a:solidFill>
+                        </a:rPr>
+                        <a:t>35 s</a:t>
+                      </a:r>
+                      <a:endParaRPr lang="en-US" sz="1400" dirty="0"/>
+                    </a:p>
+                  </a:txBody>
+                  <a:tcPr marL="109728" marR="109728" marT="45720" marB="45720">
+                    <a:lnL w="9525" cap="flat" cmpd="sng" algn="ctr">
+                      <a:solidFill>
+                        <a:srgbClr val="D9CFB6"/>
+                      </a:solidFill>
+                      <a:prstDash val="solid"/>
+                      <a:round/>
+                      <a:headEnd type="none" w="med" len="med"/>
+                      <a:tailEnd type="none" w="med" len="med"/>
+                    </a:lnL>
+                    <a:lnR w="9525" cap="flat" cmpd="sng" algn="ctr">
+                      <a:solidFill>
+                        <a:srgbClr val="D9CFB6"/>
+                      </a:solidFill>
+                      <a:prstDash val="solid"/>
+                      <a:round/>
+                      <a:headEnd type="none" w="med" len="med"/>
+                      <a:tailEnd type="none" w="med" len="med"/>
+                    </a:lnR>
+                    <a:lnT w="9525" cap="flat" cmpd="sng" algn="ctr">
+                      <a:solidFill>
+                        <a:srgbClr val="D9CFB6"/>
+                      </a:solidFill>
+                      <a:prstDash val="solid"/>
+                      <a:round/>
+                      <a:headEnd type="none" w="med" len="med"/>
+                      <a:tailEnd type="none" w="med" len="med"/>
+                    </a:lnT>
+                    <a:lnB w="9525" cap="flat" cmpd="sng" algn="ctr">
+                      <a:solidFill>
+                        <a:srgbClr val="D9CFB6"/>
+                      </a:solidFill>
+                      <a:prstDash val="solid"/>
+                      <a:round/>
+                      <a:headEnd type="none" w="med" len="med"/>
+                      <a:tailEnd type="none" w="med" len="med"/>
+                    </a:lnB>
+                  </a:tcPr>
+                </a:tc>
+              </a:tr>
+              <a:tr h="0">
+                <a:tc>
+                  <a:txBody>
+                    <a:bodyPr/>
+                    <a:lstStyle/>
+                    <a:p>
+                      <a:pPr indent="0" marL="0">
+                        <a:buNone/>
+                      </a:pPr>
+                      <a:r>
+                        <a:rPr lang="en-US" sz="1400" b="1" dirty="0">
+                          <a:solidFill>
+                            <a:srgbClr val="96590A"/>
+                          </a:solidFill>
+                        </a:rPr>
+                        <a:t>0:50–1:10</a:t>
+                      </a:r>
+                      <a:endParaRPr lang="en-US" sz="1400" dirty="0"/>
+                    </a:p>
+                  </a:txBody>
+                  <a:tcPr marL="109728" marR="109728" marT="45720" marB="45720">
+                    <a:lnL w="9525" cap="flat" cmpd="sng" algn="ctr">
+                      <a:solidFill>
+                        <a:srgbClr val="D9CFB6"/>
+                      </a:solidFill>
+                      <a:prstDash val="solid"/>
+                      <a:round/>
+                      <a:headEnd type="none" w="med" len="med"/>
+                      <a:tailEnd type="none" w="med" len="med"/>
+                    </a:lnL>
+                    <a:lnR w="9525" cap="flat" cmpd="sng" algn="ctr">
+                      <a:solidFill>
+                        <a:srgbClr val="D9CFB6"/>
+                      </a:solidFill>
+                      <a:prstDash val="solid"/>
+                      <a:round/>
+                      <a:headEnd type="none" w="med" len="med"/>
+                      <a:tailEnd type="none" w="med" len="med"/>
+                    </a:lnR>
+                    <a:lnT w="9525" cap="flat" cmpd="sng" algn="ctr">
+                      <a:solidFill>
+                        <a:srgbClr val="D9CFB6"/>
+                      </a:solidFill>
+                      <a:prstDash val="solid"/>
+                      <a:round/>
+                      <a:headEnd type="none" w="med" len="med"/>
+                      <a:tailEnd type="none" w="med" len="med"/>
+                    </a:lnT>
+                    <a:lnB w="9525" cap="flat" cmpd="sng" algn="ctr">
+                      <a:solidFill>
+                        <a:srgbClr val="D9CFB6"/>
+                      </a:solidFill>
+                      <a:prstDash val="solid"/>
+                      <a:round/>
+                      <a:headEnd type="none" w="med" len="med"/>
+                      <a:tailEnd type="none" w="med" len="med"/>
+                    </a:lnB>
+                  </a:tcPr>
+                </a:tc>
+                <a:tc>
+                  <a:txBody>
+                    <a:bodyPr/>
+                    <a:lstStyle/>
+                    <a:p>
+                      <a:pPr indent="0" marL="0">
+                        <a:buNone/>
+                      </a:pPr>
+                      <a:r>
+                        <a:rPr lang="en-US" sz="1400" dirty="0">
+                          <a:solidFill>
+                            <a:srgbClr val="173D2E"/>
+                          </a:solidFill>
+                        </a:rPr>
+                        <a:t>Target user</a:t>
+                      </a:r>
+                      <a:endParaRPr lang="en-US" sz="1400" dirty="0"/>
+                    </a:p>
+                  </a:txBody>
+                  <a:tcPr marL="109728" marR="109728" marT="45720" marB="45720">
+                    <a:lnL w="9525" cap="flat" cmpd="sng" algn="ctr">
+                      <a:solidFill>
+                        <a:srgbClr val="D9CFB6"/>
+                      </a:solidFill>
+                      <a:prstDash val="solid"/>
+                      <a:round/>
+                      <a:headEnd type="none" w="med" len="med"/>
+                      <a:tailEnd type="none" w="med" len="med"/>
+                    </a:lnL>
+                    <a:lnR w="9525" cap="flat" cmpd="sng" algn="ctr">
+                      <a:solidFill>
+                        <a:srgbClr val="D9CFB6"/>
+                      </a:solidFill>
+                      <a:prstDash val="solid"/>
+                      <a:round/>
+                      <a:headEnd type="none" w="med" len="med"/>
+                      <a:tailEnd type="none" w="med" len="med"/>
+                    </a:lnR>
+                    <a:lnT w="9525" cap="flat" cmpd="sng" algn="ctr">
+                      <a:solidFill>
+                        <a:srgbClr val="D9CFB6"/>
+                      </a:solidFill>
+                      <a:prstDash val="solid"/>
+                      <a:round/>
+                      <a:headEnd type="none" w="med" len="med"/>
+                      <a:tailEnd type="none" w="med" len="med"/>
+                    </a:lnT>
+                    <a:lnB w="9525" cap="flat" cmpd="sng" algn="ctr">
+                      <a:solidFill>
+                        <a:srgbClr val="D9CFB6"/>
+                      </a:solidFill>
+                      <a:prstDash val="solid"/>
+                      <a:round/>
+                      <a:headEnd type="none" w="med" len="med"/>
+                      <a:tailEnd type="none" w="med" len="med"/>
+                    </a:lnB>
+                  </a:tcPr>
+                </a:tc>
+                <a:tc>
+                  <a:txBody>
+                    <a:bodyPr/>
+                    <a:lstStyle/>
+                    <a:p>
+                      <a:pPr indent="0" marL="0">
+                        <a:buNone/>
+                      </a:pPr>
+                      <a:r>
+                        <a:rPr lang="en-US" sz="1400" dirty="0">
+                          <a:solidFill>
+                            <a:srgbClr val="173D2E"/>
+                          </a:solidFill>
+                        </a:rPr>
+                        <a:t>Steven</a:t>
+                      </a:r>
+                      <a:endParaRPr lang="en-US" sz="1400" dirty="0"/>
+                    </a:p>
+                  </a:txBody>
+                  <a:tcPr marL="109728" marR="109728" marT="45720" marB="45720">
+                    <a:lnL w="9525" cap="flat" cmpd="sng" algn="ctr">
+                      <a:solidFill>
+                        <a:srgbClr val="D9CFB6"/>
+                      </a:solidFill>
+                      <a:prstDash val="solid"/>
+                      <a:round/>
+                      <a:headEnd type="none" w="med" len="med"/>
+                      <a:tailEnd type="none" w="med" len="med"/>
+                    </a:lnL>
+                    <a:lnR w="9525" cap="flat" cmpd="sng" algn="ctr">
+                      <a:solidFill>
+                        <a:srgbClr val="D9CFB6"/>
+                      </a:solidFill>
+                      <a:prstDash val="solid"/>
+                      <a:round/>
+                      <a:headEnd type="none" w="med" len="med"/>
+                      <a:tailEnd type="none" w="med" len="med"/>
+                    </a:lnR>
+                    <a:lnT w="9525" cap="flat" cmpd="sng" algn="ctr">
+                      <a:solidFill>
+                        <a:srgbClr val="D9CFB6"/>
+                      </a:solidFill>
+                      <a:prstDash val="solid"/>
+                      <a:round/>
+                      <a:headEnd type="none" w="med" len="med"/>
+                      <a:tailEnd type="none" w="med" len="med"/>
+                    </a:lnT>
+                    <a:lnB w="9525" cap="flat" cmpd="sng" algn="ctr">
+                      <a:solidFill>
+                        <a:srgbClr val="D9CFB6"/>
+                      </a:solidFill>
+                      <a:prstDash val="solid"/>
+                      <a:round/>
+                      <a:headEnd type="none" w="med" len="med"/>
+                      <a:tailEnd type="none" w="med" len="med"/>
+                    </a:lnB>
+                    <a:solidFill>
+                      <a:srgbClr val="D8E8F2"/>
+                    </a:solidFill>
+                  </a:tcPr>
+                </a:tc>
+                <a:tc>
+                  <a:txBody>
+                    <a:bodyPr/>
+                    <a:lstStyle/>
+                    <a:p>
+                      <a:pPr indent="0" marL="0">
+                        <a:buNone/>
+                      </a:pPr>
+                      <a:r>
+                        <a:rPr lang="en-US" sz="1400" dirty="0">
+                          <a:solidFill>
+                            <a:srgbClr val="173D2E"/>
+                          </a:solidFill>
+                        </a:rPr>
+                        <a:t>20 s</a:t>
+                      </a:r>
+                      <a:endParaRPr lang="en-US" sz="1400" dirty="0"/>
+                    </a:p>
+                  </a:txBody>
+                  <a:tcPr marL="109728" marR="109728" marT="45720" marB="45720">
+                    <a:lnL w="9525" cap="flat" cmpd="sng" algn="ctr">
+                      <a:solidFill>
+                        <a:srgbClr val="D9CFB6"/>
+                      </a:solidFill>
+                      <a:prstDash val="solid"/>
+                      <a:round/>
+                      <a:headEnd type="none" w="med" len="med"/>
+                      <a:tailEnd type="none" w="med" len="med"/>
+                    </a:lnL>
+                    <a:lnR w="9525" cap="flat" cmpd="sng" algn="ctr">
+                      <a:solidFill>
+                        <a:srgbClr val="D9CFB6"/>
+                      </a:solidFill>
+                      <a:prstDash val="solid"/>
+                      <a:round/>
+                      <a:headEnd type="none" w="med" len="med"/>
+                      <a:tailEnd type="none" w="med" len="med"/>
+                    </a:lnR>
+                    <a:lnT w="9525" cap="flat" cmpd="sng" algn="ctr">
+                      <a:solidFill>
+                        <a:srgbClr val="D9CFB6"/>
+                      </a:solidFill>
+                      <a:prstDash val="solid"/>
+                      <a:round/>
+                      <a:headEnd type="none" w="med" len="med"/>
+                      <a:tailEnd type="none" w="med" len="med"/>
+                    </a:lnT>
+                    <a:lnB w="9525" cap="flat" cmpd="sng" algn="ctr">
+                      <a:solidFill>
+                        <a:srgbClr val="D9CFB6"/>
+                      </a:solidFill>
+                      <a:prstDash val="solid"/>
+                      <a:round/>
+                      <a:headEnd type="none" w="med" len="med"/>
+                      <a:tailEnd type="none" w="med" len="med"/>
+                    </a:lnB>
+                  </a:tcPr>
+                </a:tc>
+              </a:tr>
+              <a:tr h="0">
+                <a:tc>
+                  <a:txBody>
+                    <a:bodyPr/>
+                    <a:lstStyle/>
+                    <a:p>
+                      <a:pPr indent="0" marL="0">
+                        <a:buNone/>
+                      </a:pPr>
+                      <a:r>
+                        <a:rPr lang="en-US" sz="1400" b="1" dirty="0">
+                          <a:solidFill>
+                            <a:srgbClr val="96590A"/>
+                          </a:solidFill>
+                        </a:rPr>
+                        <a:t>1:10–1:30</a:t>
+                      </a:r>
+                      <a:endParaRPr lang="en-US" sz="1400" dirty="0"/>
+                    </a:p>
+                  </a:txBody>
+                  <a:tcPr marL="109728" marR="109728" marT="45720" marB="45720">
+                    <a:lnL w="9525" cap="flat" cmpd="sng" algn="ctr">
+                      <a:solidFill>
+                        <a:srgbClr val="D9CFB6"/>
+                      </a:solidFill>
+                      <a:prstDash val="solid"/>
+                      <a:round/>
+                      <a:headEnd type="none" w="med" len="med"/>
+                      <a:tailEnd type="none" w="med" len="med"/>
+                    </a:lnL>
+                    <a:lnR w="9525" cap="flat" cmpd="sng" algn="ctr">
+                      <a:solidFill>
+                        <a:srgbClr val="D9CFB6"/>
+                      </a:solidFill>
+                      <a:prstDash val="solid"/>
+                      <a:round/>
+                      <a:headEnd type="none" w="med" len="med"/>
+                      <a:tailEnd type="none" w="med" len="med"/>
+                    </a:lnR>
+                    <a:lnT w="9525" cap="flat" cmpd="sng" algn="ctr">
+                      <a:solidFill>
+                        <a:srgbClr val="D9CFB6"/>
+                      </a:solidFill>
+                      <a:prstDash val="solid"/>
+                      <a:round/>
+                      <a:headEnd type="none" w="med" len="med"/>
+                      <a:tailEnd type="none" w="med" len="med"/>
+                    </a:lnT>
+                    <a:lnB w="9525" cap="flat" cmpd="sng" algn="ctr">
+                      <a:solidFill>
+                        <a:srgbClr val="D9CFB6"/>
+                      </a:solidFill>
+                      <a:prstDash val="solid"/>
+                      <a:round/>
+                      <a:headEnd type="none" w="med" len="med"/>
+                      <a:tailEnd type="none" w="med" len="med"/>
+                    </a:lnB>
+                  </a:tcPr>
+                </a:tc>
+                <a:tc>
+                  <a:txBody>
+                    <a:bodyPr/>
+                    <a:lstStyle/>
+                    <a:p>
+                      <a:pPr indent="0" marL="0">
+                        <a:buNone/>
+                      </a:pPr>
+                      <a:r>
+                        <a:rPr lang="en-US" sz="1400" dirty="0">
+                          <a:solidFill>
+                            <a:srgbClr val="173D2E"/>
+                          </a:solidFill>
+                        </a:rPr>
+                        <a:t>Solution</a:t>
+                      </a:r>
+                      <a:endParaRPr lang="en-US" sz="1400" dirty="0"/>
+                    </a:p>
+                  </a:txBody>
+                  <a:tcPr marL="109728" marR="109728" marT="45720" marB="45720">
+                    <a:lnL w="9525" cap="flat" cmpd="sng" algn="ctr">
+                      <a:solidFill>
+                        <a:srgbClr val="D9CFB6"/>
+                      </a:solidFill>
+                      <a:prstDash val="solid"/>
+                      <a:round/>
+                      <a:headEnd type="none" w="med" len="med"/>
+                      <a:tailEnd type="none" w="med" len="med"/>
+                    </a:lnL>
+                    <a:lnR w="9525" cap="flat" cmpd="sng" algn="ctr">
+                      <a:solidFill>
+                        <a:srgbClr val="D9CFB6"/>
+                      </a:solidFill>
+                      <a:prstDash val="solid"/>
+                      <a:round/>
+                      <a:headEnd type="none" w="med" len="med"/>
+                      <a:tailEnd type="none" w="med" len="med"/>
+                    </a:lnR>
+                    <a:lnT w="9525" cap="flat" cmpd="sng" algn="ctr">
+                      <a:solidFill>
+                        <a:srgbClr val="D9CFB6"/>
+                      </a:solidFill>
+                      <a:prstDash val="solid"/>
+                      <a:round/>
+                      <a:headEnd type="none" w="med" len="med"/>
+                      <a:tailEnd type="none" w="med" len="med"/>
+                    </a:lnT>
+                    <a:lnB w="9525" cap="flat" cmpd="sng" algn="ctr">
+                      <a:solidFill>
+                        <a:srgbClr val="D9CFB6"/>
+                      </a:solidFill>
+                      <a:prstDash val="solid"/>
+                      <a:round/>
+                      <a:headEnd type="none" w="med" len="med"/>
+                      <a:tailEnd type="none" w="med" len="med"/>
+                    </a:lnB>
+                  </a:tcPr>
+                </a:tc>
+                <a:tc>
+                  <a:txBody>
+                    <a:bodyPr/>
+                    <a:lstStyle/>
+                    <a:p>
+                      <a:pPr indent="0" marL="0">
+                        <a:buNone/>
+                      </a:pPr>
+                      <a:r>
+                        <a:rPr lang="en-US" sz="1400" dirty="0">
+                          <a:solidFill>
+                            <a:srgbClr val="173D2E"/>
+                          </a:solidFill>
+                        </a:rPr>
+                        <a:t>Steven</a:t>
+                      </a:r>
+                      <a:endParaRPr lang="en-US" sz="1400" dirty="0"/>
+                    </a:p>
+                  </a:txBody>
+                  <a:tcPr marL="109728" marR="109728" marT="45720" marB="45720">
+                    <a:lnL w="9525" cap="flat" cmpd="sng" algn="ctr">
+                      <a:solidFill>
+                        <a:srgbClr val="D9CFB6"/>
+                      </a:solidFill>
+                      <a:prstDash val="solid"/>
+                      <a:round/>
+                      <a:headEnd type="none" w="med" len="med"/>
+                      <a:tailEnd type="none" w="med" len="med"/>
+                    </a:lnL>
+                    <a:lnR w="9525" cap="flat" cmpd="sng" algn="ctr">
+                      <a:solidFill>
+                        <a:srgbClr val="D9CFB6"/>
+                      </a:solidFill>
+                      <a:prstDash val="solid"/>
+                      <a:round/>
+                      <a:headEnd type="none" w="med" len="med"/>
+                      <a:tailEnd type="none" w="med" len="med"/>
+                    </a:lnR>
+                    <a:lnT w="9525" cap="flat" cmpd="sng" algn="ctr">
+                      <a:solidFill>
+                        <a:srgbClr val="D9CFB6"/>
+                      </a:solidFill>
+                      <a:prstDash val="solid"/>
+                      <a:round/>
+                      <a:headEnd type="none" w="med" len="med"/>
+                      <a:tailEnd type="none" w="med" len="med"/>
+                    </a:lnT>
+                    <a:lnB w="9525" cap="flat" cmpd="sng" algn="ctr">
+                      <a:solidFill>
+                        <a:srgbClr val="D9CFB6"/>
+                      </a:solidFill>
+                      <a:prstDash val="solid"/>
+                      <a:round/>
+                      <a:headEnd type="none" w="med" len="med"/>
+                      <a:tailEnd type="none" w="med" len="med"/>
+                    </a:lnB>
+                    <a:solidFill>
+                      <a:srgbClr val="D8E8F2"/>
+                    </a:solidFill>
+                  </a:tcPr>
+                </a:tc>
+                <a:tc>
+                  <a:txBody>
+                    <a:bodyPr/>
+                    <a:lstStyle/>
+                    <a:p>
+                      <a:pPr indent="0" marL="0">
+                        <a:buNone/>
+                      </a:pPr>
+                      <a:r>
+                        <a:rPr lang="en-US" sz="1400" dirty="0">
+                          <a:solidFill>
+                            <a:srgbClr val="173D2E"/>
+                          </a:solidFill>
+                        </a:rPr>
+                        <a:t>20 s</a:t>
+                      </a:r>
+                      <a:endParaRPr lang="en-US" sz="1400" dirty="0"/>
+                    </a:p>
+                  </a:txBody>
+                  <a:tcPr marL="109728" marR="109728" marT="45720" marB="45720">
+                    <a:lnL w="9525" cap="flat" cmpd="sng" algn="ctr">
+                      <a:solidFill>
+                        <a:srgbClr val="D9CFB6"/>
+                      </a:solidFill>
+                      <a:prstDash val="solid"/>
+                      <a:round/>
+                      <a:headEnd type="none" w="med" len="med"/>
+                      <a:tailEnd type="none" w="med" len="med"/>
+                    </a:lnL>
+                    <a:lnR w="9525" cap="flat" cmpd="sng" algn="ctr">
+                      <a:solidFill>
+                        <a:srgbClr val="D9CFB6"/>
+                      </a:solidFill>
+                      <a:prstDash val="solid"/>
+                      <a:round/>
+                      <a:headEnd type="none" w="med" len="med"/>
+                      <a:tailEnd type="none" w="med" len="med"/>
+                    </a:lnR>
+                    <a:lnT w="9525" cap="flat" cmpd="sng" algn="ctr">
+                      <a:solidFill>
+                        <a:srgbClr val="D9CFB6"/>
+                      </a:solidFill>
+                      <a:prstDash val="solid"/>
+                      <a:round/>
+                      <a:headEnd type="none" w="med" len="med"/>
+                      <a:tailEnd type="none" w="med" len="med"/>
+                    </a:lnT>
+                    <a:lnB w="9525" cap="flat" cmpd="sng" algn="ctr">
+                      <a:solidFill>
+                        <a:srgbClr val="D9CFB6"/>
+                      </a:solidFill>
+                      <a:prstDash val="solid"/>
+                      <a:round/>
+                      <a:headEnd type="none" w="med" len="med"/>
+                      <a:tailEnd type="none" w="med" len="med"/>
+                    </a:lnB>
+                  </a:tcPr>
+                </a:tc>
+              </a:tr>
+              <a:tr h="0">
+                <a:tc>
+                  <a:txBody>
+                    <a:bodyPr/>
+                    <a:lstStyle/>
+                    <a:p>
+                      <a:pPr indent="0" marL="0">
+                        <a:buNone/>
+                      </a:pPr>
+                      <a:r>
+                        <a:rPr lang="en-US" sz="1400" b="1" dirty="0">
+                          <a:solidFill>
+                            <a:srgbClr val="96590A"/>
+                          </a:solidFill>
+                        </a:rPr>
+                        <a:t>1:30–3:45</a:t>
+                      </a:r>
+                      <a:endParaRPr lang="en-US" sz="1400" dirty="0"/>
+                    </a:p>
+                  </a:txBody>
+                  <a:tcPr marL="109728" marR="109728" marT="45720" marB="45720">
+                    <a:lnL w="9525" cap="flat" cmpd="sng" algn="ctr">
+                      <a:solidFill>
+                        <a:srgbClr val="D9CFB6"/>
+                      </a:solidFill>
+                      <a:prstDash val="solid"/>
+                      <a:round/>
+                      <a:headEnd type="none" w="med" len="med"/>
+                      <a:tailEnd type="none" w="med" len="med"/>
+                    </a:lnL>
+                    <a:lnR w="9525" cap="flat" cmpd="sng" algn="ctr">
+                      <a:solidFill>
+                        <a:srgbClr val="D9CFB6"/>
+                      </a:solidFill>
+                      <a:prstDash val="solid"/>
+                      <a:round/>
+                      <a:headEnd type="none" w="med" len="med"/>
+                      <a:tailEnd type="none" w="med" len="med"/>
+                    </a:lnR>
+                    <a:lnT w="9525" cap="flat" cmpd="sng" algn="ctr">
+                      <a:solidFill>
+                        <a:srgbClr val="D9CFB6"/>
+                      </a:solidFill>
+                      <a:prstDash val="solid"/>
+                      <a:round/>
+                      <a:headEnd type="none" w="med" len="med"/>
+                      <a:tailEnd type="none" w="med" len="med"/>
+                    </a:lnT>
+                    <a:lnB w="9525" cap="flat" cmpd="sng" algn="ctr">
+                      <a:solidFill>
+                        <a:srgbClr val="D9CFB6"/>
+                      </a:solidFill>
+                      <a:prstDash val="solid"/>
+                      <a:round/>
+                      <a:headEnd type="none" w="med" len="med"/>
+                      <a:tailEnd type="none" w="med" len="med"/>
+                    </a:lnB>
+                  </a:tcPr>
+                </a:tc>
+                <a:tc>
+                  <a:txBody>
+                    <a:bodyPr/>
+                    <a:lstStyle/>
+                    <a:p>
+                      <a:pPr indent="0" marL="0">
+                        <a:buNone/>
+                      </a:pPr>
+                      <a:r>
+                        <a:rPr lang="en-US" sz="1400" dirty="0">
+                          <a:solidFill>
+                            <a:srgbClr val="173D2E"/>
+                          </a:solidFill>
+                        </a:rPr>
+                        <a:t>Live demo (in the app)</a:t>
+                      </a:r>
+                      <a:endParaRPr lang="en-US" sz="1400" dirty="0"/>
+                    </a:p>
+                  </a:txBody>
+                  <a:tcPr marL="109728" marR="109728" marT="45720" marB="45720">
+                    <a:lnL w="9525" cap="flat" cmpd="sng" algn="ctr">
+                      <a:solidFill>
+                        <a:srgbClr val="D9CFB6"/>
+                      </a:solidFill>
+                      <a:prstDash val="solid"/>
+                      <a:round/>
+                      <a:headEnd type="none" w="med" len="med"/>
+                      <a:tailEnd type="none" w="med" len="med"/>
+                    </a:lnL>
+                    <a:lnR w="9525" cap="flat" cmpd="sng" algn="ctr">
+                      <a:solidFill>
+                        <a:srgbClr val="D9CFB6"/>
+                      </a:solidFill>
+                      <a:prstDash val="solid"/>
+                      <a:round/>
+                      <a:headEnd type="none" w="med" len="med"/>
+                      <a:tailEnd type="none" w="med" len="med"/>
+                    </a:lnR>
+                    <a:lnT w="9525" cap="flat" cmpd="sng" algn="ctr">
+                      <a:solidFill>
+                        <a:srgbClr val="D9CFB6"/>
+                      </a:solidFill>
+                      <a:prstDash val="solid"/>
+                      <a:round/>
+                      <a:headEnd type="none" w="med" len="med"/>
+                      <a:tailEnd type="none" w="med" len="med"/>
+                    </a:lnT>
+                    <a:lnB w="9525" cap="flat" cmpd="sng" algn="ctr">
+                      <a:solidFill>
+                        <a:srgbClr val="D9CFB6"/>
+                      </a:solidFill>
+                      <a:prstDash val="solid"/>
+                      <a:round/>
+                      <a:headEnd type="none" w="med" len="med"/>
+                      <a:tailEnd type="none" w="med" len="med"/>
+                    </a:lnB>
+                  </a:tcPr>
+                </a:tc>
+                <a:tc>
+                  <a:txBody>
+                    <a:bodyPr/>
+                    <a:lstStyle/>
+                    <a:p>
+                      <a:pPr indent="0" marL="0">
                         <a:buNone/>
                       </a:pPr>
                       <a:r>
@@ -4678,7 +5789,7 @@
                       <a:endParaRPr lang="en-US" sz="1400" dirty="0"/>
                     </a:p>
                   </a:txBody>
-                  <a:tcPr marL="109728" marR="109728">
+                  <a:tcPr marL="109728" marR="109728" marT="45720" marB="45720">
                     <a:lnL w="9525" cap="flat" cmpd="sng" algn="ctr">
                       <a:solidFill>
                         <a:srgbClr val="D9CFB6"/>
@@ -4725,7 +5836,481 @@
                     <a:bodyPr/>
                     <a:lstStyle/>
                     <a:p>
-                      <a:pPr marL="0" indent="0">
+                      <a:pPr indent="0" marL="0">
+                        <a:buNone/>
+                      </a:pPr>
+                      <a:r>
+                        <a:rPr lang="en-US" sz="1400" dirty="0">
+                          <a:solidFill>
+                            <a:srgbClr val="173D2E"/>
+                          </a:solidFill>
+                        </a:rPr>
+                        <a:t>135 s</a:t>
+                      </a:r>
+                      <a:endParaRPr lang="en-US" sz="1400" dirty="0"/>
+                    </a:p>
+                  </a:txBody>
+                  <a:tcPr marL="109728" marR="109728" marT="45720" marB="45720">
+                    <a:lnL w="9525" cap="flat" cmpd="sng" algn="ctr">
+                      <a:solidFill>
+                        <a:srgbClr val="D9CFB6"/>
+                      </a:solidFill>
+                      <a:prstDash val="solid"/>
+                      <a:round/>
+                      <a:headEnd type="none" w="med" len="med"/>
+                      <a:tailEnd type="none" w="med" len="med"/>
+                    </a:lnL>
+                    <a:lnR w="9525" cap="flat" cmpd="sng" algn="ctr">
+                      <a:solidFill>
+                        <a:srgbClr val="D9CFB6"/>
+                      </a:solidFill>
+                      <a:prstDash val="solid"/>
+                      <a:round/>
+                      <a:headEnd type="none" w="med" len="med"/>
+                      <a:tailEnd type="none" w="med" len="med"/>
+                    </a:lnR>
+                    <a:lnT w="9525" cap="flat" cmpd="sng" algn="ctr">
+                      <a:solidFill>
+                        <a:srgbClr val="D9CFB6"/>
+                      </a:solidFill>
+                      <a:prstDash val="solid"/>
+                      <a:round/>
+                      <a:headEnd type="none" w="med" len="med"/>
+                      <a:tailEnd type="none" w="med" len="med"/>
+                    </a:lnT>
+                    <a:lnB w="9525" cap="flat" cmpd="sng" algn="ctr">
+                      <a:solidFill>
+                        <a:srgbClr val="D9CFB6"/>
+                      </a:solidFill>
+                      <a:prstDash val="solid"/>
+                      <a:round/>
+                      <a:headEnd type="none" w="med" len="med"/>
+                      <a:tailEnd type="none" w="med" len="med"/>
+                    </a:lnB>
+                  </a:tcPr>
+                </a:tc>
+              </a:tr>
+              <a:tr h="0">
+                <a:tc>
+                  <a:txBody>
+                    <a:bodyPr/>
+                    <a:lstStyle/>
+                    <a:p>
+                      <a:pPr indent="0" marL="0">
+                        <a:buNone/>
+                      </a:pPr>
+                      <a:r>
+                        <a:rPr lang="en-US" sz="1400" b="1" dirty="0">
+                          <a:solidFill>
+                            <a:srgbClr val="96590A"/>
+                          </a:solidFill>
+                        </a:rPr>
+                        <a:t>3:45–4:05</a:t>
+                      </a:r>
+                      <a:endParaRPr lang="en-US" sz="1400" dirty="0"/>
+                    </a:p>
+                  </a:txBody>
+                  <a:tcPr marL="109728" marR="109728" marT="45720" marB="45720">
+                    <a:lnL w="9525" cap="flat" cmpd="sng" algn="ctr">
+                      <a:solidFill>
+                        <a:srgbClr val="D9CFB6"/>
+                      </a:solidFill>
+                      <a:prstDash val="solid"/>
+                      <a:round/>
+                      <a:headEnd type="none" w="med" len="med"/>
+                      <a:tailEnd type="none" w="med" len="med"/>
+                    </a:lnL>
+                    <a:lnR w="9525" cap="flat" cmpd="sng" algn="ctr">
+                      <a:solidFill>
+                        <a:srgbClr val="D9CFB6"/>
+                      </a:solidFill>
+                      <a:prstDash val="solid"/>
+                      <a:round/>
+                      <a:headEnd type="none" w="med" len="med"/>
+                      <a:tailEnd type="none" w="med" len="med"/>
+                    </a:lnR>
+                    <a:lnT w="9525" cap="flat" cmpd="sng" algn="ctr">
+                      <a:solidFill>
+                        <a:srgbClr val="D9CFB6"/>
+                      </a:solidFill>
+                      <a:prstDash val="solid"/>
+                      <a:round/>
+                      <a:headEnd type="none" w="med" len="med"/>
+                      <a:tailEnd type="none" w="med" len="med"/>
+                    </a:lnT>
+                    <a:lnB w="9525" cap="flat" cmpd="sng" algn="ctr">
+                      <a:solidFill>
+                        <a:srgbClr val="D9CFB6"/>
+                      </a:solidFill>
+                      <a:prstDash val="solid"/>
+                      <a:round/>
+                      <a:headEnd type="none" w="med" len="med"/>
+                      <a:tailEnd type="none" w="med" len="med"/>
+                    </a:lnB>
+                  </a:tcPr>
+                </a:tc>
+                <a:tc>
+                  <a:txBody>
+                    <a:bodyPr/>
+                    <a:lstStyle/>
+                    <a:p>
+                      <a:pPr indent="0" marL="0">
+                        <a:buNone/>
+                      </a:pPr>
+                      <a:r>
+                        <a:rPr lang="en-US" sz="1400" dirty="0">
+                          <a:solidFill>
+                            <a:srgbClr val="173D2E"/>
+                          </a:solidFill>
+                        </a:rPr>
+                        <a:t>How it works</a:t>
+                      </a:r>
+                      <a:endParaRPr lang="en-US" sz="1400" dirty="0"/>
+                    </a:p>
+                  </a:txBody>
+                  <a:tcPr marL="109728" marR="109728" marT="45720" marB="45720">
+                    <a:lnL w="9525" cap="flat" cmpd="sng" algn="ctr">
+                      <a:solidFill>
+                        <a:srgbClr val="D9CFB6"/>
+                      </a:solidFill>
+                      <a:prstDash val="solid"/>
+                      <a:round/>
+                      <a:headEnd type="none" w="med" len="med"/>
+                      <a:tailEnd type="none" w="med" len="med"/>
+                    </a:lnL>
+                    <a:lnR w="9525" cap="flat" cmpd="sng" algn="ctr">
+                      <a:solidFill>
+                        <a:srgbClr val="D9CFB6"/>
+                      </a:solidFill>
+                      <a:prstDash val="solid"/>
+                      <a:round/>
+                      <a:headEnd type="none" w="med" len="med"/>
+                      <a:tailEnd type="none" w="med" len="med"/>
+                    </a:lnR>
+                    <a:lnT w="9525" cap="flat" cmpd="sng" algn="ctr">
+                      <a:solidFill>
+                        <a:srgbClr val="D9CFB6"/>
+                      </a:solidFill>
+                      <a:prstDash val="solid"/>
+                      <a:round/>
+                      <a:headEnd type="none" w="med" len="med"/>
+                      <a:tailEnd type="none" w="med" len="med"/>
+                    </a:lnT>
+                    <a:lnB w="9525" cap="flat" cmpd="sng" algn="ctr">
+                      <a:solidFill>
+                        <a:srgbClr val="D9CFB6"/>
+                      </a:solidFill>
+                      <a:prstDash val="solid"/>
+                      <a:round/>
+                      <a:headEnd type="none" w="med" len="med"/>
+                      <a:tailEnd type="none" w="med" len="med"/>
+                    </a:lnB>
+                  </a:tcPr>
+                </a:tc>
+                <a:tc>
+                  <a:txBody>
+                    <a:bodyPr/>
+                    <a:lstStyle/>
+                    <a:p>
+                      <a:pPr indent="0" marL="0">
+                        <a:buNone/>
+                      </a:pPr>
+                      <a:r>
+                        <a:rPr lang="en-US" sz="1400" dirty="0">
+                          <a:solidFill>
+                            <a:srgbClr val="173D2E"/>
+                          </a:solidFill>
+                        </a:rPr>
+                        <a:t>Steven</a:t>
+                      </a:r>
+                      <a:endParaRPr lang="en-US" sz="1400" dirty="0"/>
+                    </a:p>
+                  </a:txBody>
+                  <a:tcPr marL="109728" marR="109728" marT="45720" marB="45720">
+                    <a:lnL w="9525" cap="flat" cmpd="sng" algn="ctr">
+                      <a:solidFill>
+                        <a:srgbClr val="D9CFB6"/>
+                      </a:solidFill>
+                      <a:prstDash val="solid"/>
+                      <a:round/>
+                      <a:headEnd type="none" w="med" len="med"/>
+                      <a:tailEnd type="none" w="med" len="med"/>
+                    </a:lnL>
+                    <a:lnR w="9525" cap="flat" cmpd="sng" algn="ctr">
+                      <a:solidFill>
+                        <a:srgbClr val="D9CFB6"/>
+                      </a:solidFill>
+                      <a:prstDash val="solid"/>
+                      <a:round/>
+                      <a:headEnd type="none" w="med" len="med"/>
+                      <a:tailEnd type="none" w="med" len="med"/>
+                    </a:lnR>
+                    <a:lnT w="9525" cap="flat" cmpd="sng" algn="ctr">
+                      <a:solidFill>
+                        <a:srgbClr val="D9CFB6"/>
+                      </a:solidFill>
+                      <a:prstDash val="solid"/>
+                      <a:round/>
+                      <a:headEnd type="none" w="med" len="med"/>
+                      <a:tailEnd type="none" w="med" len="med"/>
+                    </a:lnT>
+                    <a:lnB w="9525" cap="flat" cmpd="sng" algn="ctr">
+                      <a:solidFill>
+                        <a:srgbClr val="D9CFB6"/>
+                      </a:solidFill>
+                      <a:prstDash val="solid"/>
+                      <a:round/>
+                      <a:headEnd type="none" w="med" len="med"/>
+                      <a:tailEnd type="none" w="med" len="med"/>
+                    </a:lnB>
+                    <a:solidFill>
+                      <a:srgbClr val="D8E8F2"/>
+                    </a:solidFill>
+                  </a:tcPr>
+                </a:tc>
+                <a:tc>
+                  <a:txBody>
+                    <a:bodyPr/>
+                    <a:lstStyle/>
+                    <a:p>
+                      <a:pPr indent="0" marL="0">
+                        <a:buNone/>
+                      </a:pPr>
+                      <a:r>
+                        <a:rPr lang="en-US" sz="1400" dirty="0">
+                          <a:solidFill>
+                            <a:srgbClr val="173D2E"/>
+                          </a:solidFill>
+                        </a:rPr>
+                        <a:t>20 s</a:t>
+                      </a:r>
+                      <a:endParaRPr lang="en-US" sz="1400" dirty="0"/>
+                    </a:p>
+                  </a:txBody>
+                  <a:tcPr marL="109728" marR="109728" marT="45720" marB="45720">
+                    <a:lnL w="9525" cap="flat" cmpd="sng" algn="ctr">
+                      <a:solidFill>
+                        <a:srgbClr val="D9CFB6"/>
+                      </a:solidFill>
+                      <a:prstDash val="solid"/>
+                      <a:round/>
+                      <a:headEnd type="none" w="med" len="med"/>
+                      <a:tailEnd type="none" w="med" len="med"/>
+                    </a:lnL>
+                    <a:lnR w="9525" cap="flat" cmpd="sng" algn="ctr">
+                      <a:solidFill>
+                        <a:srgbClr val="D9CFB6"/>
+                      </a:solidFill>
+                      <a:prstDash val="solid"/>
+                      <a:round/>
+                      <a:headEnd type="none" w="med" len="med"/>
+                      <a:tailEnd type="none" w="med" len="med"/>
+                    </a:lnR>
+                    <a:lnT w="9525" cap="flat" cmpd="sng" algn="ctr">
+                      <a:solidFill>
+                        <a:srgbClr val="D9CFB6"/>
+                      </a:solidFill>
+                      <a:prstDash val="solid"/>
+                      <a:round/>
+                      <a:headEnd type="none" w="med" len="med"/>
+                      <a:tailEnd type="none" w="med" len="med"/>
+                    </a:lnT>
+                    <a:lnB w="9525" cap="flat" cmpd="sng" algn="ctr">
+                      <a:solidFill>
+                        <a:srgbClr val="D9CFB6"/>
+                      </a:solidFill>
+                      <a:prstDash val="solid"/>
+                      <a:round/>
+                      <a:headEnd type="none" w="med" len="med"/>
+                      <a:tailEnd type="none" w="med" len="med"/>
+                    </a:lnB>
+                  </a:tcPr>
+                </a:tc>
+              </a:tr>
+              <a:tr h="0">
+                <a:tc>
+                  <a:txBody>
+                    <a:bodyPr/>
+                    <a:lstStyle/>
+                    <a:p>
+                      <a:pPr indent="0" marL="0">
+                        <a:buNone/>
+                      </a:pPr>
+                      <a:r>
+                        <a:rPr lang="en-US" sz="1400" b="1" dirty="0">
+                          <a:solidFill>
+                            <a:srgbClr val="96590A"/>
+                          </a:solidFill>
+                        </a:rPr>
+                        <a:t>4:05–4:20</a:t>
+                      </a:r>
+                      <a:endParaRPr lang="en-US" sz="1400" dirty="0"/>
+                    </a:p>
+                  </a:txBody>
+                  <a:tcPr marL="109728" marR="109728" marT="45720" marB="45720">
+                    <a:lnL w="9525" cap="flat" cmpd="sng" algn="ctr">
+                      <a:solidFill>
+                        <a:srgbClr val="D9CFB6"/>
+                      </a:solidFill>
+                      <a:prstDash val="solid"/>
+                      <a:round/>
+                      <a:headEnd type="none" w="med" len="med"/>
+                      <a:tailEnd type="none" w="med" len="med"/>
+                    </a:lnL>
+                    <a:lnR w="9525" cap="flat" cmpd="sng" algn="ctr">
+                      <a:solidFill>
+                        <a:srgbClr val="D9CFB6"/>
+                      </a:solidFill>
+                      <a:prstDash val="solid"/>
+                      <a:round/>
+                      <a:headEnd type="none" w="med" len="med"/>
+                      <a:tailEnd type="none" w="med" len="med"/>
+                    </a:lnR>
+                    <a:lnT w="9525" cap="flat" cmpd="sng" algn="ctr">
+                      <a:solidFill>
+                        <a:srgbClr val="D9CFB6"/>
+                      </a:solidFill>
+                      <a:prstDash val="solid"/>
+                      <a:round/>
+                      <a:headEnd type="none" w="med" len="med"/>
+                      <a:tailEnd type="none" w="med" len="med"/>
+                    </a:lnT>
+                    <a:lnB w="9525" cap="flat" cmpd="sng" algn="ctr">
+                      <a:solidFill>
+                        <a:srgbClr val="D9CFB6"/>
+                      </a:solidFill>
+                      <a:prstDash val="solid"/>
+                      <a:round/>
+                      <a:headEnd type="none" w="med" len="med"/>
+                      <a:tailEnd type="none" w="med" len="med"/>
+                    </a:lnB>
+                  </a:tcPr>
+                </a:tc>
+                <a:tc>
+                  <a:txBody>
+                    <a:bodyPr/>
+                    <a:lstStyle/>
+                    <a:p>
+                      <a:pPr indent="0" marL="0">
+                        <a:buNone/>
+                      </a:pPr>
+                      <a:r>
+                        <a:rPr lang="en-US" sz="1400" dirty="0">
+                          <a:solidFill>
+                            <a:srgbClr val="173D2E"/>
+                          </a:solidFill>
+                        </a:rPr>
+                        <a:t>Impact</a:t>
+                      </a:r>
+                      <a:endParaRPr lang="en-US" sz="1400" dirty="0"/>
+                    </a:p>
+                  </a:txBody>
+                  <a:tcPr marL="109728" marR="109728" marT="45720" marB="45720">
+                    <a:lnL w="9525" cap="flat" cmpd="sng" algn="ctr">
+                      <a:solidFill>
+                        <a:srgbClr val="D9CFB6"/>
+                      </a:solidFill>
+                      <a:prstDash val="solid"/>
+                      <a:round/>
+                      <a:headEnd type="none" w="med" len="med"/>
+                      <a:tailEnd type="none" w="med" len="med"/>
+                    </a:lnL>
+                    <a:lnR w="9525" cap="flat" cmpd="sng" algn="ctr">
+                      <a:solidFill>
+                        <a:srgbClr val="D9CFB6"/>
+                      </a:solidFill>
+                      <a:prstDash val="solid"/>
+                      <a:round/>
+                      <a:headEnd type="none" w="med" len="med"/>
+                      <a:tailEnd type="none" w="med" len="med"/>
+                    </a:lnR>
+                    <a:lnT w="9525" cap="flat" cmpd="sng" algn="ctr">
+                      <a:solidFill>
+                        <a:srgbClr val="D9CFB6"/>
+                      </a:solidFill>
+                      <a:prstDash val="solid"/>
+                      <a:round/>
+                      <a:headEnd type="none" w="med" len="med"/>
+                      <a:tailEnd type="none" w="med" len="med"/>
+                    </a:lnT>
+                    <a:lnB w="9525" cap="flat" cmpd="sng" algn="ctr">
+                      <a:solidFill>
+                        <a:srgbClr val="D9CFB6"/>
+                      </a:solidFill>
+                      <a:prstDash val="solid"/>
+                      <a:round/>
+                      <a:headEnd type="none" w="med" len="med"/>
+                      <a:tailEnd type="none" w="med" len="med"/>
+                    </a:lnB>
+                  </a:tcPr>
+                </a:tc>
+                <a:tc>
+                  <a:txBody>
+                    <a:bodyPr/>
+                    <a:lstStyle/>
+                    <a:p>
+                      <a:pPr indent="0" marL="0">
+                        <a:buNone/>
+                      </a:pPr>
+                      <a:r>
+                        <a:rPr lang="en-US" sz="1400" dirty="0">
+                          <a:solidFill>
+                            <a:srgbClr val="173D2E"/>
+                          </a:solidFill>
+                        </a:rPr>
+                        <a:t>Steven</a:t>
+                      </a:r>
+                      <a:endParaRPr lang="en-US" sz="1400" dirty="0"/>
+                    </a:p>
+                  </a:txBody>
+                  <a:tcPr marL="109728" marR="109728" marT="45720" marB="45720">
+                    <a:lnL w="9525" cap="flat" cmpd="sng" algn="ctr">
+                      <a:solidFill>
+                        <a:srgbClr val="D9CFB6"/>
+                      </a:solidFill>
+                      <a:prstDash val="solid"/>
+                      <a:round/>
+                      <a:headEnd type="none" w="med" len="med"/>
+                      <a:tailEnd type="none" w="med" len="med"/>
+                    </a:lnL>
+                    <a:lnR w="9525" cap="flat" cmpd="sng" algn="ctr">
+                      <a:solidFill>
+                        <a:srgbClr val="D9CFB6"/>
+                      </a:solidFill>
+                      <a:prstDash val="solid"/>
+                      <a:round/>
+                      <a:headEnd type="none" w="med" len="med"/>
+                      <a:tailEnd type="none" w="med" len="med"/>
+                    </a:lnR>
+                    <a:lnT w="9525" cap="flat" cmpd="sng" algn="ctr">
+                      <a:solidFill>
+                        <a:srgbClr val="D9CFB6"/>
+                      </a:solidFill>
+                      <a:prstDash val="solid"/>
+                      <a:round/>
+                      <a:headEnd type="none" w="med" len="med"/>
+                      <a:tailEnd type="none" w="med" len="med"/>
+                    </a:lnT>
+                    <a:lnB w="9525" cap="flat" cmpd="sng" algn="ctr">
+                      <a:solidFill>
+                        <a:srgbClr val="D9CFB6"/>
+                      </a:solidFill>
+                      <a:prstDash val="solid"/>
+                      <a:round/>
+                      <a:headEnd type="none" w="med" len="med"/>
+                      <a:tailEnd type="none" w="med" len="med"/>
+                    </a:lnB>
+                    <a:solidFill>
+                      <a:srgbClr val="D8E8F2"/>
+                    </a:solidFill>
+                  </a:tcPr>
+                </a:tc>
+                <a:tc>
+                  <a:txBody>
+                    <a:bodyPr/>
+                    <a:lstStyle/>
+                    <a:p>
+                      <a:pPr indent="0" marL="0">
                         <a:buNone/>
                       </a:pPr>
                       <a:r>
@@ -4739,7 +6324,7 @@
                       <a:endParaRPr lang="en-US" sz="1400" dirty="0"/>
                     </a:p>
                   </a:txBody>
-                  <a:tcPr marL="109728" marR="109728">
+                  <a:tcPr marL="109728" marR="109728" marT="45720" marB="45720">
                     <a:lnL w="9525" cap="flat" cmpd="sng" algn="ctr">
                       <a:solidFill>
                         <a:srgbClr val="D9CFB6"/>
@@ -4778,11 +6363,6 @@
                     </a:lnB>
                   </a:tcPr>
                 </a:tc>
-                <a:extLst>
-                  <a:ext uri="{0D108BD9-81ED-4DB2-BD59-A6C34878D82A}">
-                    <a16:rowId xmlns:a16="http://schemas.microsoft.com/office/drawing/2014/main" val="10001"/>
-                  </a:ext>
-                </a:extLst>
               </a:tr>
               <a:tr h="0">
                 <a:tc>
@@ -4790,7 +6370,7 @@
                     <a:bodyPr/>
                     <a:lstStyle/>
                     <a:p>
-                      <a:pPr marL="0" indent="0">
+                      <a:pPr indent="0" marL="0">
                         <a:buNone/>
                       </a:pPr>
                       <a:r>
@@ -4799,12 +6379,12 @@
                             <a:srgbClr val="96590A"/>
                           </a:solidFill>
                         </a:rPr>
-                        <a:t>0:15–0:50</a:t>
+                        <a:t>4:20–4:30</a:t>
                       </a:r>
                       <a:endParaRPr lang="en-US" sz="1400" dirty="0"/>
                     </a:p>
                   </a:txBody>
-                  <a:tcPr marL="109728" marR="109728">
+                  <a:tcPr marL="109728" marR="109728" marT="45720" marB="45720">
                     <a:lnL w="9525" cap="flat" cmpd="sng" algn="ctr">
                       <a:solidFill>
                         <a:srgbClr val="D9CFB6"/>
@@ -4848,7 +6428,7 @@
                     <a:bodyPr/>
                     <a:lstStyle/>
                     <a:p>
-                      <a:pPr marL="0" indent="0">
+                      <a:pPr indent="0" marL="0">
                         <a:buNone/>
                       </a:pPr>
                       <a:r>
@@ -4857,12 +6437,12 @@
                             <a:srgbClr val="173D2E"/>
                           </a:solidFill>
                         </a:rPr>
-                        <a:t>Problem</a:t>
+                        <a:t>Innovation</a:t>
                       </a:r>
                       <a:endParaRPr lang="en-US" sz="1400" dirty="0"/>
                     </a:p>
                   </a:txBody>
-                  <a:tcPr marL="109728" marR="109728">
+                  <a:tcPr marL="109728" marR="109728" marT="45720" marB="45720">
                     <a:lnL w="9525" cap="flat" cmpd="sng" algn="ctr">
                       <a:solidFill>
                         <a:srgbClr val="D9CFB6"/>
@@ -4906,491 +6486,7 @@
                     <a:bodyPr/>
                     <a:lstStyle/>
                     <a:p>
-                      <a:pPr marL="0" indent="0">
-                        <a:buNone/>
-                      </a:pPr>
-                      <a:r>
-                        <a:rPr lang="en-US" sz="1400" dirty="0">
-                          <a:solidFill>
-                            <a:srgbClr val="173D2E"/>
-                          </a:solidFill>
-                        </a:rPr>
-                        <a:t>Thien Gen</a:t>
-                      </a:r>
-                      <a:endParaRPr lang="en-US" sz="1400" dirty="0"/>
-                    </a:p>
-                  </a:txBody>
-                  <a:tcPr marL="109728" marR="109728">
-                    <a:lnL w="9525" cap="flat" cmpd="sng" algn="ctr">
-                      <a:solidFill>
-                        <a:srgbClr val="D9CFB6"/>
-                      </a:solidFill>
-                      <a:prstDash val="solid"/>
-                      <a:round/>
-                      <a:headEnd type="none" w="med" len="med"/>
-                      <a:tailEnd type="none" w="med" len="med"/>
-                    </a:lnL>
-                    <a:lnR w="9525" cap="flat" cmpd="sng" algn="ctr">
-                      <a:solidFill>
-                        <a:srgbClr val="D9CFB6"/>
-                      </a:solidFill>
-                      <a:prstDash val="solid"/>
-                      <a:round/>
-                      <a:headEnd type="none" w="med" len="med"/>
-                      <a:tailEnd type="none" w="med" len="med"/>
-                    </a:lnR>
-                    <a:lnT w="9525" cap="flat" cmpd="sng" algn="ctr">
-                      <a:solidFill>
-                        <a:srgbClr val="D9CFB6"/>
-                      </a:solidFill>
-                      <a:prstDash val="solid"/>
-                      <a:round/>
-                      <a:headEnd type="none" w="med" len="med"/>
-                      <a:tailEnd type="none" w="med" len="med"/>
-                    </a:lnT>
-                    <a:lnB w="9525" cap="flat" cmpd="sng" algn="ctr">
-                      <a:solidFill>
-                        <a:srgbClr val="D9CFB6"/>
-                      </a:solidFill>
-                      <a:prstDash val="solid"/>
-                      <a:round/>
-                      <a:headEnd type="none" w="med" len="med"/>
-                      <a:tailEnd type="none" w="med" len="med"/>
-                    </a:lnB>
-                    <a:solidFill>
-                      <a:srgbClr val="F6E3C5"/>
-                    </a:solidFill>
-                  </a:tcPr>
-                </a:tc>
-                <a:tc>
-                  <a:txBody>
-                    <a:bodyPr/>
-                    <a:lstStyle/>
-                    <a:p>
-                      <a:pPr marL="0" indent="0">
-                        <a:buNone/>
-                      </a:pPr>
-                      <a:r>
-                        <a:rPr lang="en-US" sz="1400" dirty="0">
-                          <a:solidFill>
-                            <a:srgbClr val="173D2E"/>
-                          </a:solidFill>
-                        </a:rPr>
-                        <a:t>35 s</a:t>
-                      </a:r>
-                      <a:endParaRPr lang="en-US" sz="1400" dirty="0"/>
-                    </a:p>
-                  </a:txBody>
-                  <a:tcPr marL="109728" marR="109728">
-                    <a:lnL w="9525" cap="flat" cmpd="sng" algn="ctr">
-                      <a:solidFill>
-                        <a:srgbClr val="D9CFB6"/>
-                      </a:solidFill>
-                      <a:prstDash val="solid"/>
-                      <a:round/>
-                      <a:headEnd type="none" w="med" len="med"/>
-                      <a:tailEnd type="none" w="med" len="med"/>
-                    </a:lnL>
-                    <a:lnR w="9525" cap="flat" cmpd="sng" algn="ctr">
-                      <a:solidFill>
-                        <a:srgbClr val="D9CFB6"/>
-                      </a:solidFill>
-                      <a:prstDash val="solid"/>
-                      <a:round/>
-                      <a:headEnd type="none" w="med" len="med"/>
-                      <a:tailEnd type="none" w="med" len="med"/>
-                    </a:lnR>
-                    <a:lnT w="9525" cap="flat" cmpd="sng" algn="ctr">
-                      <a:solidFill>
-                        <a:srgbClr val="D9CFB6"/>
-                      </a:solidFill>
-                      <a:prstDash val="solid"/>
-                      <a:round/>
-                      <a:headEnd type="none" w="med" len="med"/>
-                      <a:tailEnd type="none" w="med" len="med"/>
-                    </a:lnT>
-                    <a:lnB w="9525" cap="flat" cmpd="sng" algn="ctr">
-                      <a:solidFill>
-                        <a:srgbClr val="D9CFB6"/>
-                      </a:solidFill>
-                      <a:prstDash val="solid"/>
-                      <a:round/>
-                      <a:headEnd type="none" w="med" len="med"/>
-                      <a:tailEnd type="none" w="med" len="med"/>
-                    </a:lnB>
-                  </a:tcPr>
-                </a:tc>
-                <a:extLst>
-                  <a:ext uri="{0D108BD9-81ED-4DB2-BD59-A6C34878D82A}">
-                    <a16:rowId xmlns:a16="http://schemas.microsoft.com/office/drawing/2014/main" val="10002"/>
-                  </a:ext>
-                </a:extLst>
-              </a:tr>
-              <a:tr h="0">
-                <a:tc>
-                  <a:txBody>
-                    <a:bodyPr/>
-                    <a:lstStyle/>
-                    <a:p>
-                      <a:pPr marL="0" indent="0">
-                        <a:buNone/>
-                      </a:pPr>
-                      <a:r>
-                        <a:rPr lang="en-US" sz="1400" b="1" dirty="0">
-                          <a:solidFill>
-                            <a:srgbClr val="96590A"/>
-                          </a:solidFill>
-                        </a:rPr>
-                        <a:t>0:50–1:10</a:t>
-                      </a:r>
-                      <a:endParaRPr lang="en-US" sz="1400" dirty="0"/>
-                    </a:p>
-                  </a:txBody>
-                  <a:tcPr marL="109728" marR="109728">
-                    <a:lnL w="9525" cap="flat" cmpd="sng" algn="ctr">
-                      <a:solidFill>
-                        <a:srgbClr val="D9CFB6"/>
-                      </a:solidFill>
-                      <a:prstDash val="solid"/>
-                      <a:round/>
-                      <a:headEnd type="none" w="med" len="med"/>
-                      <a:tailEnd type="none" w="med" len="med"/>
-                    </a:lnL>
-                    <a:lnR w="9525" cap="flat" cmpd="sng" algn="ctr">
-                      <a:solidFill>
-                        <a:srgbClr val="D9CFB6"/>
-                      </a:solidFill>
-                      <a:prstDash val="solid"/>
-                      <a:round/>
-                      <a:headEnd type="none" w="med" len="med"/>
-                      <a:tailEnd type="none" w="med" len="med"/>
-                    </a:lnR>
-                    <a:lnT w="9525" cap="flat" cmpd="sng" algn="ctr">
-                      <a:solidFill>
-                        <a:srgbClr val="D9CFB6"/>
-                      </a:solidFill>
-                      <a:prstDash val="solid"/>
-                      <a:round/>
-                      <a:headEnd type="none" w="med" len="med"/>
-                      <a:tailEnd type="none" w="med" len="med"/>
-                    </a:lnT>
-                    <a:lnB w="9525" cap="flat" cmpd="sng" algn="ctr">
-                      <a:solidFill>
-                        <a:srgbClr val="D9CFB6"/>
-                      </a:solidFill>
-                      <a:prstDash val="solid"/>
-                      <a:round/>
-                      <a:headEnd type="none" w="med" len="med"/>
-                      <a:tailEnd type="none" w="med" len="med"/>
-                    </a:lnB>
-                  </a:tcPr>
-                </a:tc>
-                <a:tc>
-                  <a:txBody>
-                    <a:bodyPr/>
-                    <a:lstStyle/>
-                    <a:p>
-                      <a:pPr marL="0" indent="0">
-                        <a:buNone/>
-                      </a:pPr>
-                      <a:r>
-                        <a:rPr lang="en-US" sz="1400" dirty="0">
-                          <a:solidFill>
-                            <a:srgbClr val="173D2E"/>
-                          </a:solidFill>
-                        </a:rPr>
-                        <a:t>Target user</a:t>
-                      </a:r>
-                      <a:endParaRPr lang="en-US" sz="1400" dirty="0"/>
-                    </a:p>
-                  </a:txBody>
-                  <a:tcPr marL="109728" marR="109728">
-                    <a:lnL w="9525" cap="flat" cmpd="sng" algn="ctr">
-                      <a:solidFill>
-                        <a:srgbClr val="D9CFB6"/>
-                      </a:solidFill>
-                      <a:prstDash val="solid"/>
-                      <a:round/>
-                      <a:headEnd type="none" w="med" len="med"/>
-                      <a:tailEnd type="none" w="med" len="med"/>
-                    </a:lnL>
-                    <a:lnR w="9525" cap="flat" cmpd="sng" algn="ctr">
-                      <a:solidFill>
-                        <a:srgbClr val="D9CFB6"/>
-                      </a:solidFill>
-                      <a:prstDash val="solid"/>
-                      <a:round/>
-                      <a:headEnd type="none" w="med" len="med"/>
-                      <a:tailEnd type="none" w="med" len="med"/>
-                    </a:lnR>
-                    <a:lnT w="9525" cap="flat" cmpd="sng" algn="ctr">
-                      <a:solidFill>
-                        <a:srgbClr val="D9CFB6"/>
-                      </a:solidFill>
-                      <a:prstDash val="solid"/>
-                      <a:round/>
-                      <a:headEnd type="none" w="med" len="med"/>
-                      <a:tailEnd type="none" w="med" len="med"/>
-                    </a:lnT>
-                    <a:lnB w="9525" cap="flat" cmpd="sng" algn="ctr">
-                      <a:solidFill>
-                        <a:srgbClr val="D9CFB6"/>
-                      </a:solidFill>
-                      <a:prstDash val="solid"/>
-                      <a:round/>
-                      <a:headEnd type="none" w="med" len="med"/>
-                      <a:tailEnd type="none" w="med" len="med"/>
-                    </a:lnB>
-                  </a:tcPr>
-                </a:tc>
-                <a:tc>
-                  <a:txBody>
-                    <a:bodyPr/>
-                    <a:lstStyle/>
-                    <a:p>
-                      <a:pPr marL="0" indent="0">
-                        <a:buNone/>
-                      </a:pPr>
-                      <a:r>
-                        <a:rPr lang="en-US" sz="1400" dirty="0">
-                          <a:solidFill>
-                            <a:srgbClr val="173D2E"/>
-                          </a:solidFill>
-                        </a:rPr>
-                        <a:t>Thien Gen</a:t>
-                      </a:r>
-                      <a:endParaRPr lang="en-US" sz="1400" dirty="0"/>
-                    </a:p>
-                  </a:txBody>
-                  <a:tcPr marL="109728" marR="109728">
-                    <a:lnL w="9525" cap="flat" cmpd="sng" algn="ctr">
-                      <a:solidFill>
-                        <a:srgbClr val="D9CFB6"/>
-                      </a:solidFill>
-                      <a:prstDash val="solid"/>
-                      <a:round/>
-                      <a:headEnd type="none" w="med" len="med"/>
-                      <a:tailEnd type="none" w="med" len="med"/>
-                    </a:lnL>
-                    <a:lnR w="9525" cap="flat" cmpd="sng" algn="ctr">
-                      <a:solidFill>
-                        <a:srgbClr val="D9CFB6"/>
-                      </a:solidFill>
-                      <a:prstDash val="solid"/>
-                      <a:round/>
-                      <a:headEnd type="none" w="med" len="med"/>
-                      <a:tailEnd type="none" w="med" len="med"/>
-                    </a:lnR>
-                    <a:lnT w="9525" cap="flat" cmpd="sng" algn="ctr">
-                      <a:solidFill>
-                        <a:srgbClr val="D9CFB6"/>
-                      </a:solidFill>
-                      <a:prstDash val="solid"/>
-                      <a:round/>
-                      <a:headEnd type="none" w="med" len="med"/>
-                      <a:tailEnd type="none" w="med" len="med"/>
-                    </a:lnT>
-                    <a:lnB w="9525" cap="flat" cmpd="sng" algn="ctr">
-                      <a:solidFill>
-                        <a:srgbClr val="D9CFB6"/>
-                      </a:solidFill>
-                      <a:prstDash val="solid"/>
-                      <a:round/>
-                      <a:headEnd type="none" w="med" len="med"/>
-                      <a:tailEnd type="none" w="med" len="med"/>
-                    </a:lnB>
-                    <a:solidFill>
-                      <a:srgbClr val="F6E3C5"/>
-                    </a:solidFill>
-                  </a:tcPr>
-                </a:tc>
-                <a:tc>
-                  <a:txBody>
-                    <a:bodyPr/>
-                    <a:lstStyle/>
-                    <a:p>
-                      <a:pPr marL="0" indent="0">
-                        <a:buNone/>
-                      </a:pPr>
-                      <a:r>
-                        <a:rPr lang="en-US" sz="1400" dirty="0">
-                          <a:solidFill>
-                            <a:srgbClr val="173D2E"/>
-                          </a:solidFill>
-                        </a:rPr>
-                        <a:t>20 s</a:t>
-                      </a:r>
-                      <a:endParaRPr lang="en-US" sz="1400" dirty="0"/>
-                    </a:p>
-                  </a:txBody>
-                  <a:tcPr marL="109728" marR="109728">
-                    <a:lnL w="9525" cap="flat" cmpd="sng" algn="ctr">
-                      <a:solidFill>
-                        <a:srgbClr val="D9CFB6"/>
-                      </a:solidFill>
-                      <a:prstDash val="solid"/>
-                      <a:round/>
-                      <a:headEnd type="none" w="med" len="med"/>
-                      <a:tailEnd type="none" w="med" len="med"/>
-                    </a:lnL>
-                    <a:lnR w="9525" cap="flat" cmpd="sng" algn="ctr">
-                      <a:solidFill>
-                        <a:srgbClr val="D9CFB6"/>
-                      </a:solidFill>
-                      <a:prstDash val="solid"/>
-                      <a:round/>
-                      <a:headEnd type="none" w="med" len="med"/>
-                      <a:tailEnd type="none" w="med" len="med"/>
-                    </a:lnR>
-                    <a:lnT w="9525" cap="flat" cmpd="sng" algn="ctr">
-                      <a:solidFill>
-                        <a:srgbClr val="D9CFB6"/>
-                      </a:solidFill>
-                      <a:prstDash val="solid"/>
-                      <a:round/>
-                      <a:headEnd type="none" w="med" len="med"/>
-                      <a:tailEnd type="none" w="med" len="med"/>
-                    </a:lnT>
-                    <a:lnB w="9525" cap="flat" cmpd="sng" algn="ctr">
-                      <a:solidFill>
-                        <a:srgbClr val="D9CFB6"/>
-                      </a:solidFill>
-                      <a:prstDash val="solid"/>
-                      <a:round/>
-                      <a:headEnd type="none" w="med" len="med"/>
-                      <a:tailEnd type="none" w="med" len="med"/>
-                    </a:lnB>
-                  </a:tcPr>
-                </a:tc>
-                <a:extLst>
-                  <a:ext uri="{0D108BD9-81ED-4DB2-BD59-A6C34878D82A}">
-                    <a16:rowId xmlns:a16="http://schemas.microsoft.com/office/drawing/2014/main" val="10003"/>
-                  </a:ext>
-                </a:extLst>
-              </a:tr>
-              <a:tr h="0">
-                <a:tc>
-                  <a:txBody>
-                    <a:bodyPr/>
-                    <a:lstStyle/>
-                    <a:p>
-                      <a:pPr marL="0" indent="0">
-                        <a:buNone/>
-                      </a:pPr>
-                      <a:r>
-                        <a:rPr lang="en-US" sz="1400" b="1" dirty="0">
-                          <a:solidFill>
-                            <a:srgbClr val="96590A"/>
-                          </a:solidFill>
-                        </a:rPr>
-                        <a:t>1:10–1:30</a:t>
-                      </a:r>
-                      <a:endParaRPr lang="en-US" sz="1400" dirty="0"/>
-                    </a:p>
-                  </a:txBody>
-                  <a:tcPr marL="109728" marR="109728">
-                    <a:lnL w="9525" cap="flat" cmpd="sng" algn="ctr">
-                      <a:solidFill>
-                        <a:srgbClr val="D9CFB6"/>
-                      </a:solidFill>
-                      <a:prstDash val="solid"/>
-                      <a:round/>
-                      <a:headEnd type="none" w="med" len="med"/>
-                      <a:tailEnd type="none" w="med" len="med"/>
-                    </a:lnL>
-                    <a:lnR w="9525" cap="flat" cmpd="sng" algn="ctr">
-                      <a:solidFill>
-                        <a:srgbClr val="D9CFB6"/>
-                      </a:solidFill>
-                      <a:prstDash val="solid"/>
-                      <a:round/>
-                      <a:headEnd type="none" w="med" len="med"/>
-                      <a:tailEnd type="none" w="med" len="med"/>
-                    </a:lnR>
-                    <a:lnT w="9525" cap="flat" cmpd="sng" algn="ctr">
-                      <a:solidFill>
-                        <a:srgbClr val="D9CFB6"/>
-                      </a:solidFill>
-                      <a:prstDash val="solid"/>
-                      <a:round/>
-                      <a:headEnd type="none" w="med" len="med"/>
-                      <a:tailEnd type="none" w="med" len="med"/>
-                    </a:lnT>
-                    <a:lnB w="9525" cap="flat" cmpd="sng" algn="ctr">
-                      <a:solidFill>
-                        <a:srgbClr val="D9CFB6"/>
-                      </a:solidFill>
-                      <a:prstDash val="solid"/>
-                      <a:round/>
-                      <a:headEnd type="none" w="med" len="med"/>
-                      <a:tailEnd type="none" w="med" len="med"/>
-                    </a:lnB>
-                  </a:tcPr>
-                </a:tc>
-                <a:tc>
-                  <a:txBody>
-                    <a:bodyPr/>
-                    <a:lstStyle/>
-                    <a:p>
-                      <a:pPr marL="0" indent="0">
-                        <a:buNone/>
-                      </a:pPr>
-                      <a:r>
-                        <a:rPr lang="en-US" sz="1400" dirty="0">
-                          <a:solidFill>
-                            <a:srgbClr val="173D2E"/>
-                          </a:solidFill>
-                        </a:rPr>
-                        <a:t>Solution</a:t>
-                      </a:r>
-                      <a:endParaRPr lang="en-US" sz="1400" dirty="0"/>
-                    </a:p>
-                  </a:txBody>
-                  <a:tcPr marL="109728" marR="109728">
-                    <a:lnL w="9525" cap="flat" cmpd="sng" algn="ctr">
-                      <a:solidFill>
-                        <a:srgbClr val="D9CFB6"/>
-                      </a:solidFill>
-                      <a:prstDash val="solid"/>
-                      <a:round/>
-                      <a:headEnd type="none" w="med" len="med"/>
-                      <a:tailEnd type="none" w="med" len="med"/>
-                    </a:lnL>
-                    <a:lnR w="9525" cap="flat" cmpd="sng" algn="ctr">
-                      <a:solidFill>
-                        <a:srgbClr val="D9CFB6"/>
-                      </a:solidFill>
-                      <a:prstDash val="solid"/>
-                      <a:round/>
-                      <a:headEnd type="none" w="med" len="med"/>
-                      <a:tailEnd type="none" w="med" len="med"/>
-                    </a:lnR>
-                    <a:lnT w="9525" cap="flat" cmpd="sng" algn="ctr">
-                      <a:solidFill>
-                        <a:srgbClr val="D9CFB6"/>
-                      </a:solidFill>
-                      <a:prstDash val="solid"/>
-                      <a:round/>
-                      <a:headEnd type="none" w="med" len="med"/>
-                      <a:tailEnd type="none" w="med" len="med"/>
-                    </a:lnT>
-                    <a:lnB w="9525" cap="flat" cmpd="sng" algn="ctr">
-                      <a:solidFill>
-                        <a:srgbClr val="D9CFB6"/>
-                      </a:solidFill>
-                      <a:prstDash val="solid"/>
-                      <a:round/>
-                      <a:headEnd type="none" w="med" len="med"/>
-                      <a:tailEnd type="none" w="med" len="med"/>
-                    </a:lnB>
-                  </a:tcPr>
-                </a:tc>
-                <a:tc>
-                  <a:txBody>
-                    <a:bodyPr/>
-                    <a:lstStyle/>
-                    <a:p>
-                      <a:pPr marL="0" indent="0">
+                      <a:pPr indent="0" marL="0">
                         <a:buNone/>
                       </a:pPr>
                       <a:r>
@@ -5404,7 +6500,7 @@
                       <a:endParaRPr lang="en-US" sz="1400" dirty="0"/>
                     </a:p>
                   </a:txBody>
-                  <a:tcPr marL="109728" marR="109728">
+                  <a:tcPr marL="109728" marR="109728" marT="45720" marB="45720">
                     <a:lnL w="9525" cap="flat" cmpd="sng" algn="ctr">
                       <a:solidFill>
                         <a:srgbClr val="D9CFB6"/>
@@ -5451,7 +6547,7 @@
                     <a:bodyPr/>
                     <a:lstStyle/>
                     <a:p>
-                      <a:pPr marL="0" indent="0">
+                      <a:pPr indent="0" marL="0">
                         <a:buNone/>
                       </a:pPr>
                       <a:r>
@@ -5460,12 +6556,12 @@
                             <a:srgbClr val="173D2E"/>
                           </a:solidFill>
                         </a:rPr>
-                        <a:t>20 s</a:t>
+                        <a:t>10 s</a:t>
                       </a:r>
                       <a:endParaRPr lang="en-US" sz="1400" dirty="0"/>
                     </a:p>
                   </a:txBody>
-                  <a:tcPr marL="109728" marR="109728">
+                  <a:tcPr marL="109728" marR="109728" marT="45720" marB="45720">
                     <a:lnL w="9525" cap="flat" cmpd="sng" algn="ctr">
                       <a:solidFill>
                         <a:srgbClr val="D9CFB6"/>
@@ -5504,11 +6600,6 @@
                     </a:lnB>
                   </a:tcPr>
                 </a:tc>
-                <a:extLst>
-                  <a:ext uri="{0D108BD9-81ED-4DB2-BD59-A6C34878D82A}">
-                    <a16:rowId xmlns:a16="http://schemas.microsoft.com/office/drawing/2014/main" val="10004"/>
-                  </a:ext>
-                </a:extLst>
               </a:tr>
               <a:tr h="0">
                 <a:tc>
@@ -5516,7 +6607,7 @@
                     <a:bodyPr/>
                     <a:lstStyle/>
                     <a:p>
-                      <a:pPr marL="0" indent="0">
+                      <a:pPr indent="0" marL="0">
                         <a:buNone/>
                       </a:pPr>
                       <a:r>
@@ -5525,12 +6616,12 @@
                             <a:srgbClr val="96590A"/>
                           </a:solidFill>
                         </a:rPr>
-                        <a:t>1:30–3:45</a:t>
+                        <a:t>4:30–4:45</a:t>
                       </a:r>
                       <a:endParaRPr lang="en-US" sz="1400" dirty="0"/>
                     </a:p>
                   </a:txBody>
-                  <a:tcPr marL="109728" marR="109728">
+                  <a:tcPr marL="109728" marR="109728" marT="45720" marB="45720">
                     <a:lnL w="9525" cap="flat" cmpd="sng" algn="ctr">
                       <a:solidFill>
                         <a:srgbClr val="D9CFB6"/>
@@ -5574,7 +6665,7 @@
                     <a:bodyPr/>
                     <a:lstStyle/>
                     <a:p>
-                      <a:pPr marL="0" indent="0">
+                      <a:pPr indent="0" marL="0">
                         <a:buNone/>
                       </a:pPr>
                       <a:r>
@@ -5583,12 +6674,12 @@
                             <a:srgbClr val="173D2E"/>
                           </a:solidFill>
                         </a:rPr>
-                        <a:t>Live demo (in the app)</a:t>
+                        <a:t>Feasibility</a:t>
                       </a:r>
                       <a:endParaRPr lang="en-US" sz="1400" dirty="0"/>
                     </a:p>
                   </a:txBody>
-                  <a:tcPr marL="109728" marR="109728">
+                  <a:tcPr marL="109728" marR="109728" marT="45720" marB="45720">
                     <a:lnL w="9525" cap="flat" cmpd="sng" algn="ctr">
                       <a:solidFill>
                         <a:srgbClr val="D9CFB6"/>
@@ -5632,249 +6723,7 @@
                     <a:bodyPr/>
                     <a:lstStyle/>
                     <a:p>
-                      <a:pPr marL="0" indent="0">
-                        <a:buNone/>
-                      </a:pPr>
-                      <a:r>
-                        <a:rPr lang="en-US" sz="1400" dirty="0">
-                          <a:solidFill>
-                            <a:srgbClr val="173D2E"/>
-                          </a:solidFill>
-                        </a:rPr>
-                        <a:t>Steven + Thien Gen</a:t>
-                      </a:r>
-                      <a:endParaRPr lang="en-US" sz="1400" dirty="0"/>
-                    </a:p>
-                  </a:txBody>
-                  <a:tcPr marL="109728" marR="109728">
-                    <a:lnL w="9525" cap="flat" cmpd="sng" algn="ctr">
-                      <a:solidFill>
-                        <a:srgbClr val="D9CFB6"/>
-                      </a:solidFill>
-                      <a:prstDash val="solid"/>
-                      <a:round/>
-                      <a:headEnd type="none" w="med" len="med"/>
-                      <a:tailEnd type="none" w="med" len="med"/>
-                    </a:lnL>
-                    <a:lnR w="9525" cap="flat" cmpd="sng" algn="ctr">
-                      <a:solidFill>
-                        <a:srgbClr val="D9CFB6"/>
-                      </a:solidFill>
-                      <a:prstDash val="solid"/>
-                      <a:round/>
-                      <a:headEnd type="none" w="med" len="med"/>
-                      <a:tailEnd type="none" w="med" len="med"/>
-                    </a:lnR>
-                    <a:lnT w="9525" cap="flat" cmpd="sng" algn="ctr">
-                      <a:solidFill>
-                        <a:srgbClr val="D9CFB6"/>
-                      </a:solidFill>
-                      <a:prstDash val="solid"/>
-                      <a:round/>
-                      <a:headEnd type="none" w="med" len="med"/>
-                      <a:tailEnd type="none" w="med" len="med"/>
-                    </a:lnT>
-                    <a:lnB w="9525" cap="flat" cmpd="sng" algn="ctr">
-                      <a:solidFill>
-                        <a:srgbClr val="D9CFB6"/>
-                      </a:solidFill>
-                      <a:prstDash val="solid"/>
-                      <a:round/>
-                      <a:headEnd type="none" w="med" len="med"/>
-                      <a:tailEnd type="none" w="med" len="med"/>
-                    </a:lnB>
-                    <a:solidFill>
-                      <a:srgbClr val="D7EBDD"/>
-                    </a:solidFill>
-                  </a:tcPr>
-                </a:tc>
-                <a:tc>
-                  <a:txBody>
-                    <a:bodyPr/>
-                    <a:lstStyle/>
-                    <a:p>
-                      <a:pPr marL="0" indent="0">
-                        <a:buNone/>
-                      </a:pPr>
-                      <a:r>
-                        <a:rPr lang="en-US" sz="1400" dirty="0">
-                          <a:solidFill>
-                            <a:srgbClr val="173D2E"/>
-                          </a:solidFill>
-                        </a:rPr>
-                        <a:t>135 s</a:t>
-                      </a:r>
-                      <a:endParaRPr lang="en-US" sz="1400" dirty="0"/>
-                    </a:p>
-                  </a:txBody>
-                  <a:tcPr marL="109728" marR="109728">
-                    <a:lnL w="9525" cap="flat" cmpd="sng" algn="ctr">
-                      <a:solidFill>
-                        <a:srgbClr val="D9CFB6"/>
-                      </a:solidFill>
-                      <a:prstDash val="solid"/>
-                      <a:round/>
-                      <a:headEnd type="none" w="med" len="med"/>
-                      <a:tailEnd type="none" w="med" len="med"/>
-                    </a:lnL>
-                    <a:lnR w="9525" cap="flat" cmpd="sng" algn="ctr">
-                      <a:solidFill>
-                        <a:srgbClr val="D9CFB6"/>
-                      </a:solidFill>
-                      <a:prstDash val="solid"/>
-                      <a:round/>
-                      <a:headEnd type="none" w="med" len="med"/>
-                      <a:tailEnd type="none" w="med" len="med"/>
-                    </a:lnR>
-                    <a:lnT w="9525" cap="flat" cmpd="sng" algn="ctr">
-                      <a:solidFill>
-                        <a:srgbClr val="D9CFB6"/>
-                      </a:solidFill>
-                      <a:prstDash val="solid"/>
-                      <a:round/>
-                      <a:headEnd type="none" w="med" len="med"/>
-                      <a:tailEnd type="none" w="med" len="med"/>
-                    </a:lnT>
-                    <a:lnB w="9525" cap="flat" cmpd="sng" algn="ctr">
-                      <a:solidFill>
-                        <a:srgbClr val="D9CFB6"/>
-                      </a:solidFill>
-                      <a:prstDash val="solid"/>
-                      <a:round/>
-                      <a:headEnd type="none" w="med" len="med"/>
-                      <a:tailEnd type="none" w="med" len="med"/>
-                    </a:lnB>
-                  </a:tcPr>
-                </a:tc>
-                <a:extLst>
-                  <a:ext uri="{0D108BD9-81ED-4DB2-BD59-A6C34878D82A}">
-                    <a16:rowId xmlns:a16="http://schemas.microsoft.com/office/drawing/2014/main" val="10005"/>
-                  </a:ext>
-                </a:extLst>
-              </a:tr>
-              <a:tr h="0">
-                <a:tc>
-                  <a:txBody>
-                    <a:bodyPr/>
-                    <a:lstStyle/>
-                    <a:p>
-                      <a:pPr marL="0" indent="0">
-                        <a:buNone/>
-                      </a:pPr>
-                      <a:r>
-                        <a:rPr lang="en-US" sz="1400" b="1" dirty="0">
-                          <a:solidFill>
-                            <a:srgbClr val="96590A"/>
-                          </a:solidFill>
-                        </a:rPr>
-                        <a:t>3:45–4:05</a:t>
-                      </a:r>
-                      <a:endParaRPr lang="en-US" sz="1400" dirty="0"/>
-                    </a:p>
-                  </a:txBody>
-                  <a:tcPr marL="109728" marR="109728">
-                    <a:lnL w="9525" cap="flat" cmpd="sng" algn="ctr">
-                      <a:solidFill>
-                        <a:srgbClr val="D9CFB6"/>
-                      </a:solidFill>
-                      <a:prstDash val="solid"/>
-                      <a:round/>
-                      <a:headEnd type="none" w="med" len="med"/>
-                      <a:tailEnd type="none" w="med" len="med"/>
-                    </a:lnL>
-                    <a:lnR w="9525" cap="flat" cmpd="sng" algn="ctr">
-                      <a:solidFill>
-                        <a:srgbClr val="D9CFB6"/>
-                      </a:solidFill>
-                      <a:prstDash val="solid"/>
-                      <a:round/>
-                      <a:headEnd type="none" w="med" len="med"/>
-                      <a:tailEnd type="none" w="med" len="med"/>
-                    </a:lnR>
-                    <a:lnT w="9525" cap="flat" cmpd="sng" algn="ctr">
-                      <a:solidFill>
-                        <a:srgbClr val="D9CFB6"/>
-                      </a:solidFill>
-                      <a:prstDash val="solid"/>
-                      <a:round/>
-                      <a:headEnd type="none" w="med" len="med"/>
-                      <a:tailEnd type="none" w="med" len="med"/>
-                    </a:lnT>
-                    <a:lnB w="9525" cap="flat" cmpd="sng" algn="ctr">
-                      <a:solidFill>
-                        <a:srgbClr val="D9CFB6"/>
-                      </a:solidFill>
-                      <a:prstDash val="solid"/>
-                      <a:round/>
-                      <a:headEnd type="none" w="med" len="med"/>
-                      <a:tailEnd type="none" w="med" len="med"/>
-                    </a:lnB>
-                  </a:tcPr>
-                </a:tc>
-                <a:tc>
-                  <a:txBody>
-                    <a:bodyPr/>
-                    <a:lstStyle/>
-                    <a:p>
-                      <a:pPr marL="0" indent="0">
-                        <a:buNone/>
-                      </a:pPr>
-                      <a:r>
-                        <a:rPr lang="en-US" sz="1400" dirty="0">
-                          <a:solidFill>
-                            <a:srgbClr val="173D2E"/>
-                          </a:solidFill>
-                        </a:rPr>
-                        <a:t>How it works</a:t>
-                      </a:r>
-                      <a:endParaRPr lang="en-US" sz="1400" dirty="0"/>
-                    </a:p>
-                  </a:txBody>
-                  <a:tcPr marL="109728" marR="109728">
-                    <a:lnL w="9525" cap="flat" cmpd="sng" algn="ctr">
-                      <a:solidFill>
-                        <a:srgbClr val="D9CFB6"/>
-                      </a:solidFill>
-                      <a:prstDash val="solid"/>
-                      <a:round/>
-                      <a:headEnd type="none" w="med" len="med"/>
-                      <a:tailEnd type="none" w="med" len="med"/>
-                    </a:lnL>
-                    <a:lnR w="9525" cap="flat" cmpd="sng" algn="ctr">
-                      <a:solidFill>
-                        <a:srgbClr val="D9CFB6"/>
-                      </a:solidFill>
-                      <a:prstDash val="solid"/>
-                      <a:round/>
-                      <a:headEnd type="none" w="med" len="med"/>
-                      <a:tailEnd type="none" w="med" len="med"/>
-                    </a:lnR>
-                    <a:lnT w="9525" cap="flat" cmpd="sng" algn="ctr">
-                      <a:solidFill>
-                        <a:srgbClr val="D9CFB6"/>
-                      </a:solidFill>
-                      <a:prstDash val="solid"/>
-                      <a:round/>
-                      <a:headEnd type="none" w="med" len="med"/>
-                      <a:tailEnd type="none" w="med" len="med"/>
-                    </a:lnT>
-                    <a:lnB w="9525" cap="flat" cmpd="sng" algn="ctr">
-                      <a:solidFill>
-                        <a:srgbClr val="D9CFB6"/>
-                      </a:solidFill>
-                      <a:prstDash val="solid"/>
-                      <a:round/>
-                      <a:headEnd type="none" w="med" len="med"/>
-                      <a:tailEnd type="none" w="med" len="med"/>
-                    </a:lnB>
-                  </a:tcPr>
-                </a:tc>
-                <a:tc>
-                  <a:txBody>
-                    <a:bodyPr/>
-                    <a:lstStyle/>
-                    <a:p>
-                      <a:pPr marL="0" indent="0">
+                      <a:pPr indent="0" marL="0">
                         <a:buNone/>
                       </a:pPr>
                       <a:r>
@@ -5888,7 +6737,7 @@
                       <a:endParaRPr lang="en-US" sz="1400" dirty="0"/>
                     </a:p>
                   </a:txBody>
-                  <a:tcPr marL="109728" marR="109728">
+                  <a:tcPr marL="109728" marR="109728" marT="45720" marB="45720">
                     <a:lnL w="9525" cap="flat" cmpd="sng" algn="ctr">
                       <a:solidFill>
                         <a:srgbClr val="D9CFB6"/>
@@ -5935,249 +6784,7 @@
                     <a:bodyPr/>
                     <a:lstStyle/>
                     <a:p>
-                      <a:pPr marL="0" indent="0">
-                        <a:buNone/>
-                      </a:pPr>
-                      <a:r>
-                        <a:rPr lang="en-US" sz="1400" dirty="0">
-                          <a:solidFill>
-                            <a:srgbClr val="173D2E"/>
-                          </a:solidFill>
-                        </a:rPr>
-                        <a:t>20 s</a:t>
-                      </a:r>
-                      <a:endParaRPr lang="en-US" sz="1400" dirty="0"/>
-                    </a:p>
-                  </a:txBody>
-                  <a:tcPr marL="109728" marR="109728">
-                    <a:lnL w="9525" cap="flat" cmpd="sng" algn="ctr">
-                      <a:solidFill>
-                        <a:srgbClr val="D9CFB6"/>
-                      </a:solidFill>
-                      <a:prstDash val="solid"/>
-                      <a:round/>
-                      <a:headEnd type="none" w="med" len="med"/>
-                      <a:tailEnd type="none" w="med" len="med"/>
-                    </a:lnL>
-                    <a:lnR w="9525" cap="flat" cmpd="sng" algn="ctr">
-                      <a:solidFill>
-                        <a:srgbClr val="D9CFB6"/>
-                      </a:solidFill>
-                      <a:prstDash val="solid"/>
-                      <a:round/>
-                      <a:headEnd type="none" w="med" len="med"/>
-                      <a:tailEnd type="none" w="med" len="med"/>
-                    </a:lnR>
-                    <a:lnT w="9525" cap="flat" cmpd="sng" algn="ctr">
-                      <a:solidFill>
-                        <a:srgbClr val="D9CFB6"/>
-                      </a:solidFill>
-                      <a:prstDash val="solid"/>
-                      <a:round/>
-                      <a:headEnd type="none" w="med" len="med"/>
-                      <a:tailEnd type="none" w="med" len="med"/>
-                    </a:lnT>
-                    <a:lnB w="9525" cap="flat" cmpd="sng" algn="ctr">
-                      <a:solidFill>
-                        <a:srgbClr val="D9CFB6"/>
-                      </a:solidFill>
-                      <a:prstDash val="solid"/>
-                      <a:round/>
-                      <a:headEnd type="none" w="med" len="med"/>
-                      <a:tailEnd type="none" w="med" len="med"/>
-                    </a:lnB>
-                  </a:tcPr>
-                </a:tc>
-                <a:extLst>
-                  <a:ext uri="{0D108BD9-81ED-4DB2-BD59-A6C34878D82A}">
-                    <a16:rowId xmlns:a16="http://schemas.microsoft.com/office/drawing/2014/main" val="10006"/>
-                  </a:ext>
-                </a:extLst>
-              </a:tr>
-              <a:tr h="0">
-                <a:tc>
-                  <a:txBody>
-                    <a:bodyPr/>
-                    <a:lstStyle/>
-                    <a:p>
-                      <a:pPr marL="0" indent="0">
-                        <a:buNone/>
-                      </a:pPr>
-                      <a:r>
-                        <a:rPr lang="en-US" sz="1400" b="1" dirty="0">
-                          <a:solidFill>
-                            <a:srgbClr val="96590A"/>
-                          </a:solidFill>
-                        </a:rPr>
-                        <a:t>4:05–4:20</a:t>
-                      </a:r>
-                      <a:endParaRPr lang="en-US" sz="1400" dirty="0"/>
-                    </a:p>
-                  </a:txBody>
-                  <a:tcPr marL="109728" marR="109728">
-                    <a:lnL w="9525" cap="flat" cmpd="sng" algn="ctr">
-                      <a:solidFill>
-                        <a:srgbClr val="D9CFB6"/>
-                      </a:solidFill>
-                      <a:prstDash val="solid"/>
-                      <a:round/>
-                      <a:headEnd type="none" w="med" len="med"/>
-                      <a:tailEnd type="none" w="med" len="med"/>
-                    </a:lnL>
-                    <a:lnR w="9525" cap="flat" cmpd="sng" algn="ctr">
-                      <a:solidFill>
-                        <a:srgbClr val="D9CFB6"/>
-                      </a:solidFill>
-                      <a:prstDash val="solid"/>
-                      <a:round/>
-                      <a:headEnd type="none" w="med" len="med"/>
-                      <a:tailEnd type="none" w="med" len="med"/>
-                    </a:lnR>
-                    <a:lnT w="9525" cap="flat" cmpd="sng" algn="ctr">
-                      <a:solidFill>
-                        <a:srgbClr val="D9CFB6"/>
-                      </a:solidFill>
-                      <a:prstDash val="solid"/>
-                      <a:round/>
-                      <a:headEnd type="none" w="med" len="med"/>
-                      <a:tailEnd type="none" w="med" len="med"/>
-                    </a:lnT>
-                    <a:lnB w="9525" cap="flat" cmpd="sng" algn="ctr">
-                      <a:solidFill>
-                        <a:srgbClr val="D9CFB6"/>
-                      </a:solidFill>
-                      <a:prstDash val="solid"/>
-                      <a:round/>
-                      <a:headEnd type="none" w="med" len="med"/>
-                      <a:tailEnd type="none" w="med" len="med"/>
-                    </a:lnB>
-                  </a:tcPr>
-                </a:tc>
-                <a:tc>
-                  <a:txBody>
-                    <a:bodyPr/>
-                    <a:lstStyle/>
-                    <a:p>
-                      <a:pPr marL="0" indent="0">
-                        <a:buNone/>
-                      </a:pPr>
-                      <a:r>
-                        <a:rPr lang="en-US" sz="1400" dirty="0">
-                          <a:solidFill>
-                            <a:srgbClr val="173D2E"/>
-                          </a:solidFill>
-                        </a:rPr>
-                        <a:t>Impact</a:t>
-                      </a:r>
-                      <a:endParaRPr lang="en-US" sz="1400" dirty="0"/>
-                    </a:p>
-                  </a:txBody>
-                  <a:tcPr marL="109728" marR="109728">
-                    <a:lnL w="9525" cap="flat" cmpd="sng" algn="ctr">
-                      <a:solidFill>
-                        <a:srgbClr val="D9CFB6"/>
-                      </a:solidFill>
-                      <a:prstDash val="solid"/>
-                      <a:round/>
-                      <a:headEnd type="none" w="med" len="med"/>
-                      <a:tailEnd type="none" w="med" len="med"/>
-                    </a:lnL>
-                    <a:lnR w="9525" cap="flat" cmpd="sng" algn="ctr">
-                      <a:solidFill>
-                        <a:srgbClr val="D9CFB6"/>
-                      </a:solidFill>
-                      <a:prstDash val="solid"/>
-                      <a:round/>
-                      <a:headEnd type="none" w="med" len="med"/>
-                      <a:tailEnd type="none" w="med" len="med"/>
-                    </a:lnR>
-                    <a:lnT w="9525" cap="flat" cmpd="sng" algn="ctr">
-                      <a:solidFill>
-                        <a:srgbClr val="D9CFB6"/>
-                      </a:solidFill>
-                      <a:prstDash val="solid"/>
-                      <a:round/>
-                      <a:headEnd type="none" w="med" len="med"/>
-                      <a:tailEnd type="none" w="med" len="med"/>
-                    </a:lnT>
-                    <a:lnB w="9525" cap="flat" cmpd="sng" algn="ctr">
-                      <a:solidFill>
-                        <a:srgbClr val="D9CFB6"/>
-                      </a:solidFill>
-                      <a:prstDash val="solid"/>
-                      <a:round/>
-                      <a:headEnd type="none" w="med" len="med"/>
-                      <a:tailEnd type="none" w="med" len="med"/>
-                    </a:lnB>
-                  </a:tcPr>
-                </a:tc>
-                <a:tc>
-                  <a:txBody>
-                    <a:bodyPr/>
-                    <a:lstStyle/>
-                    <a:p>
-                      <a:pPr marL="0" indent="0">
-                        <a:buNone/>
-                      </a:pPr>
-                      <a:r>
-                        <a:rPr lang="en-US" sz="1400" dirty="0">
-                          <a:solidFill>
-                            <a:srgbClr val="173D2E"/>
-                          </a:solidFill>
-                        </a:rPr>
-                        <a:t>Thien Gen</a:t>
-                      </a:r>
-                      <a:endParaRPr lang="en-US" sz="1400" dirty="0"/>
-                    </a:p>
-                  </a:txBody>
-                  <a:tcPr marL="109728" marR="109728">
-                    <a:lnL w="9525" cap="flat" cmpd="sng" algn="ctr">
-                      <a:solidFill>
-                        <a:srgbClr val="D9CFB6"/>
-                      </a:solidFill>
-                      <a:prstDash val="solid"/>
-                      <a:round/>
-                      <a:headEnd type="none" w="med" len="med"/>
-                      <a:tailEnd type="none" w="med" len="med"/>
-                    </a:lnL>
-                    <a:lnR w="9525" cap="flat" cmpd="sng" algn="ctr">
-                      <a:solidFill>
-                        <a:srgbClr val="D9CFB6"/>
-                      </a:solidFill>
-                      <a:prstDash val="solid"/>
-                      <a:round/>
-                      <a:headEnd type="none" w="med" len="med"/>
-                      <a:tailEnd type="none" w="med" len="med"/>
-                    </a:lnR>
-                    <a:lnT w="9525" cap="flat" cmpd="sng" algn="ctr">
-                      <a:solidFill>
-                        <a:srgbClr val="D9CFB6"/>
-                      </a:solidFill>
-                      <a:prstDash val="solid"/>
-                      <a:round/>
-                      <a:headEnd type="none" w="med" len="med"/>
-                      <a:tailEnd type="none" w="med" len="med"/>
-                    </a:lnT>
-                    <a:lnB w="9525" cap="flat" cmpd="sng" algn="ctr">
-                      <a:solidFill>
-                        <a:srgbClr val="D9CFB6"/>
-                      </a:solidFill>
-                      <a:prstDash val="solid"/>
-                      <a:round/>
-                      <a:headEnd type="none" w="med" len="med"/>
-                      <a:tailEnd type="none" w="med" len="med"/>
-                    </a:lnB>
-                    <a:solidFill>
-                      <a:srgbClr val="F6E3C5"/>
-                    </a:solidFill>
-                  </a:tcPr>
-                </a:tc>
-                <a:tc>
-                  <a:txBody>
-                    <a:bodyPr/>
-                    <a:lstStyle/>
-                    <a:p>
-                      <a:pPr marL="0" indent="0">
+                      <a:pPr indent="0" marL="0">
                         <a:buNone/>
                       </a:pPr>
                       <a:r>
@@ -6191,7 +6798,7 @@
                       <a:endParaRPr lang="en-US" sz="1400" dirty="0"/>
                     </a:p>
                   </a:txBody>
-                  <a:tcPr marL="109728" marR="109728">
+                  <a:tcPr marL="109728" marR="109728" marT="45720" marB="45720">
                     <a:lnL w="9525" cap="flat" cmpd="sng" algn="ctr">
                       <a:solidFill>
                         <a:srgbClr val="D9CFB6"/>
@@ -6230,11 +6837,6 @@
                     </a:lnB>
                   </a:tcPr>
                 </a:tc>
-                <a:extLst>
-                  <a:ext uri="{0D108BD9-81ED-4DB2-BD59-A6C34878D82A}">
-                    <a16:rowId xmlns:a16="http://schemas.microsoft.com/office/drawing/2014/main" val="10007"/>
-                  </a:ext>
-                </a:extLst>
               </a:tr>
               <a:tr h="0">
                 <a:tc>
@@ -6242,7 +6844,7 @@
                     <a:bodyPr/>
                     <a:lstStyle/>
                     <a:p>
-                      <a:pPr marL="0" indent="0">
+                      <a:pPr indent="0" marL="0">
                         <a:buNone/>
                       </a:pPr>
                       <a:r>
@@ -6251,12 +6853,12 @@
                             <a:srgbClr val="96590A"/>
                           </a:solidFill>
                         </a:rPr>
-                        <a:t>4:20–4:30</a:t>
+                        <a:t>4:45–5:00</a:t>
                       </a:r>
                       <a:endParaRPr lang="en-US" sz="1400" dirty="0"/>
                     </a:p>
                   </a:txBody>
-                  <a:tcPr marL="109728" marR="109728">
+                  <a:tcPr marL="109728" marR="109728" marT="45720" marB="45720">
                     <a:lnL w="9525" cap="flat" cmpd="sng" algn="ctr">
                       <a:solidFill>
                         <a:srgbClr val="D9CFB6"/>
@@ -6300,7 +6902,7 @@
                     <a:bodyPr/>
                     <a:lstStyle/>
                     <a:p>
-                      <a:pPr marL="0" indent="0">
+                      <a:pPr indent="0" marL="0">
                         <a:buNone/>
                       </a:pPr>
                       <a:r>
@@ -6309,12 +6911,12 @@
                             <a:srgbClr val="173D2E"/>
                           </a:solidFill>
                         </a:rPr>
-                        <a:t>Innovation</a:t>
+                        <a:t>Implementation</a:t>
                       </a:r>
                       <a:endParaRPr lang="en-US" sz="1400" dirty="0"/>
                     </a:p>
                   </a:txBody>
-                  <a:tcPr marL="109728" marR="109728">
+                  <a:tcPr marL="109728" marR="109728" marT="45720" marB="45720">
                     <a:lnL w="9525" cap="flat" cmpd="sng" algn="ctr">
                       <a:solidFill>
                         <a:srgbClr val="D9CFB6"/>
@@ -6358,249 +6960,7 @@
                     <a:bodyPr/>
                     <a:lstStyle/>
                     <a:p>
-                      <a:pPr marL="0" indent="0">
-                        <a:buNone/>
-                      </a:pPr>
-                      <a:r>
-                        <a:rPr lang="en-US" sz="1400" dirty="0">
-                          <a:solidFill>
-                            <a:srgbClr val="173D2E"/>
-                          </a:solidFill>
-                        </a:rPr>
-                        <a:t>Thien Gen</a:t>
-                      </a:r>
-                      <a:endParaRPr lang="en-US" sz="1400" dirty="0"/>
-                    </a:p>
-                  </a:txBody>
-                  <a:tcPr marL="109728" marR="109728">
-                    <a:lnL w="9525" cap="flat" cmpd="sng" algn="ctr">
-                      <a:solidFill>
-                        <a:srgbClr val="D9CFB6"/>
-                      </a:solidFill>
-                      <a:prstDash val="solid"/>
-                      <a:round/>
-                      <a:headEnd type="none" w="med" len="med"/>
-                      <a:tailEnd type="none" w="med" len="med"/>
-                    </a:lnL>
-                    <a:lnR w="9525" cap="flat" cmpd="sng" algn="ctr">
-                      <a:solidFill>
-                        <a:srgbClr val="D9CFB6"/>
-                      </a:solidFill>
-                      <a:prstDash val="solid"/>
-                      <a:round/>
-                      <a:headEnd type="none" w="med" len="med"/>
-                      <a:tailEnd type="none" w="med" len="med"/>
-                    </a:lnR>
-                    <a:lnT w="9525" cap="flat" cmpd="sng" algn="ctr">
-                      <a:solidFill>
-                        <a:srgbClr val="D9CFB6"/>
-                      </a:solidFill>
-                      <a:prstDash val="solid"/>
-                      <a:round/>
-                      <a:headEnd type="none" w="med" len="med"/>
-                      <a:tailEnd type="none" w="med" len="med"/>
-                    </a:lnT>
-                    <a:lnB w="9525" cap="flat" cmpd="sng" algn="ctr">
-                      <a:solidFill>
-                        <a:srgbClr val="D9CFB6"/>
-                      </a:solidFill>
-                      <a:prstDash val="solid"/>
-                      <a:round/>
-                      <a:headEnd type="none" w="med" len="med"/>
-                      <a:tailEnd type="none" w="med" len="med"/>
-                    </a:lnB>
-                    <a:solidFill>
-                      <a:srgbClr val="F6E3C5"/>
-                    </a:solidFill>
-                  </a:tcPr>
-                </a:tc>
-                <a:tc>
-                  <a:txBody>
-                    <a:bodyPr/>
-                    <a:lstStyle/>
-                    <a:p>
-                      <a:pPr marL="0" indent="0">
-                        <a:buNone/>
-                      </a:pPr>
-                      <a:r>
-                        <a:rPr lang="en-US" sz="1400" dirty="0">
-                          <a:solidFill>
-                            <a:srgbClr val="173D2E"/>
-                          </a:solidFill>
-                        </a:rPr>
-                        <a:t>10 s</a:t>
-                      </a:r>
-                      <a:endParaRPr lang="en-US" sz="1400" dirty="0"/>
-                    </a:p>
-                  </a:txBody>
-                  <a:tcPr marL="109728" marR="109728">
-                    <a:lnL w="9525" cap="flat" cmpd="sng" algn="ctr">
-                      <a:solidFill>
-                        <a:srgbClr val="D9CFB6"/>
-                      </a:solidFill>
-                      <a:prstDash val="solid"/>
-                      <a:round/>
-                      <a:headEnd type="none" w="med" len="med"/>
-                      <a:tailEnd type="none" w="med" len="med"/>
-                    </a:lnL>
-                    <a:lnR w="9525" cap="flat" cmpd="sng" algn="ctr">
-                      <a:solidFill>
-                        <a:srgbClr val="D9CFB6"/>
-                      </a:solidFill>
-                      <a:prstDash val="solid"/>
-                      <a:round/>
-                      <a:headEnd type="none" w="med" len="med"/>
-                      <a:tailEnd type="none" w="med" len="med"/>
-                    </a:lnR>
-                    <a:lnT w="9525" cap="flat" cmpd="sng" algn="ctr">
-                      <a:solidFill>
-                        <a:srgbClr val="D9CFB6"/>
-                      </a:solidFill>
-                      <a:prstDash val="solid"/>
-                      <a:round/>
-                      <a:headEnd type="none" w="med" len="med"/>
-                      <a:tailEnd type="none" w="med" len="med"/>
-                    </a:lnT>
-                    <a:lnB w="9525" cap="flat" cmpd="sng" algn="ctr">
-                      <a:solidFill>
-                        <a:srgbClr val="D9CFB6"/>
-                      </a:solidFill>
-                      <a:prstDash val="solid"/>
-                      <a:round/>
-                      <a:headEnd type="none" w="med" len="med"/>
-                      <a:tailEnd type="none" w="med" len="med"/>
-                    </a:lnB>
-                  </a:tcPr>
-                </a:tc>
-                <a:extLst>
-                  <a:ext uri="{0D108BD9-81ED-4DB2-BD59-A6C34878D82A}">
-                    <a16:rowId xmlns:a16="http://schemas.microsoft.com/office/drawing/2014/main" val="10008"/>
-                  </a:ext>
-                </a:extLst>
-              </a:tr>
-              <a:tr h="0">
-                <a:tc>
-                  <a:txBody>
-                    <a:bodyPr/>
-                    <a:lstStyle/>
-                    <a:p>
-                      <a:pPr marL="0" indent="0">
-                        <a:buNone/>
-                      </a:pPr>
-                      <a:r>
-                        <a:rPr lang="en-US" sz="1400" b="1" dirty="0">
-                          <a:solidFill>
-                            <a:srgbClr val="96590A"/>
-                          </a:solidFill>
-                        </a:rPr>
-                        <a:t>4:30–4:45</a:t>
-                      </a:r>
-                      <a:endParaRPr lang="en-US" sz="1400" dirty="0"/>
-                    </a:p>
-                  </a:txBody>
-                  <a:tcPr marL="109728" marR="109728">
-                    <a:lnL w="9525" cap="flat" cmpd="sng" algn="ctr">
-                      <a:solidFill>
-                        <a:srgbClr val="D9CFB6"/>
-                      </a:solidFill>
-                      <a:prstDash val="solid"/>
-                      <a:round/>
-                      <a:headEnd type="none" w="med" len="med"/>
-                      <a:tailEnd type="none" w="med" len="med"/>
-                    </a:lnL>
-                    <a:lnR w="9525" cap="flat" cmpd="sng" algn="ctr">
-                      <a:solidFill>
-                        <a:srgbClr val="D9CFB6"/>
-                      </a:solidFill>
-                      <a:prstDash val="solid"/>
-                      <a:round/>
-                      <a:headEnd type="none" w="med" len="med"/>
-                      <a:tailEnd type="none" w="med" len="med"/>
-                    </a:lnR>
-                    <a:lnT w="9525" cap="flat" cmpd="sng" algn="ctr">
-                      <a:solidFill>
-                        <a:srgbClr val="D9CFB6"/>
-                      </a:solidFill>
-                      <a:prstDash val="solid"/>
-                      <a:round/>
-                      <a:headEnd type="none" w="med" len="med"/>
-                      <a:tailEnd type="none" w="med" len="med"/>
-                    </a:lnT>
-                    <a:lnB w="9525" cap="flat" cmpd="sng" algn="ctr">
-                      <a:solidFill>
-                        <a:srgbClr val="D9CFB6"/>
-                      </a:solidFill>
-                      <a:prstDash val="solid"/>
-                      <a:round/>
-                      <a:headEnd type="none" w="med" len="med"/>
-                      <a:tailEnd type="none" w="med" len="med"/>
-                    </a:lnB>
-                  </a:tcPr>
-                </a:tc>
-                <a:tc>
-                  <a:txBody>
-                    <a:bodyPr/>
-                    <a:lstStyle/>
-                    <a:p>
-                      <a:pPr marL="0" indent="0">
-                        <a:buNone/>
-                      </a:pPr>
-                      <a:r>
-                        <a:rPr lang="en-US" sz="1400" dirty="0">
-                          <a:solidFill>
-                            <a:srgbClr val="173D2E"/>
-                          </a:solidFill>
-                        </a:rPr>
-                        <a:t>Feasibility</a:t>
-                      </a:r>
-                      <a:endParaRPr lang="en-US" sz="1400" dirty="0"/>
-                    </a:p>
-                  </a:txBody>
-                  <a:tcPr marL="109728" marR="109728">
-                    <a:lnL w="9525" cap="flat" cmpd="sng" algn="ctr">
-                      <a:solidFill>
-                        <a:srgbClr val="D9CFB6"/>
-                      </a:solidFill>
-                      <a:prstDash val="solid"/>
-                      <a:round/>
-                      <a:headEnd type="none" w="med" len="med"/>
-                      <a:tailEnd type="none" w="med" len="med"/>
-                    </a:lnL>
-                    <a:lnR w="9525" cap="flat" cmpd="sng" algn="ctr">
-                      <a:solidFill>
-                        <a:srgbClr val="D9CFB6"/>
-                      </a:solidFill>
-                      <a:prstDash val="solid"/>
-                      <a:round/>
-                      <a:headEnd type="none" w="med" len="med"/>
-                      <a:tailEnd type="none" w="med" len="med"/>
-                    </a:lnR>
-                    <a:lnT w="9525" cap="flat" cmpd="sng" algn="ctr">
-                      <a:solidFill>
-                        <a:srgbClr val="D9CFB6"/>
-                      </a:solidFill>
-                      <a:prstDash val="solid"/>
-                      <a:round/>
-                      <a:headEnd type="none" w="med" len="med"/>
-                      <a:tailEnd type="none" w="med" len="med"/>
-                    </a:lnT>
-                    <a:lnB w="9525" cap="flat" cmpd="sng" algn="ctr">
-                      <a:solidFill>
-                        <a:srgbClr val="D9CFB6"/>
-                      </a:solidFill>
-                      <a:prstDash val="solid"/>
-                      <a:round/>
-                      <a:headEnd type="none" w="med" len="med"/>
-                      <a:tailEnd type="none" w="med" len="med"/>
-                    </a:lnB>
-                  </a:tcPr>
-                </a:tc>
-                <a:tc>
-                  <a:txBody>
-                    <a:bodyPr/>
-                    <a:lstStyle/>
-                    <a:p>
-                      <a:pPr marL="0" indent="0">
+                      <a:pPr indent="0" marL="0">
                         <a:buNone/>
                       </a:pPr>
                       <a:r>
@@ -6614,7 +6974,7 @@
                       <a:endParaRPr lang="en-US" sz="1400" dirty="0"/>
                     </a:p>
                   </a:txBody>
-                  <a:tcPr marL="109728" marR="109728">
+                  <a:tcPr marL="109728" marR="109728" marT="45720" marB="45720">
                     <a:lnL w="9525" cap="flat" cmpd="sng" algn="ctr">
                       <a:solidFill>
                         <a:srgbClr val="D9CFB6"/>
@@ -6661,7 +7021,7 @@
                     <a:bodyPr/>
                     <a:lstStyle/>
                     <a:p>
-                      <a:pPr marL="0" indent="0">
+                      <a:pPr indent="0" marL="0">
                         <a:buNone/>
                       </a:pPr>
                       <a:r>
@@ -6675,7 +7035,7 @@
                       <a:endParaRPr lang="en-US" sz="1400" dirty="0"/>
                     </a:p>
                   </a:txBody>
-                  <a:tcPr marL="109728" marR="109728">
+                  <a:tcPr marL="109728" marR="109728" marT="45720" marB="45720">
                     <a:lnL w="9525" cap="flat" cmpd="sng" algn="ctr">
                       <a:solidFill>
                         <a:srgbClr val="D9CFB6"/>
@@ -6714,253 +7074,6 @@
                     </a:lnB>
                   </a:tcPr>
                 </a:tc>
-                <a:extLst>
-                  <a:ext uri="{0D108BD9-81ED-4DB2-BD59-A6C34878D82A}">
-                    <a16:rowId xmlns:a16="http://schemas.microsoft.com/office/drawing/2014/main" val="10009"/>
-                  </a:ext>
-                </a:extLst>
-              </a:tr>
-              <a:tr h="0">
-                <a:tc>
-                  <a:txBody>
-                    <a:bodyPr/>
-                    <a:lstStyle/>
-                    <a:p>
-                      <a:pPr marL="0" indent="0">
-                        <a:buNone/>
-                      </a:pPr>
-                      <a:r>
-                        <a:rPr lang="en-US" sz="1400" b="1" dirty="0">
-                          <a:solidFill>
-                            <a:srgbClr val="96590A"/>
-                          </a:solidFill>
-                        </a:rPr>
-                        <a:t>4:45–5:00</a:t>
-                      </a:r>
-                      <a:endParaRPr lang="en-US" sz="1400" dirty="0"/>
-                    </a:p>
-                  </a:txBody>
-                  <a:tcPr marL="109728" marR="109728">
-                    <a:lnL w="9525" cap="flat" cmpd="sng" algn="ctr">
-                      <a:solidFill>
-                        <a:srgbClr val="D9CFB6"/>
-                      </a:solidFill>
-                      <a:prstDash val="solid"/>
-                      <a:round/>
-                      <a:headEnd type="none" w="med" len="med"/>
-                      <a:tailEnd type="none" w="med" len="med"/>
-                    </a:lnL>
-                    <a:lnR w="9525" cap="flat" cmpd="sng" algn="ctr">
-                      <a:solidFill>
-                        <a:srgbClr val="D9CFB6"/>
-                      </a:solidFill>
-                      <a:prstDash val="solid"/>
-                      <a:round/>
-                      <a:headEnd type="none" w="med" len="med"/>
-                      <a:tailEnd type="none" w="med" len="med"/>
-                    </a:lnR>
-                    <a:lnT w="9525" cap="flat" cmpd="sng" algn="ctr">
-                      <a:solidFill>
-                        <a:srgbClr val="D9CFB6"/>
-                      </a:solidFill>
-                      <a:prstDash val="solid"/>
-                      <a:round/>
-                      <a:headEnd type="none" w="med" len="med"/>
-                      <a:tailEnd type="none" w="med" len="med"/>
-                    </a:lnT>
-                    <a:lnB w="9525" cap="flat" cmpd="sng" algn="ctr">
-                      <a:solidFill>
-                        <a:srgbClr val="D9CFB6"/>
-                      </a:solidFill>
-                      <a:prstDash val="solid"/>
-                      <a:round/>
-                      <a:headEnd type="none" w="med" len="med"/>
-                      <a:tailEnd type="none" w="med" len="med"/>
-                    </a:lnB>
-                  </a:tcPr>
-                </a:tc>
-                <a:tc>
-                  <a:txBody>
-                    <a:bodyPr/>
-                    <a:lstStyle/>
-                    <a:p>
-                      <a:pPr marL="0" indent="0">
-                        <a:buNone/>
-                      </a:pPr>
-                      <a:r>
-                        <a:rPr lang="en-US" sz="1400" dirty="0">
-                          <a:solidFill>
-                            <a:srgbClr val="173D2E"/>
-                          </a:solidFill>
-                        </a:rPr>
-                        <a:t>Implementation</a:t>
-                      </a:r>
-                      <a:endParaRPr lang="en-US" sz="1400" dirty="0"/>
-                    </a:p>
-                  </a:txBody>
-                  <a:tcPr marL="109728" marR="109728">
-                    <a:lnL w="9525" cap="flat" cmpd="sng" algn="ctr">
-                      <a:solidFill>
-                        <a:srgbClr val="D9CFB6"/>
-                      </a:solidFill>
-                      <a:prstDash val="solid"/>
-                      <a:round/>
-                      <a:headEnd type="none" w="med" len="med"/>
-                      <a:tailEnd type="none" w="med" len="med"/>
-                    </a:lnL>
-                    <a:lnR w="9525" cap="flat" cmpd="sng" algn="ctr">
-                      <a:solidFill>
-                        <a:srgbClr val="D9CFB6"/>
-                      </a:solidFill>
-                      <a:prstDash val="solid"/>
-                      <a:round/>
-                      <a:headEnd type="none" w="med" len="med"/>
-                      <a:tailEnd type="none" w="med" len="med"/>
-                    </a:lnR>
-                    <a:lnT w="9525" cap="flat" cmpd="sng" algn="ctr">
-                      <a:solidFill>
-                        <a:srgbClr val="D9CFB6"/>
-                      </a:solidFill>
-                      <a:prstDash val="solid"/>
-                      <a:round/>
-                      <a:headEnd type="none" w="med" len="med"/>
-                      <a:tailEnd type="none" w="med" len="med"/>
-                    </a:lnT>
-                    <a:lnB w="9525" cap="flat" cmpd="sng" algn="ctr">
-                      <a:solidFill>
-                        <a:srgbClr val="D9CFB6"/>
-                      </a:solidFill>
-                      <a:prstDash val="solid"/>
-                      <a:round/>
-                      <a:headEnd type="none" w="med" len="med"/>
-                      <a:tailEnd type="none" w="med" len="med"/>
-                    </a:lnB>
-                  </a:tcPr>
-                </a:tc>
-                <a:tc>
-                  <a:txBody>
-                    <a:bodyPr/>
-                    <a:lstStyle/>
-                    <a:p>
-                      <a:pPr marL="0" indent="0">
-                        <a:buNone/>
-                      </a:pPr>
-                      <a:r>
-                        <a:rPr lang="en-US" sz="1400" dirty="0">
-                          <a:solidFill>
-                            <a:srgbClr val="173D2E"/>
-                          </a:solidFill>
-                        </a:rPr>
-                        <a:t>Thien Gen</a:t>
-                      </a:r>
-                      <a:endParaRPr lang="en-US" sz="1400" dirty="0"/>
-                    </a:p>
-                  </a:txBody>
-                  <a:tcPr marL="109728" marR="109728">
-                    <a:lnL w="9525" cap="flat" cmpd="sng" algn="ctr">
-                      <a:solidFill>
-                        <a:srgbClr val="D9CFB6"/>
-                      </a:solidFill>
-                      <a:prstDash val="solid"/>
-                      <a:round/>
-                      <a:headEnd type="none" w="med" len="med"/>
-                      <a:tailEnd type="none" w="med" len="med"/>
-                    </a:lnL>
-                    <a:lnR w="9525" cap="flat" cmpd="sng" algn="ctr">
-                      <a:solidFill>
-                        <a:srgbClr val="D9CFB6"/>
-                      </a:solidFill>
-                      <a:prstDash val="solid"/>
-                      <a:round/>
-                      <a:headEnd type="none" w="med" len="med"/>
-                      <a:tailEnd type="none" w="med" len="med"/>
-                    </a:lnR>
-                    <a:lnT w="9525" cap="flat" cmpd="sng" algn="ctr">
-                      <a:solidFill>
-                        <a:srgbClr val="D9CFB6"/>
-                      </a:solidFill>
-                      <a:prstDash val="solid"/>
-                      <a:round/>
-                      <a:headEnd type="none" w="med" len="med"/>
-                      <a:tailEnd type="none" w="med" len="med"/>
-                    </a:lnT>
-                    <a:lnB w="9525" cap="flat" cmpd="sng" algn="ctr">
-                      <a:solidFill>
-                        <a:srgbClr val="D9CFB6"/>
-                      </a:solidFill>
-                      <a:prstDash val="solid"/>
-                      <a:round/>
-                      <a:headEnd type="none" w="med" len="med"/>
-                      <a:tailEnd type="none" w="med" len="med"/>
-                    </a:lnB>
-                    <a:solidFill>
-                      <a:srgbClr val="F6E3C5"/>
-                    </a:solidFill>
-                  </a:tcPr>
-                </a:tc>
-                <a:tc>
-                  <a:txBody>
-                    <a:bodyPr/>
-                    <a:lstStyle/>
-                    <a:p>
-                      <a:pPr marL="0" indent="0">
-                        <a:buNone/>
-                      </a:pPr>
-                      <a:r>
-                        <a:rPr lang="en-US" sz="1400" dirty="0">
-                          <a:solidFill>
-                            <a:srgbClr val="173D2E"/>
-                          </a:solidFill>
-                        </a:rPr>
-                        <a:t>15 s</a:t>
-                      </a:r>
-                      <a:endParaRPr lang="en-US" sz="1400" dirty="0"/>
-                    </a:p>
-                  </a:txBody>
-                  <a:tcPr marL="109728" marR="109728">
-                    <a:lnL w="9525" cap="flat" cmpd="sng" algn="ctr">
-                      <a:solidFill>
-                        <a:srgbClr val="D9CFB6"/>
-                      </a:solidFill>
-                      <a:prstDash val="solid"/>
-                      <a:round/>
-                      <a:headEnd type="none" w="med" len="med"/>
-                      <a:tailEnd type="none" w="med" len="med"/>
-                    </a:lnL>
-                    <a:lnR w="9525" cap="flat" cmpd="sng" algn="ctr">
-                      <a:solidFill>
-                        <a:srgbClr val="D9CFB6"/>
-                      </a:solidFill>
-                      <a:prstDash val="solid"/>
-                      <a:round/>
-                      <a:headEnd type="none" w="med" len="med"/>
-                      <a:tailEnd type="none" w="med" len="med"/>
-                    </a:lnR>
-                    <a:lnT w="9525" cap="flat" cmpd="sng" algn="ctr">
-                      <a:solidFill>
-                        <a:srgbClr val="D9CFB6"/>
-                      </a:solidFill>
-                      <a:prstDash val="solid"/>
-                      <a:round/>
-                      <a:headEnd type="none" w="med" len="med"/>
-                      <a:tailEnd type="none" w="med" len="med"/>
-                    </a:lnT>
-                    <a:lnB w="9525" cap="flat" cmpd="sng" algn="ctr">
-                      <a:solidFill>
-                        <a:srgbClr val="D9CFB6"/>
-                      </a:solidFill>
-                      <a:prstDash val="solid"/>
-                      <a:round/>
-                      <a:headEnd type="none" w="med" len="med"/>
-                      <a:tailEnd type="none" w="med" len="med"/>
-                    </a:lnB>
-                  </a:tcPr>
-                </a:tc>
-                <a:extLst>
-                  <a:ext uri="{0D108BD9-81ED-4DB2-BD59-A6C34878D82A}">
-                    <a16:rowId xmlns:a16="http://schemas.microsoft.com/office/drawing/2014/main" val="10010"/>
-                  </a:ext>
-                </a:extLst>
               </a:tr>
             </a:tbl>
           </a:graphicData>
@@ -6987,7 +7100,7 @@
           <a:bodyPr wrap="square" lIns="0" tIns="0" rIns="0" bIns="0" rtlCol="0" anchor="t"/>
           <a:lstStyle/>
           <a:p>
-            <a:pPr marL="0" indent="0">
+            <a:pPr indent="0" marL="0">
               <a:buNone/>
             </a:pPr>
             <a:r>
@@ -6999,12 +7112,57 @@
                 <a:ea typeface="+mj-lt" pitchFamily="34" charset="-122"/>
                 <a:cs typeface="+mj-lt" pitchFamily="34" charset="-120"/>
               </a:rPr>
+              <a:t>The handover</a:t>
+            </a:r>
+            <a:endParaRPr lang="en-US" sz="1500" dirty="0"/>
+          </a:p>
+          <a:p>
+            <a:pPr indent="0" marL="0">
+              <a:buNone/>
+            </a:pPr>
+            <a:r>
+              <a:rPr lang="en-US" sz="1500" dirty="0">
+                <a:solidFill>
+                  <a:schemeClr val="tx2"/>
+                </a:solidFill>
+              </a:rPr>
+              <a:t>One laptop. Steven advances the slides. At 1:30 Thien Gen takes the keyboard and Alt+Tabs to the app; at 3:40 Thien Gen Alt+Tabs back and hands over.</a:t>
+            </a:r>
+            <a:endParaRPr lang="en-US" sz="1500" dirty="0"/>
+          </a:p>
+          <a:p>
+            <a:pPr indent="0" marL="0">
+              <a:buNone/>
+            </a:pPr>
+            <a:r>
+              <a:rPr lang="en-US" sz="1500" dirty="0">
+                <a:solidFill>
+                  <a:schemeClr val="tx2"/>
+                </a:solidFill>
+              </a:rPr>
+              <a:t> </a:t>
+            </a:r>
+            <a:endParaRPr lang="en-US" sz="1500" dirty="0"/>
+          </a:p>
+          <a:p>
+            <a:pPr indent="0" marL="0">
+              <a:buNone/>
+            </a:pPr>
+            <a:r>
+              <a:rPr lang="en-US" sz="1800" b="1" dirty="0">
+                <a:solidFill>
+                  <a:schemeClr val="tx2"/>
+                </a:solidFill>
+                <a:latin typeface="+mj-lt" pitchFamily="34" charset="0"/>
+                <a:ea typeface="+mj-lt" pitchFamily="34" charset="-122"/>
+                <a:cs typeface="+mj-lt" pitchFamily="34" charset="-120"/>
+              </a:rPr>
               <a:t>The full words</a:t>
             </a:r>
             <a:endParaRPr lang="en-US" sz="1500" dirty="0"/>
           </a:p>
           <a:p>
-            <a:pPr marL="0" indent="0">
+            <a:pPr indent="0" marL="0">
               <a:buNone/>
             </a:pPr>
             <a:r>
@@ -7013,35 +7171,7 @@
                   <a:schemeClr val="tx2"/>
                 </a:solidFill>
               </a:rPr>
-              <a:t>Each slide’s speaker notes hold its time window, who speaks, what to say and what to click. The Live demo slide’s notes hold every demo step from 1:30 to 3:45.</a:t>
-            </a:r>
-            <a:endParaRPr lang="en-US" sz="1500" dirty="0"/>
-          </a:p>
-          <a:p>
-            <a:pPr marL="0" indent="0">
-              <a:buNone/>
-            </a:pPr>
-            <a:r>
-              <a:rPr lang="en-US" sz="1500" dirty="0">
-                <a:solidFill>
-                  <a:schemeClr val="tx2"/>
-                </a:solidFill>
-              </a:rPr>
-              <a:t> </a:t>
-            </a:r>
-            <a:endParaRPr lang="en-US" sz="1500" dirty="0"/>
-          </a:p>
-          <a:p>
-            <a:pPr marL="0" indent="0">
-              <a:buNone/>
-            </a:pPr>
-            <a:r>
-              <a:rPr lang="en-US" sz="1500" dirty="0">
-                <a:solidFill>
-                  <a:schemeClr val="tx2"/>
-                </a:solidFill>
-              </a:rPr>
-              <a:t>The Word script (TEDUH-demo-script.docx) adds setup, start-up, cue cards, the 10-minute version, recovery steps and Q&amp;A.</a:t>
+              <a:t>Each slide’s speaker notes hold its time window, the speaker, the lines and the clicks. The Word script adds setup, cue cards, the 10-minute version, recovery steps and Q&amp;A.</a:t>
             </a:r>
             <a:endParaRPr lang="en-US" sz="1500" dirty="0"/>
           </a:p>
@@ -7067,7 +7197,7 @@
           </a:prstGeom>
           <a:extLst>
             <a:ext uri="{C572A759-6A51-4108-AA02-DFA0A04FC94B}">
-              <ma14:wrappingTextBoxFlag xmlns:ma14="http://schemas.microsoft.com/office/mac/drawingml/2011/main" xmlns="" val="0"/>
+              <ma14:wrappingTextBoxFlag xmlns:ma14="http://schemas.microsoft.com/office/mac/drawingml/2011/main" val="0"/>
             </a:ext>
           </a:extLst>
         </p:spPr>
@@ -7085,7 +7215,7 @@
           <a:p>
             <a:pPr algn="r"/>
             <a:fld id="{F7021451-1387-4CA6-816F-3879F97B5CBC}" type="slidenum">
-              <a:rPr lang="en-US" b="0"/>
+              <a:rPr b="0" lang="en-US"/>
               <a:t>12</a:t>
             </a:fld>
             <a:endParaRPr lang="en-US"/>
@@ -7120,11 +7250,9 @@
       <p:sp>
         <p:nvSpPr>
           <p:cNvPr id="2" name="Text 0"/>
-          <p:cNvSpPr>
-            <a:spLocks noGrp="1"/>
-          </p:cNvSpPr>
+          <p:cNvSpPr/>
           <p:nvPr>
-            <p:ph type="body" idx="100" hasCustomPrompt="1"/>
+            <p:ph idx="100" type="body" hasCustomPrompt="1"/>
           </p:nvPr>
         </p:nvSpPr>
         <p:spPr>
@@ -7142,11 +7270,11 @@
           <a:bodyPr wrap="square" lIns="0" tIns="0" rIns="0" bIns="0" rtlCol="0" anchor="t"/>
           <a:lstStyle/>
           <a:p>
-            <a:pPr marL="0" indent="0" algn="l">
-              <a:buNone/>
-            </a:pPr>
-            <a:r>
-              <a:rPr lang="en-US" sz="1200" b="1" kern="0" spc="300" dirty="0">
+            <a:pPr algn="l" indent="0" marL="0">
+              <a:buNone/>
+            </a:pPr>
+            <a:r>
+              <a:rPr lang="en-US" sz="1200" b="1" spc="300" kern="0" dirty="0">
                 <a:solidFill>
                   <a:schemeClr val="accent3"/>
                 </a:solidFill>
@@ -7160,11 +7288,9 @@
       <p:sp>
         <p:nvSpPr>
           <p:cNvPr id="3" name="Text 0"/>
-          <p:cNvSpPr>
-            <a:spLocks noGrp="1"/>
-          </p:cNvSpPr>
+          <p:cNvSpPr/>
           <p:nvPr>
-            <p:ph type="title" idx="101" hasCustomPrompt="1"/>
+            <p:ph idx="101" type="title" hasCustomPrompt="1"/>
           </p:nvPr>
         </p:nvSpPr>
         <p:spPr>
@@ -7182,7 +7308,7 @@
           <a:bodyPr wrap="square" lIns="0" tIns="0" rIns="0" bIns="0" rtlCol="0" anchor="t"/>
           <a:lstStyle/>
           <a:p>
-            <a:pPr marL="0" indent="0" algn="l">
+            <a:pPr algn="l" indent="0" marL="0">
               <a:buNone/>
             </a:pPr>
             <a:r>
@@ -7218,20 +7344,13 @@
           </a:solidFill>
           <a:ln/>
           <a:effectLst>
-            <a:outerShdw blurRad="127000" dist="38100" dir="5400000" algn="bl" rotWithShape="0">
+            <a:outerShdw sx="100000" sy="100000" kx="0" ky="0" algn="bl" rotWithShape="0" blurRad="127000" dist="38100" dir="5400000">
               <a:srgbClr val="173D2E">
                 <a:alpha val="14000"/>
               </a:srgbClr>
             </a:outerShdw>
           </a:effectLst>
         </p:spPr>
-        <p:txBody>
-          <a:bodyPr/>
-          <a:lstStyle/>
-          <a:p>
-            <a:endParaRPr lang="en-MY"/>
-          </a:p>
-        </p:txBody>
       </p:sp>
       <p:sp>
         <p:nvSpPr>
@@ -7252,13 +7371,6 @@
           </a:solidFill>
           <a:ln/>
         </p:spPr>
-        <p:txBody>
-          <a:bodyPr/>
-          <a:lstStyle/>
-          <a:p>
-            <a:endParaRPr lang="en-MY"/>
-          </a:p>
-        </p:txBody>
       </p:sp>
       <p:sp>
         <p:nvSpPr>
@@ -7281,7 +7393,7 @@
           <a:bodyPr wrap="square" lIns="0" tIns="0" rIns="0" bIns="0" rtlCol="0" anchor="t"/>
           <a:lstStyle/>
           <a:p>
-            <a:pPr marL="0" indent="0">
+            <a:pPr indent="0" marL="0">
               <a:spcAft>
                 <a:spcPts val="400"/>
               </a:spcAft>
@@ -7301,7 +7413,7 @@
             <a:endParaRPr lang="en-US" sz="2000" dirty="0"/>
           </a:p>
           <a:p>
-            <a:pPr marL="0" indent="0">
+            <a:pPr indent="0" marL="0">
               <a:spcAft>
                 <a:spcPts val="400"/>
               </a:spcAft>
@@ -7340,20 +7452,13 @@
           </a:solidFill>
           <a:ln/>
           <a:effectLst>
-            <a:outerShdw blurRad="127000" dist="38100" dir="5400000" algn="bl" rotWithShape="0">
+            <a:outerShdw sx="100000" sy="100000" kx="0" ky="0" algn="bl" rotWithShape="0" blurRad="127000" dist="38100" dir="5400000">
               <a:srgbClr val="173D2E">
                 <a:alpha val="14000"/>
               </a:srgbClr>
             </a:outerShdw>
           </a:effectLst>
         </p:spPr>
-        <p:txBody>
-          <a:bodyPr/>
-          <a:lstStyle/>
-          <a:p>
-            <a:endParaRPr lang="en-MY"/>
-          </a:p>
-        </p:txBody>
       </p:sp>
       <p:sp>
         <p:nvSpPr>
@@ -7374,13 +7479,6 @@
           </a:solidFill>
           <a:ln/>
         </p:spPr>
-        <p:txBody>
-          <a:bodyPr/>
-          <a:lstStyle/>
-          <a:p>
-            <a:endParaRPr lang="en-MY"/>
-          </a:p>
-        </p:txBody>
       </p:sp>
       <p:sp>
         <p:nvSpPr>
@@ -7403,7 +7501,7 @@
           <a:bodyPr wrap="square" lIns="0" tIns="0" rIns="0" bIns="0" rtlCol="0" anchor="t"/>
           <a:lstStyle/>
           <a:p>
-            <a:pPr marL="0" indent="0">
+            <a:pPr indent="0" marL="0">
               <a:spcAft>
                 <a:spcPts val="400"/>
               </a:spcAft>
@@ -7423,7 +7521,7 @@
             <a:endParaRPr lang="en-US" sz="2000" dirty="0"/>
           </a:p>
           <a:p>
-            <a:pPr marL="0" indent="0">
+            <a:pPr indent="0" marL="0">
               <a:spcAft>
                 <a:spcPts val="400"/>
               </a:spcAft>
@@ -7462,20 +7560,13 @@
           </a:solidFill>
           <a:ln/>
           <a:effectLst>
-            <a:outerShdw blurRad="127000" dist="38100" dir="5400000" algn="bl" rotWithShape="0">
+            <a:outerShdw sx="100000" sy="100000" kx="0" ky="0" algn="bl" rotWithShape="0" blurRad="127000" dist="38100" dir="5400000">
               <a:srgbClr val="173D2E">
                 <a:alpha val="14000"/>
               </a:srgbClr>
             </a:outerShdw>
           </a:effectLst>
         </p:spPr>
-        <p:txBody>
-          <a:bodyPr/>
-          <a:lstStyle/>
-          <a:p>
-            <a:endParaRPr lang="en-MY"/>
-          </a:p>
-        </p:txBody>
       </p:sp>
       <p:sp>
         <p:nvSpPr>
@@ -7496,13 +7587,6 @@
           </a:solidFill>
           <a:ln/>
         </p:spPr>
-        <p:txBody>
-          <a:bodyPr/>
-          <a:lstStyle/>
-          <a:p>
-            <a:endParaRPr lang="en-MY"/>
-          </a:p>
-        </p:txBody>
       </p:sp>
       <p:sp>
         <p:nvSpPr>
@@ -7525,7 +7609,7 @@
           <a:bodyPr wrap="square" lIns="0" tIns="0" rIns="0" bIns="0" rtlCol="0" anchor="t"/>
           <a:lstStyle/>
           <a:p>
-            <a:pPr marL="0" indent="0">
+            <a:pPr indent="0" marL="0">
               <a:spcAft>
                 <a:spcPts val="400"/>
               </a:spcAft>
@@ -7545,7 +7629,7 @@
             <a:endParaRPr lang="en-US" sz="2000" dirty="0"/>
           </a:p>
           <a:p>
-            <a:pPr marL="0" indent="0">
+            <a:pPr indent="0" marL="0">
               <a:spcAft>
                 <a:spcPts val="400"/>
               </a:spcAft>
@@ -7584,20 +7668,13 @@
           </a:solidFill>
           <a:ln/>
           <a:effectLst>
-            <a:outerShdw blurRad="127000" dist="38100" dir="5400000" algn="bl" rotWithShape="0">
+            <a:outerShdw sx="100000" sy="100000" kx="0" ky="0" algn="bl" rotWithShape="0" blurRad="127000" dist="38100" dir="5400000">
               <a:srgbClr val="173D2E">
                 <a:alpha val="14000"/>
               </a:srgbClr>
             </a:outerShdw>
           </a:effectLst>
         </p:spPr>
-        <p:txBody>
-          <a:bodyPr/>
-          <a:lstStyle/>
-          <a:p>
-            <a:endParaRPr lang="en-MY"/>
-          </a:p>
-        </p:txBody>
       </p:sp>
       <p:sp>
         <p:nvSpPr>
@@ -7618,13 +7695,6 @@
           </a:solidFill>
           <a:ln/>
         </p:spPr>
-        <p:txBody>
-          <a:bodyPr/>
-          <a:lstStyle/>
-          <a:p>
-            <a:endParaRPr lang="en-MY"/>
-          </a:p>
-        </p:txBody>
       </p:sp>
       <p:sp>
         <p:nvSpPr>
@@ -7647,7 +7717,7 @@
           <a:bodyPr wrap="square" lIns="0" tIns="0" rIns="0" bIns="0" rtlCol="0" anchor="t"/>
           <a:lstStyle/>
           <a:p>
-            <a:pPr marL="0" indent="0">
+            <a:pPr indent="0" marL="0">
               <a:spcAft>
                 <a:spcPts val="400"/>
               </a:spcAft>
@@ -7667,7 +7737,7 @@
             <a:endParaRPr lang="en-US" sz="2000" dirty="0"/>
           </a:p>
           <a:p>
-            <a:pPr marL="0" indent="0">
+            <a:pPr indent="0" marL="0">
               <a:spcAft>
                 <a:spcPts val="400"/>
               </a:spcAft>
@@ -7705,7 +7775,7 @@
           </a:prstGeom>
           <a:extLst>
             <a:ext uri="{C572A759-6A51-4108-AA02-DFA0A04FC94B}">
-              <ma14:wrappingTextBoxFlag xmlns:ma14="http://schemas.microsoft.com/office/mac/drawingml/2011/main" xmlns="" val="0"/>
+              <ma14:wrappingTextBoxFlag xmlns:ma14="http://schemas.microsoft.com/office/mac/drawingml/2011/main" val="0"/>
             </a:ext>
           </a:extLst>
         </p:spPr>
@@ -7723,7 +7793,7 @@
           <a:p>
             <a:pPr algn="r"/>
             <a:fld id="{F7021451-1387-4CA6-816F-3879F97B5CBC}" type="slidenum">
-              <a:rPr lang="en-US" b="0"/>
+              <a:rPr b="0" lang="en-US"/>
               <a:t>13</a:t>
             </a:fld>
             <a:endParaRPr lang="en-US"/>
@@ -7758,11 +7828,9 @@
       <p:sp>
         <p:nvSpPr>
           <p:cNvPr id="2" name="Text 0"/>
-          <p:cNvSpPr>
-            <a:spLocks noGrp="1"/>
-          </p:cNvSpPr>
+          <p:cNvSpPr/>
           <p:nvPr>
-            <p:ph type="body" idx="100" hasCustomPrompt="1"/>
+            <p:ph idx="100" type="body" hasCustomPrompt="1"/>
           </p:nvPr>
         </p:nvSpPr>
         <p:spPr>
@@ -7780,11 +7848,11 @@
           <a:bodyPr wrap="square" lIns="0" tIns="0" rIns="0" bIns="0" rtlCol="0" anchor="t"/>
           <a:lstStyle/>
           <a:p>
-            <a:pPr marL="0" indent="0" algn="l">
-              <a:buNone/>
-            </a:pPr>
-            <a:r>
-              <a:rPr lang="en-US" sz="1200" b="1" kern="0" spc="300" dirty="0">
+            <a:pPr algn="l" indent="0" marL="0">
+              <a:buNone/>
+            </a:pPr>
+            <a:r>
+              <a:rPr lang="en-US" sz="1200" b="1" spc="300" kern="0" dirty="0">
                 <a:solidFill>
                   <a:schemeClr val="accent3"/>
                 </a:solidFill>
@@ -7798,11 +7866,9 @@
       <p:sp>
         <p:nvSpPr>
           <p:cNvPr id="3" name="Text 0"/>
-          <p:cNvSpPr>
-            <a:spLocks noGrp="1"/>
-          </p:cNvSpPr>
+          <p:cNvSpPr/>
           <p:nvPr>
-            <p:ph type="title" idx="101" hasCustomPrompt="1"/>
+            <p:ph idx="101" type="title" hasCustomPrompt="1"/>
           </p:nvPr>
         </p:nvSpPr>
         <p:spPr>
@@ -7820,7 +7886,7 @@
           <a:bodyPr wrap="square" lIns="0" tIns="0" rIns="0" bIns="0" rtlCol="0" anchor="t"/>
           <a:lstStyle/>
           <a:p>
-            <a:pPr marL="0" indent="0" algn="l">
+            <a:pPr algn="l" indent="0" marL="0">
               <a:buNone/>
             </a:pPr>
             <a:r>
@@ -7837,14 +7903,14 @@
       </p:sp>
       <p:pic>
         <p:nvPicPr>
-          <p:cNvPr id="4" name="Screen · Spec pack screenshot" descr="Spec pack for a 92 m covered walkway: elevation drawing, dimensions and a priced bill of materials"/>
+          <p:cNvPr id="4" name="Screen · Spec pack screenshot" descr="Spec pack for a 92 m covered walkway: elevation drawing, dimensions and a priced bill of materials">    </p:cNvPr>
           <p:cNvPicPr>
             <a:picLocks noChangeAspect="1"/>
           </p:cNvPicPr>
           <p:nvPr/>
         </p:nvPicPr>
         <p:blipFill>
-          <a:blip r:embed="rId3"/>
+          <a:blip r:embed="rId1"/>
           <a:stretch>
             <a:fillRect/>
           </a:stretch>
@@ -7880,7 +7946,7 @@
           <a:bodyPr wrap="square" lIns="0" tIns="0" rIns="0" bIns="0" rtlCol="0" anchor="t"/>
           <a:lstStyle/>
           <a:p>
-            <a:pPr marL="0" indent="0">
+            <a:pPr indent="0" marL="0">
               <a:buNone/>
             </a:pPr>
             <a:r>
@@ -7915,7 +7981,7 @@
           </a:prstGeom>
           <a:extLst>
             <a:ext uri="{C572A759-6A51-4108-AA02-DFA0A04FC94B}">
-              <ma14:wrappingTextBoxFlag xmlns:ma14="http://schemas.microsoft.com/office/mac/drawingml/2011/main" xmlns="" val="0"/>
+              <ma14:wrappingTextBoxFlag xmlns:ma14="http://schemas.microsoft.com/office/mac/drawingml/2011/main" val="0"/>
             </a:ext>
           </a:extLst>
         </p:spPr>
@@ -7933,7 +7999,7 @@
           <a:p>
             <a:pPr algn="r"/>
             <a:fld id="{F7021451-1387-4CA6-816F-3879F97B5CBC}" type="slidenum">
-              <a:rPr lang="en-US" b="0"/>
+              <a:rPr b="0" lang="en-US"/>
               <a:t>14</a:t>
             </a:fld>
             <a:endParaRPr lang="en-US"/>
@@ -7968,11 +8034,9 @@
       <p:sp>
         <p:nvSpPr>
           <p:cNvPr id="2" name="Text 0"/>
-          <p:cNvSpPr>
-            <a:spLocks noGrp="1"/>
-          </p:cNvSpPr>
+          <p:cNvSpPr/>
           <p:nvPr>
-            <p:ph type="body" idx="100" hasCustomPrompt="1"/>
+            <p:ph idx="100" type="body" hasCustomPrompt="1"/>
           </p:nvPr>
         </p:nvSpPr>
         <p:spPr>
@@ -7990,11 +8054,11 @@
           <a:bodyPr wrap="square" lIns="0" tIns="0" rIns="0" bIns="0" rtlCol="0" anchor="t"/>
           <a:lstStyle/>
           <a:p>
-            <a:pPr marL="0" indent="0" algn="l">
-              <a:buNone/>
-            </a:pPr>
-            <a:r>
-              <a:rPr lang="en-US" sz="1200" b="1" kern="0" spc="300" dirty="0">
+            <a:pPr algn="l" indent="0" marL="0">
+              <a:buNone/>
+            </a:pPr>
+            <a:r>
+              <a:rPr lang="en-US" sz="1200" b="1" spc="300" kern="0" dirty="0">
                 <a:solidFill>
                   <a:schemeClr val="accent3"/>
                 </a:solidFill>
@@ -8008,11 +8072,9 @@
       <p:sp>
         <p:nvSpPr>
           <p:cNvPr id="3" name="Text 0"/>
-          <p:cNvSpPr>
-            <a:spLocks noGrp="1"/>
-          </p:cNvSpPr>
+          <p:cNvSpPr/>
           <p:nvPr>
-            <p:ph type="title" idx="101" hasCustomPrompt="1"/>
+            <p:ph idx="101" type="title" hasCustomPrompt="1"/>
           </p:nvPr>
         </p:nvSpPr>
         <p:spPr>
@@ -8030,7 +8092,7 @@
           <a:bodyPr wrap="square" lIns="0" tIns="0" rIns="0" bIns="0" rtlCol="0" anchor="t"/>
           <a:lstStyle/>
           <a:p>
-            <a:pPr marL="0" indent="0" algn="l">
+            <a:pPr algn="l" indent="0" marL="0">
               <a:buNone/>
             </a:pPr>
             <a:r>
@@ -8047,14 +8109,14 @@
       </p:sp>
       <p:pic>
         <p:nvPicPr>
-          <p:cNvPr id="4" name="Screen · AI scan screenshot" descr="AI shade scan: a path photo, the local model’s 50% estimate, a slider to adjust it, and the AI-confirmed badge"/>
+          <p:cNvPr id="4" name="Screen · AI scan screenshot" descr="AI shade scan: a path photo, the local model’s 50% estimate, a slider to adjust it, and the AI-confirmed badge">    </p:cNvPr>
           <p:cNvPicPr>
             <a:picLocks noChangeAspect="1"/>
           </p:cNvPicPr>
           <p:nvPr/>
         </p:nvPicPr>
         <p:blipFill>
-          <a:blip r:embed="rId3"/>
+          <a:blip r:embed="rId1"/>
           <a:stretch>
             <a:fillRect/>
           </a:stretch>
@@ -8090,7 +8152,7 @@
           <a:bodyPr wrap="square" lIns="0" tIns="0" rIns="0" bIns="0" rtlCol="0" anchor="t"/>
           <a:lstStyle/>
           <a:p>
-            <a:pPr marL="0" indent="0">
+            <a:pPr indent="0" marL="0">
               <a:buNone/>
             </a:pPr>
             <a:r>
@@ -8125,7 +8187,7 @@
           </a:prstGeom>
           <a:extLst>
             <a:ext uri="{C572A759-6A51-4108-AA02-DFA0A04FC94B}">
-              <ma14:wrappingTextBoxFlag xmlns:ma14="http://schemas.microsoft.com/office/mac/drawingml/2011/main" xmlns="" val="0"/>
+              <ma14:wrappingTextBoxFlag xmlns:ma14="http://schemas.microsoft.com/office/mac/drawingml/2011/main" val="0"/>
             </a:ext>
           </a:extLst>
         </p:spPr>
@@ -8143,7 +8205,7 @@
           <a:p>
             <a:pPr algn="r"/>
             <a:fld id="{F7021451-1387-4CA6-816F-3879F97B5CBC}" type="slidenum">
-              <a:rPr lang="en-US" b="0"/>
+              <a:rPr b="0" lang="en-US"/>
               <a:t>15</a:t>
             </a:fld>
             <a:endParaRPr lang="en-US"/>
@@ -8178,11 +8240,9 @@
       <p:sp>
         <p:nvSpPr>
           <p:cNvPr id="2" name="Text 0"/>
-          <p:cNvSpPr>
-            <a:spLocks noGrp="1"/>
-          </p:cNvSpPr>
+          <p:cNvSpPr/>
           <p:nvPr>
-            <p:ph type="body" idx="100" hasCustomPrompt="1"/>
+            <p:ph idx="100" type="body" hasCustomPrompt="1"/>
           </p:nvPr>
         </p:nvSpPr>
         <p:spPr>
@@ -8200,11 +8260,11 @@
           <a:bodyPr wrap="square" lIns="0" tIns="0" rIns="0" bIns="0" rtlCol="0" anchor="t"/>
           <a:lstStyle/>
           <a:p>
-            <a:pPr marL="0" indent="0" algn="l">
-              <a:buNone/>
-            </a:pPr>
-            <a:r>
-              <a:rPr lang="en-US" sz="1200" b="1" kern="0" spc="300" dirty="0">
+            <a:pPr algn="l" indent="0" marL="0">
+              <a:buNone/>
+            </a:pPr>
+            <a:r>
+              <a:rPr lang="en-US" sz="1200" b="1" spc="300" kern="0" dirty="0">
                 <a:solidFill>
                   <a:schemeClr val="accent3"/>
                 </a:solidFill>
@@ -8218,11 +8278,9 @@
       <p:sp>
         <p:nvSpPr>
           <p:cNvPr id="3" name="Text 0"/>
-          <p:cNvSpPr>
-            <a:spLocks noGrp="1"/>
-          </p:cNvSpPr>
+          <p:cNvSpPr/>
           <p:nvPr>
-            <p:ph type="title" idx="101" hasCustomPrompt="1"/>
+            <p:ph idx="101" type="title" hasCustomPrompt="1"/>
           </p:nvPr>
         </p:nvSpPr>
         <p:spPr>
@@ -8240,7 +8298,7 @@
           <a:bodyPr wrap="square" lIns="0" tIns="0" rIns="0" bIns="0" rtlCol="0" anchor="t"/>
           <a:lstStyle/>
           <a:p>
-            <a:pPr marL="0" indent="0" algn="l">
+            <a:pPr algn="l" indent="0" marL="0">
               <a:buNone/>
             </a:pPr>
             <a:r>
@@ -8257,14 +8315,14 @@
       </p:sp>
       <p:pic>
         <p:nvPicPr>
-          <p:cNvPr id="4" name="Screen · Future canopy screenshot" descr="Future canopy at year 10: the best plan becomes five tree rows for RM 51,700 avoiding 26.5 pedestrian-hours a day"/>
+          <p:cNvPr id="4" name="Screen · Future canopy screenshot" descr="Future canopy at year 10: the best plan becomes five tree rows for RM 51,700 avoiding 26.5 pedestrian-hours a day">    </p:cNvPr>
           <p:cNvPicPr>
             <a:picLocks noChangeAspect="1"/>
           </p:cNvPicPr>
           <p:nvPr/>
         </p:nvPicPr>
         <p:blipFill>
-          <a:blip r:embed="rId3"/>
+          <a:blip r:embed="rId1"/>
           <a:stretch>
             <a:fillRect/>
           </a:stretch>
@@ -8300,7 +8358,7 @@
           <a:bodyPr wrap="square" lIns="0" tIns="0" rIns="0" bIns="0" rtlCol="0" anchor="t"/>
           <a:lstStyle/>
           <a:p>
-            <a:pPr marL="0" indent="0">
+            <a:pPr indent="0" marL="0">
               <a:buNone/>
             </a:pPr>
             <a:r>
@@ -8335,7 +8393,7 @@
           </a:prstGeom>
           <a:extLst>
             <a:ext uri="{C572A759-6A51-4108-AA02-DFA0A04FC94B}">
-              <ma14:wrappingTextBoxFlag xmlns:ma14="http://schemas.microsoft.com/office/mac/drawingml/2011/main" xmlns="" val="0"/>
+              <ma14:wrappingTextBoxFlag xmlns:ma14="http://schemas.microsoft.com/office/mac/drawingml/2011/main" val="0"/>
             </a:ext>
           </a:extLst>
         </p:spPr>
@@ -8353,7 +8411,7 @@
           <a:p>
             <a:pPr algn="r"/>
             <a:fld id="{F7021451-1387-4CA6-816F-3879F97B5CBC}" type="slidenum">
-              <a:rPr lang="en-US" b="0"/>
+              <a:rPr b="0" lang="en-US"/>
               <a:t>16</a:t>
             </a:fld>
             <a:endParaRPr lang="en-US"/>
@@ -8388,11 +8446,9 @@
       <p:sp>
         <p:nvSpPr>
           <p:cNvPr id="2" name="Text 0"/>
-          <p:cNvSpPr>
-            <a:spLocks noGrp="1"/>
-          </p:cNvSpPr>
+          <p:cNvSpPr/>
           <p:nvPr>
-            <p:ph type="body" idx="100" hasCustomPrompt="1"/>
+            <p:ph idx="100" type="body" hasCustomPrompt="1"/>
           </p:nvPr>
         </p:nvSpPr>
         <p:spPr>
@@ -8410,11 +8466,11 @@
           <a:bodyPr wrap="square" lIns="0" tIns="0" rIns="0" bIns="0" rtlCol="0" anchor="t"/>
           <a:lstStyle/>
           <a:p>
-            <a:pPr marL="0" indent="0" algn="l">
-              <a:buNone/>
-            </a:pPr>
-            <a:r>
-              <a:rPr lang="en-US" sz="1200" b="1" kern="0" spc="300" dirty="0">
+            <a:pPr algn="l" indent="0" marL="0">
+              <a:buNone/>
+            </a:pPr>
+            <a:r>
+              <a:rPr lang="en-US" sz="1200" b="1" spc="300" kern="0" dirty="0">
                 <a:solidFill>
                   <a:schemeClr val="accent3"/>
                 </a:solidFill>
@@ -8428,11 +8484,9 @@
       <p:sp>
         <p:nvSpPr>
           <p:cNvPr id="3" name="Text 0"/>
-          <p:cNvSpPr>
-            <a:spLocks noGrp="1"/>
-          </p:cNvSpPr>
+          <p:cNvSpPr/>
           <p:nvPr>
-            <p:ph type="title" idx="101" hasCustomPrompt="1"/>
+            <p:ph idx="101" type="title" hasCustomPrompt="1"/>
           </p:nvPr>
         </p:nvSpPr>
         <p:spPr>
@@ -8450,7 +8504,7 @@
           <a:bodyPr wrap="square" lIns="0" tIns="0" rIns="0" bIns="0" rtlCol="0" anchor="t"/>
           <a:lstStyle/>
           <a:p>
-            <a:pPr marL="0" indent="0" algn="l">
+            <a:pPr algn="l" indent="0" marL="0">
               <a:buNone/>
             </a:pPr>
             <a:r>
@@ -8486,7 +8540,7 @@
           <a:bodyPr wrap="square" lIns="0" tIns="0" rIns="0" bIns="0" rtlCol="0" anchor="t"/>
           <a:lstStyle/>
           <a:p>
-            <a:pPr marL="0" indent="0">
+            <a:pPr indent="0" marL="0">
               <a:spcAft>
                 <a:spcPts val="800"/>
               </a:spcAft>
@@ -8500,43 +8554,24 @@
               </a:rPr>
               <a:t>Map data: </a:t>
             </a:r>
-            <a:r>
-              <a:rPr lang="en-US" sz="1500" dirty="0">
-                <a:solidFill>
-                  <a:schemeClr val="tx1"/>
-                </a:solidFill>
-              </a:rPr>
-              <a:t>© OpenStreetMap contributors (ODbL): streets, buildings, places.</a:t>
-            </a:r>
-            <a:endParaRPr lang="en-US" sz="1500" dirty="0"/>
-          </a:p>
-          <a:p>
-            <a:pPr marL="0" indent="0">
+            <a:pPr indent="0" marL="0">
               <a:spcAft>
                 <a:spcPts val="800"/>
               </a:spcAft>
               <a:buNone/>
             </a:pPr>
             <a:r>
-              <a:rPr lang="en-US" sz="1500" b="1" dirty="0">
+              <a:rPr lang="en-US" sz="1500" dirty="0">
                 <a:solidFill>
                   <a:schemeClr val="tx1"/>
                 </a:solidFill>
               </a:rPr>
-              <a:t>Rail ridership: </a:t>
-            </a:r>
-            <a:r>
-              <a:rPr lang="en-US" sz="1500" dirty="0">
-                <a:solidFill>
-                  <a:schemeClr val="tx1"/>
-                </a:solidFill>
-              </a:rPr>
-              <a:t>Prasarana ticket-gate exits by station, published on data.gov.my (CC BY 4.0).</a:t>
+              <a:t>© OpenStreetMap contributors (ODbL): streets, buildings, places.</a:t>
             </a:r>
             <a:endParaRPr lang="en-US" sz="1500" dirty="0"/>
           </a:p>
           <a:p>
-            <a:pPr marL="0" indent="0">
+            <a:pPr indent="0" marL="0">
               <a:spcAft>
                 <a:spcPts val="800"/>
               </a:spcAft>
@@ -8548,62 +8583,40 @@
                   <a:schemeClr val="tx1"/>
                 </a:solidFill>
               </a:rPr>
-              <a:t>Unit costs: </a:t>
-            </a:r>
-            <a:r>
-              <a:rPr lang="en-US" sz="1500" dirty="0">
-                <a:solidFill>
-                  <a:schemeClr val="tx1"/>
-                </a:solidFill>
-              </a:rPr>
-              <a:t>bottom-up estimates in MYR, editable in the app; to be replaced with contractor quotes.</a:t>
-            </a:r>
-            <a:endParaRPr lang="en-US" sz="1500" dirty="0"/>
-          </a:p>
-          <a:p>
-            <a:pPr marL="0" indent="0">
+              <a:t>Rail ridership: </a:t>
+            </a:r>
+            <a:pPr indent="0" marL="0">
               <a:spcAft>
                 <a:spcPts val="800"/>
               </a:spcAft>
               <a:buNone/>
             </a:pPr>
             <a:r>
-              <a:rPr lang="en-US" sz="1500" b="1" dirty="0">
+              <a:rPr lang="en-US" sz="1500" dirty="0">
                 <a:solidFill>
                   <a:schemeClr val="tx1"/>
                 </a:solidFill>
               </a:rPr>
-              <a:t>Prior work: </a:t>
-            </a:r>
-            <a:r>
-              <a:rPr lang="en-US" sz="1500" dirty="0">
-                <a:solidFill>
-                  <a:schemeClr val="tx1"/>
-                </a:solidFill>
-              </a:rPr>
-              <a:t>Open Government Products, Undercover, Hack for Public Good (2026), hack.gov.sg/2026/undercover</a:t>
+              <a:t>Prasarana ticket-gate exits by station, published on data.gov.my (CC BY 4.0).</a:t>
             </a:r>
             <a:endParaRPr lang="en-US" sz="1500" dirty="0"/>
           </a:p>
           <a:p>
-            <a:pPr marL="0" indent="0">
+            <a:pPr indent="0" marL="0">
               <a:spcAft>
                 <a:spcPts val="800"/>
               </a:spcAft>
               <a:buNone/>
             </a:pPr>
             <a:r>
-              <a:rPr lang="en-US" sz="1500" dirty="0">
+              <a:rPr lang="en-US" sz="1500" b="1" dirty="0">
                 <a:solidFill>
                   <a:schemeClr val="tx1"/>
                 </a:solidFill>
               </a:rPr>
-              <a:t>Schrodi et al., Climate-sensitive Urban Planning through Optimization of Tree Placements (2023), arxiv.org/abs/2310.05691</a:t>
-            </a:r>
-            <a:endParaRPr lang="en-US" sz="1500" dirty="0"/>
-          </a:p>
-          <a:p>
-            <a:pPr marL="0" indent="0">
+              <a:t>Unit costs: </a:t>
+            </a:r>
+            <a:pPr indent="0" marL="0">
               <a:spcAft>
                 <a:spcPts val="800"/>
               </a:spcAft>
@@ -8615,12 +8628,12 @@
                   <a:schemeClr val="tx1"/>
                 </a:solidFill>
               </a:rPr>
-              <a:t>CoolWalks for active mobility in urban street networks, Scientific Reports (2025), nature.com/articles/s41598-025-97200-2</a:t>
+              <a:t>bottom-up estimates in MYR, editable in the app; to be replaced with contractor quotes.</a:t>
             </a:r>
             <a:endParaRPr lang="en-US" sz="1500" dirty="0"/>
           </a:p>
           <a:p>
-            <a:pPr marL="0" indent="0">
+            <a:pPr indent="0" marL="0">
               <a:spcAft>
                 <a:spcPts val="800"/>
               </a:spcAft>
@@ -8632,33 +8645,110 @@
                   <a:schemeClr val="tx1"/>
                 </a:solidFill>
               </a:rPr>
-              <a:t>SDP strategy: </a:t>
-            </a:r>
-            <a:r>
-              <a:rPr lang="en-US" sz="1500" dirty="0">
-                <a:solidFill>
-                  <a:schemeClr val="tx1"/>
-                </a:solidFill>
-              </a:rPr>
-              <a:t>Sime Darby Property Sustainability Strategy 2025–2030, from the hackathon briefing deck (9 Oct 2026).</a:t>
-            </a:r>
-            <a:endParaRPr lang="en-US" sz="1500" dirty="0"/>
-          </a:p>
-          <a:p>
-            <a:pPr marL="0" indent="0">
+              <a:t>Prior work: </a:t>
+            </a:r>
+            <a:pPr indent="0" marL="0">
               <a:spcAft>
                 <a:spcPts val="800"/>
               </a:spcAft>
               <a:buNone/>
             </a:pPr>
             <a:r>
+              <a:rPr lang="en-US" sz="1500" dirty="0">
+                <a:solidFill>
+                  <a:schemeClr val="tx1"/>
+                </a:solidFill>
+              </a:rPr>
+              <a:t>Open Government Products, Undercover, Hack for Public Good (2026), hack.gov.sg/2026/undercover</a:t>
+            </a:r>
+            <a:endParaRPr lang="en-US" sz="1500" dirty="0"/>
+          </a:p>
+          <a:p>
+            <a:pPr indent="0" marL="0">
+              <a:spcAft>
+                <a:spcPts val="800"/>
+              </a:spcAft>
+              <a:buNone/>
+            </a:pPr>
+            <a:r>
+              <a:rPr lang="en-US" sz="1500" dirty="0">
+                <a:solidFill>
+                  <a:schemeClr val="tx1"/>
+                </a:solidFill>
+              </a:rPr>
+              <a:t>Schrodi et al., Climate-sensitive Urban Planning through Optimization of Tree Placements (2023), arxiv.org/abs/2310.05691</a:t>
+            </a:r>
+            <a:endParaRPr lang="en-US" sz="1500" dirty="0"/>
+          </a:p>
+          <a:p>
+            <a:pPr indent="0" marL="0">
+              <a:spcAft>
+                <a:spcPts val="800"/>
+              </a:spcAft>
+              <a:buNone/>
+            </a:pPr>
+            <a:r>
+              <a:rPr lang="en-US" sz="1500" dirty="0">
+                <a:solidFill>
+                  <a:schemeClr val="tx1"/>
+                </a:solidFill>
+              </a:rPr>
+              <a:t>CoolWalks for active mobility in urban street networks, Scientific Reports (2025), nature.com/articles/s41598-025-97200-2</a:t>
+            </a:r>
+            <a:endParaRPr lang="en-US" sz="1500" dirty="0"/>
+          </a:p>
+          <a:p>
+            <a:pPr indent="0" marL="0">
+              <a:spcAft>
+                <a:spcPts val="800"/>
+              </a:spcAft>
+              <a:buNone/>
+            </a:pPr>
+            <a:r>
               <a:rPr lang="en-US" sz="1500" b="1" dirty="0">
                 <a:solidFill>
                   <a:schemeClr val="tx1"/>
                 </a:solidFill>
               </a:rPr>
+              <a:t>SDP strategy: </a:t>
+            </a:r>
+            <a:pPr indent="0" marL="0">
+              <a:spcAft>
+                <a:spcPts val="800"/>
+              </a:spcAft>
+              <a:buNone/>
+            </a:pPr>
+            <a:r>
+              <a:rPr lang="en-US" sz="1500" dirty="0">
+                <a:solidFill>
+                  <a:schemeClr val="tx1"/>
+                </a:solidFill>
+              </a:rPr>
+              <a:t>Sime Darby Property Sustainability Strategy 2025–2030, from the hackathon briefing deck (9 Oct 2026).</a:t>
+            </a:r>
+            <a:endParaRPr lang="en-US" sz="1500" dirty="0"/>
+          </a:p>
+          <a:p>
+            <a:pPr indent="0" marL="0">
+              <a:spcAft>
+                <a:spcPts val="800"/>
+              </a:spcAft>
+              <a:buNone/>
+            </a:pPr>
+            <a:r>
+              <a:rPr lang="en-US" sz="1500" b="1" dirty="0">
+                <a:solidFill>
+                  <a:schemeClr val="tx1"/>
+                </a:solidFill>
+              </a:rPr>
               <a:t>Code: </a:t>
             </a:r>
+            <a:pPr indent="0" marL="0">
+              <a:spcAft>
+                <a:spcPts val="800"/>
+              </a:spcAft>
+              <a:buNone/>
+            </a:pPr>
             <a:r>
               <a:rPr lang="en-US" sz="1500" dirty="0">
                 <a:solidFill>
@@ -8691,7 +8781,7 @@
           </a:prstGeom>
           <a:extLst>
             <a:ext uri="{C572A759-6A51-4108-AA02-DFA0A04FC94B}">
-              <ma14:wrappingTextBoxFlag xmlns:ma14="http://schemas.microsoft.com/office/mac/drawingml/2011/main" xmlns="" val="0"/>
+              <ma14:wrappingTextBoxFlag xmlns:ma14="http://schemas.microsoft.com/office/mac/drawingml/2011/main" val="0"/>
             </a:ext>
           </a:extLst>
         </p:spPr>
@@ -8709,7 +8799,7 @@
           <a:p>
             <a:pPr algn="r"/>
             <a:fld id="{F7021451-1387-4CA6-816F-3879F97B5CBC}" type="slidenum">
-              <a:rPr lang="en-US" b="0"/>
+              <a:rPr b="0" lang="en-US"/>
               <a:t>17</a:t>
             </a:fld>
             <a:endParaRPr lang="en-US"/>
@@ -8744,11 +8834,9 @@
       <p:sp>
         <p:nvSpPr>
           <p:cNvPr id="2" name="Text 0"/>
-          <p:cNvSpPr>
-            <a:spLocks noGrp="1"/>
-          </p:cNvSpPr>
+          <p:cNvSpPr/>
           <p:nvPr>
-            <p:ph type="body" idx="100" hasCustomPrompt="1"/>
+            <p:ph idx="100" type="body" hasCustomPrompt="1"/>
           </p:nvPr>
         </p:nvSpPr>
         <p:spPr>
@@ -8766,11 +8854,11 @@
           <a:bodyPr wrap="square" lIns="0" tIns="0" rIns="0" bIns="0" rtlCol="0" anchor="t"/>
           <a:lstStyle/>
           <a:p>
-            <a:pPr marL="0" indent="0" algn="l">
-              <a:buNone/>
-            </a:pPr>
-            <a:r>
-              <a:rPr lang="en-US" sz="1200" b="1" kern="0" spc="300" dirty="0">
+            <a:pPr algn="l" indent="0" marL="0">
+              <a:buNone/>
+            </a:pPr>
+            <a:r>
+              <a:rPr lang="en-US" sz="1200" b="1" spc="300" kern="0" dirty="0">
                 <a:solidFill>
                   <a:schemeClr val="accent3"/>
                 </a:solidFill>
@@ -8784,11 +8872,9 @@
       <p:sp>
         <p:nvSpPr>
           <p:cNvPr id="3" name="Text 0"/>
-          <p:cNvSpPr>
-            <a:spLocks noGrp="1"/>
-          </p:cNvSpPr>
+          <p:cNvSpPr/>
           <p:nvPr>
-            <p:ph type="title" idx="101" hasCustomPrompt="1"/>
+            <p:ph idx="101" type="title" hasCustomPrompt="1"/>
           </p:nvPr>
         </p:nvSpPr>
         <p:spPr>
@@ -8806,7 +8892,7 @@
           <a:bodyPr wrap="square" lIns="0" tIns="0" rIns="0" bIns="0" rtlCol="0" anchor="t"/>
           <a:lstStyle/>
           <a:p>
-            <a:pPr marL="0" indent="0" algn="l">
+            <a:pPr algn="l" indent="0" marL="0">
               <a:buNone/>
             </a:pPr>
             <a:r>
@@ -8842,20 +8928,13 @@
           </a:solidFill>
           <a:ln/>
           <a:effectLst>
-            <a:outerShdw blurRad="127000" dist="38100" dir="5400000" algn="bl" rotWithShape="0">
+            <a:outerShdw sx="100000" sy="100000" kx="0" ky="0" algn="bl" rotWithShape="0" blurRad="127000" dist="38100" dir="5400000">
               <a:srgbClr val="173D2E">
                 <a:alpha val="14000"/>
               </a:srgbClr>
             </a:outerShdw>
           </a:effectLst>
         </p:spPr>
-        <p:txBody>
-          <a:bodyPr/>
-          <a:lstStyle/>
-          <a:p>
-            <a:endParaRPr lang="en-MY"/>
-          </a:p>
-        </p:txBody>
       </p:sp>
       <p:sp>
         <p:nvSpPr>
@@ -8878,7 +8957,7 @@
           <a:bodyPr wrap="square" lIns="0" tIns="0" rIns="0" bIns="0" rtlCol="0" anchor="t"/>
           <a:lstStyle/>
           <a:p>
-            <a:pPr marL="0" indent="0">
+            <a:pPr indent="0" marL="0">
               <a:spcAft>
                 <a:spcPts val="600"/>
               </a:spcAft>
@@ -8898,7 +8977,7 @@
             <a:endParaRPr lang="en-US" sz="6600" dirty="0"/>
           </a:p>
           <a:p>
-            <a:pPr marL="0" indent="0">
+            <a:pPr indent="0" marL="0">
               <a:spcAft>
                 <a:spcPts val="600"/>
               </a:spcAft>
@@ -8937,20 +9016,13 @@
           </a:solidFill>
           <a:ln/>
           <a:effectLst>
-            <a:outerShdw blurRad="127000" dist="38100" dir="5400000" algn="bl" rotWithShape="0">
+            <a:outerShdw sx="100000" sy="100000" kx="0" ky="0" algn="bl" rotWithShape="0" blurRad="127000" dist="38100" dir="5400000">
               <a:srgbClr val="173D2E">
                 <a:alpha val="14000"/>
               </a:srgbClr>
             </a:outerShdw>
           </a:effectLst>
         </p:spPr>
-        <p:txBody>
-          <a:bodyPr/>
-          <a:lstStyle/>
-          <a:p>
-            <a:endParaRPr lang="en-MY"/>
-          </a:p>
-        </p:txBody>
       </p:sp>
       <p:sp>
         <p:nvSpPr>
@@ -8973,7 +9045,7 @@
           <a:bodyPr wrap="square" lIns="0" tIns="0" rIns="0" bIns="0" rtlCol="0" anchor="t"/>
           <a:lstStyle/>
           <a:p>
-            <a:pPr marL="0" indent="0">
+            <a:pPr indent="0" marL="0">
               <a:spcAft>
                 <a:spcPts val="600"/>
               </a:spcAft>
@@ -8993,7 +9065,7 @@
             <a:endParaRPr lang="en-US" sz="6600" dirty="0"/>
           </a:p>
           <a:p>
-            <a:pPr marL="0" indent="0">
+            <a:pPr indent="0" marL="0">
               <a:spcAft>
                 <a:spcPts val="600"/>
               </a:spcAft>
@@ -9032,7 +9104,7 @@
           <a:bodyPr wrap="square" lIns="0" tIns="0" rIns="0" bIns="0" rtlCol="0" anchor="ctr"/>
           <a:lstStyle/>
           <a:p>
-            <a:pPr marL="0" indent="0">
+            <a:pPr indent="0" marL="0">
               <a:buNone/>
             </a:pPr>
             <a:r>
@@ -9043,6 +9115,9 @@
               </a:rPr>
               <a:t>A township can have trees and footpaths and </a:t>
             </a:r>
+            <a:pPr indent="0" marL="0">
+              <a:buNone/>
+            </a:pPr>
             <a:r>
               <a:rPr lang="en-US" sz="2000" b="1" dirty="0">
                 <a:solidFill>
@@ -9054,7 +9129,7 @@
             <a:endParaRPr lang="en-US" sz="2000" dirty="0"/>
           </a:p>
           <a:p>
-            <a:pPr marL="0" indent="0">
+            <a:pPr indent="0" marL="0">
               <a:buNone/>
             </a:pPr>
             <a:r>
@@ -9068,7 +9143,7 @@
             <a:endParaRPr lang="en-US" sz="2000" dirty="0"/>
           </a:p>
           <a:p>
-            <a:pPr marL="0" indent="0">
+            <a:pPr indent="0" marL="0">
               <a:buNone/>
             </a:pPr>
             <a:r>
@@ -9104,7 +9179,7 @@
           <a:bodyPr wrap="square" lIns="0" tIns="0" rIns="0" bIns="0" rtlCol="0" anchor="ctr"/>
           <a:lstStyle/>
           <a:p>
-            <a:pPr marL="0" indent="0">
+            <a:pPr indent="0" marL="0">
               <a:buNone/>
             </a:pPr>
             <a:r>
@@ -9139,7 +9214,7 @@
           </a:prstGeom>
           <a:extLst>
             <a:ext uri="{C572A759-6A51-4108-AA02-DFA0A04FC94B}">
-              <ma14:wrappingTextBoxFlag xmlns:ma14="http://schemas.microsoft.com/office/mac/drawingml/2011/main" xmlns="" val="0"/>
+              <ma14:wrappingTextBoxFlag xmlns:ma14="http://schemas.microsoft.com/office/mac/drawingml/2011/main" val="0"/>
             </a:ext>
           </a:extLst>
         </p:spPr>
@@ -9157,7 +9232,7 @@
           <a:p>
             <a:pPr algn="r"/>
             <a:fld id="{F7021451-1387-4CA6-816F-3879F97B5CBC}" type="slidenum">
-              <a:rPr lang="en-US" b="0"/>
+              <a:rPr b="0" lang="en-US"/>
               <a:t>2</a:t>
             </a:fld>
             <a:endParaRPr lang="en-US"/>
@@ -9192,11 +9267,9 @@
       <p:sp>
         <p:nvSpPr>
           <p:cNvPr id="2" name="Text 0"/>
-          <p:cNvSpPr>
-            <a:spLocks noGrp="1"/>
-          </p:cNvSpPr>
+          <p:cNvSpPr/>
           <p:nvPr>
-            <p:ph type="body" idx="100" hasCustomPrompt="1"/>
+            <p:ph idx="100" type="body" hasCustomPrompt="1"/>
           </p:nvPr>
         </p:nvSpPr>
         <p:spPr>
@@ -9214,11 +9287,11 @@
           <a:bodyPr wrap="square" lIns="0" tIns="0" rIns="0" bIns="0" rtlCol="0" anchor="t"/>
           <a:lstStyle/>
           <a:p>
-            <a:pPr marL="0" indent="0" algn="l">
-              <a:buNone/>
-            </a:pPr>
-            <a:r>
-              <a:rPr lang="en-US" sz="1200" b="1" kern="0" spc="300" dirty="0">
+            <a:pPr algn="l" indent="0" marL="0">
+              <a:buNone/>
+            </a:pPr>
+            <a:r>
+              <a:rPr lang="en-US" sz="1200" b="1" spc="300" kern="0" dirty="0">
                 <a:solidFill>
                   <a:schemeClr val="accent3"/>
                 </a:solidFill>
@@ -9232,11 +9305,9 @@
       <p:sp>
         <p:nvSpPr>
           <p:cNvPr id="3" name="Text 0"/>
-          <p:cNvSpPr>
-            <a:spLocks noGrp="1"/>
-          </p:cNvSpPr>
+          <p:cNvSpPr/>
           <p:nvPr>
-            <p:ph type="title" idx="101" hasCustomPrompt="1"/>
+            <p:ph idx="101" type="title" hasCustomPrompt="1"/>
           </p:nvPr>
         </p:nvSpPr>
         <p:spPr>
@@ -9254,7 +9325,7 @@
           <a:bodyPr wrap="square" lIns="0" tIns="0" rIns="0" bIns="0" rtlCol="0" anchor="t"/>
           <a:lstStyle/>
           <a:p>
-            <a:pPr marL="0" indent="0" algn="l">
+            <a:pPr algn="l" indent="0" marL="0">
               <a:buNone/>
             </a:pPr>
             <a:r>
@@ -9290,20 +9361,13 @@
           </a:solidFill>
           <a:ln/>
           <a:effectLst>
-            <a:outerShdw blurRad="127000" dist="38100" dir="5400000" algn="bl" rotWithShape="0">
+            <a:outerShdw sx="100000" sy="100000" kx="0" ky="0" algn="bl" rotWithShape="0" blurRad="127000" dist="38100" dir="5400000">
               <a:srgbClr val="173D2E">
                 <a:alpha val="14000"/>
               </a:srgbClr>
             </a:outerShdw>
           </a:effectLst>
         </p:spPr>
-        <p:txBody>
-          <a:bodyPr/>
-          <a:lstStyle/>
-          <a:p>
-            <a:endParaRPr lang="en-MY"/>
-          </a:p>
-        </p:txBody>
       </p:sp>
       <p:sp>
         <p:nvSpPr>
@@ -9326,14 +9390,14 @@
           <a:bodyPr wrap="square" lIns="0" tIns="0" rIns="0" bIns="0" rtlCol="0" anchor="t"/>
           <a:lstStyle/>
           <a:p>
-            <a:pPr marL="0" indent="0">
+            <a:pPr indent="0" marL="0">
               <a:spcAft>
                 <a:spcPts val="1000"/>
               </a:spcAft>
               <a:buNone/>
             </a:pPr>
             <a:r>
-              <a:rPr lang="en-US" sz="1300" b="1" kern="0" spc="200" dirty="0">
+              <a:rPr lang="en-US" sz="1300" b="1" spc="200" kern="0" dirty="0">
                 <a:solidFill>
                   <a:schemeClr val="accent1"/>
                 </a:solidFill>
@@ -9343,7 +9407,7 @@
             <a:endParaRPr lang="en-US" sz="1300" dirty="0"/>
           </a:p>
           <a:p>
-            <a:pPr marL="0" indent="0">
+            <a:pPr indent="0" marL="0">
               <a:spcAft>
                 <a:spcPts val="1000"/>
               </a:spcAft>
@@ -9363,7 +9427,7 @@
             <a:endParaRPr lang="en-US" sz="1300" dirty="0"/>
           </a:p>
           <a:p>
-            <a:pPr marL="0" indent="0">
+            <a:pPr indent="0" marL="0">
               <a:spcAft>
                 <a:spcPts val="1000"/>
               </a:spcAft>
@@ -9402,20 +9466,13 @@
           </a:solidFill>
           <a:ln/>
           <a:effectLst>
-            <a:outerShdw blurRad="127000" dist="38100" dir="5400000" algn="bl" rotWithShape="0">
+            <a:outerShdw sx="100000" sy="100000" kx="0" ky="0" algn="bl" rotWithShape="0" blurRad="127000" dist="38100" dir="5400000">
               <a:srgbClr val="173D2E">
                 <a:alpha val="14000"/>
               </a:srgbClr>
             </a:outerShdw>
           </a:effectLst>
         </p:spPr>
-        <p:txBody>
-          <a:bodyPr/>
-          <a:lstStyle/>
-          <a:p>
-            <a:endParaRPr lang="en-MY"/>
-          </a:p>
-        </p:txBody>
       </p:sp>
       <p:sp>
         <p:nvSpPr>
@@ -9438,14 +9495,14 @@
           <a:bodyPr wrap="square" lIns="0" tIns="0" rIns="0" bIns="0" rtlCol="0" anchor="t"/>
           <a:lstStyle/>
           <a:p>
-            <a:pPr marL="0" indent="0">
+            <a:pPr indent="0" marL="0">
               <a:spcAft>
                 <a:spcPts val="1000"/>
               </a:spcAft>
               <a:buNone/>
             </a:pPr>
             <a:r>
-              <a:rPr lang="en-US" sz="1300" b="1" kern="0" spc="200" dirty="0">
+              <a:rPr lang="en-US" sz="1300" b="1" spc="200" kern="0" dirty="0">
                 <a:solidFill>
                   <a:schemeClr val="accent3"/>
                 </a:solidFill>
@@ -9455,7 +9512,7 @@
             <a:endParaRPr lang="en-US" sz="1300" dirty="0"/>
           </a:p>
           <a:p>
-            <a:pPr marL="0" indent="0">
+            <a:pPr indent="0" marL="0">
               <a:spcAft>
                 <a:spcPts val="1000"/>
               </a:spcAft>
@@ -9475,7 +9532,7 @@
             <a:endParaRPr lang="en-US" sz="1300" dirty="0"/>
           </a:p>
           <a:p>
-            <a:pPr marL="0" indent="0">
+            <a:pPr indent="0" marL="0">
               <a:spcAft>
                 <a:spcPts val="1000"/>
               </a:spcAft>
@@ -9514,20 +9571,13 @@
           </a:solidFill>
           <a:ln/>
           <a:effectLst>
-            <a:outerShdw blurRad="127000" dist="38100" dir="5400000" algn="bl" rotWithShape="0">
+            <a:outerShdw sx="100000" sy="100000" kx="0" ky="0" algn="bl" rotWithShape="0" blurRad="127000" dist="38100" dir="5400000">
               <a:srgbClr val="173D2E">
                 <a:alpha val="14000"/>
               </a:srgbClr>
             </a:outerShdw>
           </a:effectLst>
         </p:spPr>
-        <p:txBody>
-          <a:bodyPr/>
-          <a:lstStyle/>
-          <a:p>
-            <a:endParaRPr lang="en-MY"/>
-          </a:p>
-        </p:txBody>
       </p:sp>
       <p:sp>
         <p:nvSpPr>
@@ -9550,14 +9600,14 @@
           <a:bodyPr wrap="square" lIns="0" tIns="0" rIns="0" bIns="0" rtlCol="0" anchor="t"/>
           <a:lstStyle/>
           <a:p>
-            <a:pPr marL="0" indent="0">
+            <a:pPr indent="0" marL="0">
               <a:spcAft>
                 <a:spcPts val="1000"/>
               </a:spcAft>
               <a:buNone/>
             </a:pPr>
             <a:r>
-              <a:rPr lang="en-US" sz="1300" b="1" kern="0" spc="200" dirty="0">
+              <a:rPr lang="en-US" sz="1300" b="1" spc="200" kern="0" dirty="0">
                 <a:solidFill>
                   <a:schemeClr val="accent3"/>
                 </a:solidFill>
@@ -9567,7 +9617,7 @@
             <a:endParaRPr lang="en-US" sz="1300" dirty="0"/>
           </a:p>
           <a:p>
-            <a:pPr marL="0" indent="0">
+            <a:pPr indent="0" marL="0">
               <a:spcAft>
                 <a:spcPts val="1000"/>
               </a:spcAft>
@@ -9587,7 +9637,7 @@
             <a:endParaRPr lang="en-US" sz="1300" dirty="0"/>
           </a:p>
           <a:p>
-            <a:pPr marL="0" indent="0">
+            <a:pPr indent="0" marL="0">
               <a:spcAft>
                 <a:spcPts val="1000"/>
               </a:spcAft>
@@ -9625,7 +9675,7 @@
           </a:prstGeom>
           <a:extLst>
             <a:ext uri="{C572A759-6A51-4108-AA02-DFA0A04FC94B}">
-              <ma14:wrappingTextBoxFlag xmlns:ma14="http://schemas.microsoft.com/office/mac/drawingml/2011/main" xmlns="" val="0"/>
+              <ma14:wrappingTextBoxFlag xmlns:ma14="http://schemas.microsoft.com/office/mac/drawingml/2011/main" val="0"/>
             </a:ext>
           </a:extLst>
         </p:spPr>
@@ -9643,7 +9693,7 @@
           <a:p>
             <a:pPr algn="r"/>
             <a:fld id="{F7021451-1387-4CA6-816F-3879F97B5CBC}" type="slidenum">
-              <a:rPr lang="en-US" b="0"/>
+              <a:rPr b="0" lang="en-US"/>
               <a:t>3</a:t>
             </a:fld>
             <a:endParaRPr lang="en-US"/>
@@ -9678,11 +9728,9 @@
       <p:sp>
         <p:nvSpPr>
           <p:cNvPr id="2" name="Text 0"/>
-          <p:cNvSpPr>
-            <a:spLocks noGrp="1"/>
-          </p:cNvSpPr>
+          <p:cNvSpPr/>
           <p:nvPr>
-            <p:ph type="body" idx="100" hasCustomPrompt="1"/>
+            <p:ph idx="100" type="body" hasCustomPrompt="1"/>
           </p:nvPr>
         </p:nvSpPr>
         <p:spPr>
@@ -9700,11 +9748,11 @@
           <a:bodyPr wrap="square" lIns="0" tIns="0" rIns="0" bIns="0" rtlCol="0" anchor="t"/>
           <a:lstStyle/>
           <a:p>
-            <a:pPr marL="0" indent="0" algn="l">
-              <a:buNone/>
-            </a:pPr>
-            <a:r>
-              <a:rPr lang="en-US" sz="1200" b="1" kern="0" spc="300" dirty="0">
+            <a:pPr algn="l" indent="0" marL="0">
+              <a:buNone/>
+            </a:pPr>
+            <a:r>
+              <a:rPr lang="en-US" sz="1200" b="1" spc="300" kern="0" dirty="0">
                 <a:solidFill>
                   <a:schemeClr val="accent3"/>
                 </a:solidFill>
@@ -9718,11 +9766,9 @@
       <p:sp>
         <p:nvSpPr>
           <p:cNvPr id="3" name="Text 0"/>
-          <p:cNvSpPr>
-            <a:spLocks noGrp="1"/>
-          </p:cNvSpPr>
+          <p:cNvSpPr/>
           <p:nvPr>
-            <p:ph type="title" idx="101" hasCustomPrompt="1"/>
+            <p:ph idx="101" type="title" hasCustomPrompt="1"/>
           </p:nvPr>
         </p:nvSpPr>
         <p:spPr>
@@ -9740,7 +9786,7 @@
           <a:bodyPr wrap="square" lIns="0" tIns="0" rIns="0" bIns="0" rtlCol="0" anchor="t"/>
           <a:lstStyle/>
           <a:p>
-            <a:pPr marL="0" indent="0" algn="l">
+            <a:pPr algn="l" indent="0" marL="0">
               <a:buNone/>
             </a:pPr>
             <a:r>
@@ -9776,7 +9822,7 @@
           <a:bodyPr wrap="square" lIns="0" tIns="0" rIns="0" bIns="0" rtlCol="0" anchor="t"/>
           <a:lstStyle/>
           <a:p>
-            <a:pPr marL="0" indent="0">
+            <a:pPr indent="0" marL="0">
               <a:spcAft>
                 <a:spcPts val="1800"/>
               </a:spcAft>
@@ -9790,43 +9836,24 @@
               </a:rPr>
               <a:t>Recommend </a:t>
             </a:r>
-            <a:r>
-              <a:rPr lang="en-US" sz="2000" dirty="0">
-                <a:solidFill>
-                  <a:schemeClr val="tx1"/>
-                </a:solidFill>
-              </a:rPr>
-              <a:t>the best mix of tree rows and covered walkways for the budget.</a:t>
-            </a:r>
-            <a:endParaRPr lang="en-US" sz="2000" dirty="0"/>
-          </a:p>
-          <a:p>
-            <a:pPr marL="0" indent="0">
+            <a:pPr indent="0" marL="0">
               <a:spcAft>
                 <a:spcPts val="1800"/>
               </a:spcAft>
               <a:buNone/>
             </a:pPr>
             <a:r>
-              <a:rPr lang="en-US" sz="2000" b="1" dirty="0">
+              <a:rPr lang="en-US" sz="2000" dirty="0">
                 <a:solidFill>
                   <a:schemeClr val="tx1"/>
                 </a:solidFill>
               </a:rPr>
-              <a:t>Show </a:t>
-            </a:r>
-            <a:r>
-              <a:rPr lang="en-US" sz="2000" dirty="0">
-                <a:solidFill>
-                  <a:schemeClr val="tx1"/>
-                </a:solidFill>
-              </a:rPr>
-              <a:t>before and after on the map, now and in ten years.</a:t>
+              <a:t>the best mix of tree rows and covered walkways for the budget.</a:t>
             </a:r>
             <a:endParaRPr lang="en-US" sz="2000" dirty="0"/>
           </a:p>
           <a:p>
-            <a:pPr marL="0" indent="0">
+            <a:pPr indent="0" marL="0">
               <a:spcAft>
                 <a:spcPts val="1800"/>
               </a:spcAft>
@@ -9838,8 +9865,45 @@
                   <a:schemeClr val="tx1"/>
                 </a:solidFill>
               </a:rPr>
+              <a:t>Show </a:t>
+            </a:r>
+            <a:pPr indent="0" marL="0">
+              <a:spcAft>
+                <a:spcPts val="1800"/>
+              </a:spcAft>
+              <a:buNone/>
+            </a:pPr>
+            <a:r>
+              <a:rPr lang="en-US" sz="2000" dirty="0">
+                <a:solidFill>
+                  <a:schemeClr val="tx1"/>
+                </a:solidFill>
+              </a:rPr>
+              <a:t>before and after on the map, now and in ten years.</a:t>
+            </a:r>
+            <a:endParaRPr lang="en-US" sz="2000" dirty="0"/>
+          </a:p>
+          <a:p>
+            <a:pPr indent="0" marL="0">
+              <a:spcAft>
+                <a:spcPts val="1800"/>
+              </a:spcAft>
+              <a:buNone/>
+            </a:pPr>
+            <a:r>
+              <a:rPr lang="en-US" sz="2000" b="1" dirty="0">
+                <a:solidFill>
+                  <a:schemeClr val="tx1"/>
+                </a:solidFill>
+              </a:rPr>
               <a:t>Hand off </a:t>
             </a:r>
+            <a:pPr indent="0" marL="0">
+              <a:spcAft>
+                <a:spcPts val="1800"/>
+              </a:spcAft>
+              <a:buNone/>
+            </a:pPr>
             <a:r>
               <a:rPr lang="en-US" sz="2000" dirty="0">
                 <a:solidFill>
@@ -9854,14 +9918,14 @@
       </p:sp>
       <p:pic>
         <p:nvPicPr>
-          <p:cNvPr id="5" name="Swipe screenshot" descr="Teduh map of SS 15 with the before and after swipe divider; amber paths are in sun, green paths are shaded by the plan"/>
+          <p:cNvPr id="5" name="Swipe screenshot" descr="Teduh map of SS 15 with the before and after swipe divider; amber paths are in sun, green paths are shaded by the plan">    </p:cNvPr>
           <p:cNvPicPr>
             <a:picLocks noChangeAspect="1"/>
           </p:cNvPicPr>
           <p:nvPr/>
         </p:nvPicPr>
         <p:blipFill>
-          <a:blip r:embed="rId3"/>
+          <a:blip r:embed="rId1"/>
           <a:stretch>
             <a:fillRect/>
           </a:stretch>
@@ -9896,7 +9960,7 @@
           </a:prstGeom>
           <a:extLst>
             <a:ext uri="{C572A759-6A51-4108-AA02-DFA0A04FC94B}">
-              <ma14:wrappingTextBoxFlag xmlns:ma14="http://schemas.microsoft.com/office/mac/drawingml/2011/main" xmlns="" val="0"/>
+              <ma14:wrappingTextBoxFlag xmlns:ma14="http://schemas.microsoft.com/office/mac/drawingml/2011/main" val="0"/>
             </a:ext>
           </a:extLst>
         </p:spPr>
@@ -9914,7 +9978,7 @@
           <a:p>
             <a:pPr algn="r"/>
             <a:fld id="{F7021451-1387-4CA6-816F-3879F97B5CBC}" type="slidenum">
-              <a:rPr lang="en-US" b="0"/>
+              <a:rPr b="0" lang="en-US"/>
               <a:t>4</a:t>
             </a:fld>
             <a:endParaRPr lang="en-US"/>
@@ -9949,11 +10013,9 @@
       <p:sp>
         <p:nvSpPr>
           <p:cNvPr id="2" name="Text 0"/>
-          <p:cNvSpPr>
-            <a:spLocks noGrp="1"/>
-          </p:cNvSpPr>
+          <p:cNvSpPr/>
           <p:nvPr>
-            <p:ph type="body" idx="100" hasCustomPrompt="1"/>
+            <p:ph idx="100" type="body" hasCustomPrompt="1"/>
           </p:nvPr>
         </p:nvSpPr>
         <p:spPr>
@@ -9971,11 +10033,11 @@
           <a:bodyPr wrap="square" lIns="0" tIns="0" rIns="0" bIns="0" rtlCol="0"/>
           <a:lstStyle/>
           <a:p>
-            <a:pPr marL="0" indent="0" algn="l">
-              <a:buNone/>
-            </a:pPr>
-            <a:r>
-              <a:rPr lang="en-US" sz="1600" b="1" kern="0" spc="400" dirty="0">
+            <a:pPr algn="l" indent="0" marL="0">
+              <a:buNone/>
+            </a:pPr>
+            <a:r>
+              <a:rPr lang="en-US" sz="1600" b="1" spc="400" kern="0" dirty="0">
                 <a:solidFill>
                   <a:schemeClr val="tx1"/>
                 </a:solidFill>
@@ -9989,11 +10051,9 @@
       <p:sp>
         <p:nvSpPr>
           <p:cNvPr id="3" name="Text 0"/>
-          <p:cNvSpPr>
-            <a:spLocks noGrp="1"/>
-          </p:cNvSpPr>
+          <p:cNvSpPr/>
           <p:nvPr>
-            <p:ph type="title" idx="101" hasCustomPrompt="1"/>
+            <p:ph idx="101" type="title" hasCustomPrompt="1"/>
           </p:nvPr>
         </p:nvSpPr>
         <p:spPr>
@@ -10011,7 +10071,7 @@
           <a:bodyPr wrap="square" lIns="0" tIns="0" rIns="0" bIns="0" rtlCol="0" anchor="t"/>
           <a:lstStyle/>
           <a:p>
-            <a:pPr marL="0" indent="0" algn="l">
+            <a:pPr algn="l" indent="0" marL="0">
               <a:buNone/>
             </a:pPr>
             <a:r>
@@ -10025,7 +10085,7 @@
             <a:endParaRPr lang="en-US" sz="5400" dirty="0"/>
           </a:p>
           <a:p>
-            <a:pPr marL="0" indent="0" algn="l">
+            <a:pPr algn="l" indent="0" marL="0">
               <a:buNone/>
             </a:pPr>
             <a:r>
@@ -10065,7 +10125,7 @@
           <a:bodyPr wrap="square" lIns="1016" tIns="1016" rIns="1016" bIns="1016" rtlCol="0" anchor="ctr"/>
           <a:lstStyle/>
           <a:p>
-            <a:pPr marL="0" indent="0" algn="ctr">
+            <a:pPr algn="ctr" indent="0" marL="0">
               <a:buNone/>
             </a:pPr>
             <a:r>
@@ -10105,7 +10165,7 @@
           <a:bodyPr wrap="square" lIns="1016" tIns="1016" rIns="1016" bIns="1016" rtlCol="0" anchor="ctr"/>
           <a:lstStyle/>
           <a:p>
-            <a:pPr marL="0" indent="0" algn="ctr">
+            <a:pPr algn="ctr" indent="0" marL="0">
               <a:buNone/>
             </a:pPr>
             <a:r>
@@ -10145,7 +10205,7 @@
           <a:bodyPr wrap="square" lIns="1016" tIns="1016" rIns="1016" bIns="1016" rtlCol="0" anchor="ctr"/>
           <a:lstStyle/>
           <a:p>
-            <a:pPr marL="0" indent="0" algn="ctr">
+            <a:pPr algn="ctr" indent="0" marL="0">
               <a:buNone/>
             </a:pPr>
             <a:r>
@@ -10185,7 +10245,7 @@
           <a:bodyPr wrap="square" lIns="1016" tIns="1016" rIns="1016" bIns="1016" rtlCol="0" anchor="ctr"/>
           <a:lstStyle/>
           <a:p>
-            <a:pPr marL="0" indent="0" algn="ctr">
+            <a:pPr algn="ctr" indent="0" marL="0">
               <a:buNone/>
             </a:pPr>
             <a:r>
@@ -10225,7 +10285,7 @@
           <a:bodyPr wrap="square" lIns="1016" tIns="1016" rIns="1016" bIns="1016" rtlCol="0" anchor="ctr"/>
           <a:lstStyle/>
           <a:p>
-            <a:pPr marL="0" indent="0" algn="ctr">
+            <a:pPr algn="ctr" indent="0" marL="0">
               <a:buNone/>
             </a:pPr>
             <a:r>
@@ -10260,7 +10320,7 @@
           </a:prstGeom>
           <a:extLst>
             <a:ext uri="{C572A759-6A51-4108-AA02-DFA0A04FC94B}">
-              <ma14:wrappingTextBoxFlag xmlns:ma14="http://schemas.microsoft.com/office/mac/drawingml/2011/main" xmlns="" val="0"/>
+              <ma14:wrappingTextBoxFlag xmlns:ma14="http://schemas.microsoft.com/office/mac/drawingml/2011/main" val="0"/>
             </a:ext>
           </a:extLst>
         </p:spPr>
@@ -10278,7 +10338,7 @@
           <a:p>
             <a:pPr algn="r"/>
             <a:fld id="{F7021451-1387-4CA6-816F-3879F97B5CBC}" type="slidenum">
-              <a:rPr lang="en-US" b="0"/>
+              <a:rPr b="0" lang="en-US"/>
               <a:t>5</a:t>
             </a:fld>
             <a:endParaRPr lang="en-US"/>
@@ -10313,11 +10373,9 @@
       <p:sp>
         <p:nvSpPr>
           <p:cNvPr id="2" name="Text 0"/>
-          <p:cNvSpPr>
-            <a:spLocks noGrp="1"/>
-          </p:cNvSpPr>
+          <p:cNvSpPr/>
           <p:nvPr>
-            <p:ph type="body" idx="100" hasCustomPrompt="1"/>
+            <p:ph idx="100" type="body" hasCustomPrompt="1"/>
           </p:nvPr>
         </p:nvSpPr>
         <p:spPr>
@@ -10335,11 +10393,11 @@
           <a:bodyPr wrap="square" lIns="0" tIns="0" rIns="0" bIns="0" rtlCol="0" anchor="t"/>
           <a:lstStyle/>
           <a:p>
-            <a:pPr marL="0" indent="0" algn="l">
-              <a:buNone/>
-            </a:pPr>
-            <a:r>
-              <a:rPr lang="en-US" sz="1200" b="1" kern="0" spc="300" dirty="0">
+            <a:pPr algn="l" indent="0" marL="0">
+              <a:buNone/>
+            </a:pPr>
+            <a:r>
+              <a:rPr lang="en-US" sz="1200" b="1" spc="300" kern="0" dirty="0">
                 <a:solidFill>
                   <a:schemeClr val="accent3"/>
                 </a:solidFill>
@@ -10353,11 +10411,9 @@
       <p:sp>
         <p:nvSpPr>
           <p:cNvPr id="3" name="Text 0"/>
-          <p:cNvSpPr>
-            <a:spLocks noGrp="1"/>
-          </p:cNvSpPr>
+          <p:cNvSpPr/>
           <p:nvPr>
-            <p:ph type="title" idx="101" hasCustomPrompt="1"/>
+            <p:ph idx="101" type="title" hasCustomPrompt="1"/>
           </p:nvPr>
         </p:nvSpPr>
         <p:spPr>
@@ -10375,7 +10431,7 @@
           <a:bodyPr wrap="square" lIns="0" tIns="0" rIns="0" bIns="0" rtlCol="0" anchor="t"/>
           <a:lstStyle/>
           <a:p>
-            <a:pPr marL="0" indent="0" algn="l">
+            <a:pPr algn="l" indent="0" marL="0">
               <a:buNone/>
             </a:pPr>
             <a:r>
@@ -10411,20 +10467,13 @@
           </a:solidFill>
           <a:ln/>
           <a:effectLst>
-            <a:outerShdw blurRad="127000" dist="38100" dir="5400000" algn="bl" rotWithShape="0">
+            <a:outerShdw sx="100000" sy="100000" kx="0" ky="0" algn="bl" rotWithShape="0" blurRad="127000" dist="38100" dir="5400000">
               <a:srgbClr val="173D2E">
                 <a:alpha val="14000"/>
               </a:srgbClr>
             </a:outerShdw>
           </a:effectLst>
         </p:spPr>
-        <p:txBody>
-          <a:bodyPr/>
-          <a:lstStyle/>
-          <a:p>
-            <a:endParaRPr lang="en-MY"/>
-          </a:p>
-        </p:txBody>
       </p:sp>
       <p:sp>
         <p:nvSpPr>
@@ -10449,7 +10498,7 @@
           <a:bodyPr wrap="square" lIns="0" tIns="0" rIns="0" bIns="0" rtlCol="0" anchor="ctr"/>
           <a:lstStyle/>
           <a:p>
-            <a:pPr marL="0" indent="0" algn="ctr">
+            <a:pPr algn="ctr" indent="0" marL="0">
               <a:buNone/>
             </a:pPr>
             <a:r>
@@ -10485,7 +10534,7 @@
           <a:bodyPr wrap="square" lIns="0" tIns="0" rIns="0" bIns="0" rtlCol="0" anchor="t"/>
           <a:lstStyle/>
           <a:p>
-            <a:pPr marL="0" indent="0">
+            <a:pPr indent="0" marL="0">
               <a:spcAft>
                 <a:spcPts val="800"/>
               </a:spcAft>
@@ -10505,7 +10554,7 @@
             <a:endParaRPr lang="en-US" sz="2000" dirty="0"/>
           </a:p>
           <a:p>
-            <a:pPr marL="0" indent="0">
+            <a:pPr indent="0" marL="0">
               <a:spcAft>
                 <a:spcPts val="800"/>
               </a:spcAft>
@@ -10542,13 +10591,6 @@
           </a:solidFill>
           <a:ln/>
         </p:spPr>
-        <p:txBody>
-          <a:bodyPr/>
-          <a:lstStyle/>
-          <a:p>
-            <a:endParaRPr lang="en-MY"/>
-          </a:p>
-        </p:txBody>
       </p:sp>
       <p:sp>
         <p:nvSpPr>
@@ -10571,20 +10613,13 @@
           </a:solidFill>
           <a:ln/>
           <a:effectLst>
-            <a:outerShdw blurRad="127000" dist="38100" dir="5400000" algn="bl" rotWithShape="0">
+            <a:outerShdw sx="100000" sy="100000" kx="0" ky="0" algn="bl" rotWithShape="0" blurRad="127000" dist="38100" dir="5400000">
               <a:srgbClr val="173D2E">
                 <a:alpha val="14000"/>
               </a:srgbClr>
             </a:outerShdw>
           </a:effectLst>
         </p:spPr>
-        <p:txBody>
-          <a:bodyPr/>
-          <a:lstStyle/>
-          <a:p>
-            <a:endParaRPr lang="en-MY"/>
-          </a:p>
-        </p:txBody>
       </p:sp>
       <p:sp>
         <p:nvSpPr>
@@ -10609,7 +10644,7 @@
           <a:bodyPr wrap="square" lIns="0" tIns="0" rIns="0" bIns="0" rtlCol="0" anchor="ctr"/>
           <a:lstStyle/>
           <a:p>
-            <a:pPr marL="0" indent="0" algn="ctr">
+            <a:pPr algn="ctr" indent="0" marL="0">
               <a:buNone/>
             </a:pPr>
             <a:r>
@@ -10645,7 +10680,7 @@
           <a:bodyPr wrap="square" lIns="0" tIns="0" rIns="0" bIns="0" rtlCol="0" anchor="t"/>
           <a:lstStyle/>
           <a:p>
-            <a:pPr marL="0" indent="0">
+            <a:pPr indent="0" marL="0">
               <a:spcAft>
                 <a:spcPts val="800"/>
               </a:spcAft>
@@ -10665,7 +10700,7 @@
             <a:endParaRPr lang="en-US" sz="2000" dirty="0"/>
           </a:p>
           <a:p>
-            <a:pPr marL="0" indent="0">
+            <a:pPr indent="0" marL="0">
               <a:spcAft>
                 <a:spcPts val="800"/>
               </a:spcAft>
@@ -10702,13 +10737,6 @@
           </a:solidFill>
           <a:ln/>
         </p:spPr>
-        <p:txBody>
-          <a:bodyPr/>
-          <a:lstStyle/>
-          <a:p>
-            <a:endParaRPr lang="en-MY"/>
-          </a:p>
-        </p:txBody>
       </p:sp>
       <p:sp>
         <p:nvSpPr>
@@ -10731,20 +10759,13 @@
           </a:solidFill>
           <a:ln/>
           <a:effectLst>
-            <a:outerShdw blurRad="127000" dist="38100" dir="5400000" algn="bl" rotWithShape="0">
+            <a:outerShdw sx="100000" sy="100000" kx="0" ky="0" algn="bl" rotWithShape="0" blurRad="127000" dist="38100" dir="5400000">
               <a:srgbClr val="173D2E">
                 <a:alpha val="14000"/>
               </a:srgbClr>
             </a:outerShdw>
           </a:effectLst>
         </p:spPr>
-        <p:txBody>
-          <a:bodyPr/>
-          <a:lstStyle/>
-          <a:p>
-            <a:endParaRPr lang="en-MY"/>
-          </a:p>
-        </p:txBody>
       </p:sp>
       <p:sp>
         <p:nvSpPr>
@@ -10769,7 +10790,7 @@
           <a:bodyPr wrap="square" lIns="0" tIns="0" rIns="0" bIns="0" rtlCol="0" anchor="ctr"/>
           <a:lstStyle/>
           <a:p>
-            <a:pPr marL="0" indent="0" algn="ctr">
+            <a:pPr algn="ctr" indent="0" marL="0">
               <a:buNone/>
             </a:pPr>
             <a:r>
@@ -10805,7 +10826,7 @@
           <a:bodyPr wrap="square" lIns="0" tIns="0" rIns="0" bIns="0" rtlCol="0" anchor="t"/>
           <a:lstStyle/>
           <a:p>
-            <a:pPr marL="0" indent="0">
+            <a:pPr indent="0" marL="0">
               <a:spcAft>
                 <a:spcPts val="800"/>
               </a:spcAft>
@@ -10825,7 +10846,7 @@
             <a:endParaRPr lang="en-US" sz="2000" dirty="0"/>
           </a:p>
           <a:p>
-            <a:pPr marL="0" indent="0">
+            <a:pPr indent="0" marL="0">
               <a:spcAft>
                 <a:spcPts val="800"/>
               </a:spcAft>
@@ -10862,13 +10883,6 @@
           </a:solidFill>
           <a:ln/>
         </p:spPr>
-        <p:txBody>
-          <a:bodyPr/>
-          <a:lstStyle/>
-          <a:p>
-            <a:endParaRPr lang="en-MY"/>
-          </a:p>
-        </p:txBody>
       </p:sp>
       <p:sp>
         <p:nvSpPr>
@@ -10891,20 +10905,13 @@
           </a:solidFill>
           <a:ln/>
           <a:effectLst>
-            <a:outerShdw blurRad="127000" dist="38100" dir="5400000" algn="bl" rotWithShape="0">
+            <a:outerShdw sx="100000" sy="100000" kx="0" ky="0" algn="bl" rotWithShape="0" blurRad="127000" dist="38100" dir="5400000">
               <a:srgbClr val="173D2E">
                 <a:alpha val="14000"/>
               </a:srgbClr>
             </a:outerShdw>
           </a:effectLst>
         </p:spPr>
-        <p:txBody>
-          <a:bodyPr/>
-          <a:lstStyle/>
-          <a:p>
-            <a:endParaRPr lang="en-MY"/>
-          </a:p>
-        </p:txBody>
       </p:sp>
       <p:sp>
         <p:nvSpPr>
@@ -10929,7 +10936,7 @@
           <a:bodyPr wrap="square" lIns="0" tIns="0" rIns="0" bIns="0" rtlCol="0" anchor="ctr"/>
           <a:lstStyle/>
           <a:p>
-            <a:pPr marL="0" indent="0" algn="ctr">
+            <a:pPr algn="ctr" indent="0" marL="0">
               <a:buNone/>
             </a:pPr>
             <a:r>
@@ -10965,7 +10972,7 @@
           <a:bodyPr wrap="square" lIns="0" tIns="0" rIns="0" bIns="0" rtlCol="0" anchor="t"/>
           <a:lstStyle/>
           <a:p>
-            <a:pPr marL="0" indent="0">
+            <a:pPr indent="0" marL="0">
               <a:spcAft>
                 <a:spcPts val="800"/>
               </a:spcAft>
@@ -10985,7 +10992,7 @@
             <a:endParaRPr lang="en-US" sz="2000" dirty="0"/>
           </a:p>
           <a:p>
-            <a:pPr marL="0" indent="0">
+            <a:pPr indent="0" marL="0">
               <a:spcAft>
                 <a:spcPts val="800"/>
               </a:spcAft>
@@ -11022,13 +11029,6 @@
           </a:solidFill>
           <a:ln/>
         </p:spPr>
-        <p:txBody>
-          <a:bodyPr/>
-          <a:lstStyle/>
-          <a:p>
-            <a:endParaRPr lang="en-MY"/>
-          </a:p>
-        </p:txBody>
       </p:sp>
       <p:sp>
         <p:nvSpPr>
@@ -11051,20 +11051,13 @@
           </a:solidFill>
           <a:ln/>
           <a:effectLst>
-            <a:outerShdw blurRad="127000" dist="38100" dir="5400000" algn="bl" rotWithShape="0">
+            <a:outerShdw sx="100000" sy="100000" kx="0" ky="0" algn="bl" rotWithShape="0" blurRad="127000" dist="38100" dir="5400000">
               <a:srgbClr val="173D2E">
                 <a:alpha val="14000"/>
               </a:srgbClr>
             </a:outerShdw>
           </a:effectLst>
         </p:spPr>
-        <p:txBody>
-          <a:bodyPr/>
-          <a:lstStyle/>
-          <a:p>
-            <a:endParaRPr lang="en-MY"/>
-          </a:p>
-        </p:txBody>
       </p:sp>
       <p:sp>
         <p:nvSpPr>
@@ -11089,7 +11082,7 @@
           <a:bodyPr wrap="square" lIns="0" tIns="0" rIns="0" bIns="0" rtlCol="0" anchor="ctr"/>
           <a:lstStyle/>
           <a:p>
-            <a:pPr marL="0" indent="0" algn="ctr">
+            <a:pPr algn="ctr" indent="0" marL="0">
               <a:buNone/>
             </a:pPr>
             <a:r>
@@ -11125,7 +11118,7 @@
           <a:bodyPr wrap="square" lIns="0" tIns="0" rIns="0" bIns="0" rtlCol="0" anchor="t"/>
           <a:lstStyle/>
           <a:p>
-            <a:pPr marL="0" indent="0">
+            <a:pPr indent="0" marL="0">
               <a:spcAft>
                 <a:spcPts val="800"/>
               </a:spcAft>
@@ -11145,7 +11138,7 @@
             <a:endParaRPr lang="en-US" sz="2000" dirty="0"/>
           </a:p>
           <a:p>
-            <a:pPr marL="0" indent="0">
+            <a:pPr indent="0" marL="0">
               <a:spcAft>
                 <a:spcPts val="800"/>
               </a:spcAft>
@@ -11184,7 +11177,7 @@
           <a:bodyPr wrap="square" lIns="0" tIns="0" rIns="0" bIns="0" rtlCol="0" anchor="ctr"/>
           <a:lstStyle/>
           <a:p>
-            <a:pPr marL="0" indent="0">
+            <a:pPr indent="0" marL="0">
               <a:buNone/>
             </a:pPr>
             <a:r>
@@ -11219,7 +11212,7 @@
           </a:prstGeom>
           <a:extLst>
             <a:ext uri="{C572A759-6A51-4108-AA02-DFA0A04FC94B}">
-              <ma14:wrappingTextBoxFlag xmlns:ma14="http://schemas.microsoft.com/office/mac/drawingml/2011/main" xmlns="" val="0"/>
+              <ma14:wrappingTextBoxFlag xmlns:ma14="http://schemas.microsoft.com/office/mac/drawingml/2011/main" val="0"/>
             </a:ext>
           </a:extLst>
         </p:spPr>
@@ -11237,7 +11230,7 @@
           <a:p>
             <a:pPr algn="r"/>
             <a:fld id="{F7021451-1387-4CA6-816F-3879F97B5CBC}" type="slidenum">
-              <a:rPr lang="en-US" b="0"/>
+              <a:rPr b="0" lang="en-US"/>
               <a:t>6</a:t>
             </a:fld>
             <a:endParaRPr lang="en-US"/>
@@ -11272,11 +11265,9 @@
       <p:sp>
         <p:nvSpPr>
           <p:cNvPr id="2" name="Text 0"/>
-          <p:cNvSpPr>
-            <a:spLocks noGrp="1"/>
-          </p:cNvSpPr>
+          <p:cNvSpPr/>
           <p:nvPr>
-            <p:ph type="body" idx="100" hasCustomPrompt="1"/>
+            <p:ph idx="100" type="body" hasCustomPrompt="1"/>
           </p:nvPr>
         </p:nvSpPr>
         <p:spPr>
@@ -11294,11 +11285,11 @@
           <a:bodyPr wrap="square" lIns="0" tIns="0" rIns="0" bIns="0" rtlCol="0" anchor="t"/>
           <a:lstStyle/>
           <a:p>
-            <a:pPr marL="0" indent="0" algn="l">
-              <a:buNone/>
-            </a:pPr>
-            <a:r>
-              <a:rPr lang="en-US" sz="1200" b="1" kern="0" spc="300" dirty="0">
+            <a:pPr algn="l" indent="0" marL="0">
+              <a:buNone/>
+            </a:pPr>
+            <a:r>
+              <a:rPr lang="en-US" sz="1200" b="1" spc="300" kern="0" dirty="0">
                 <a:solidFill>
                   <a:schemeClr val="accent1"/>
                 </a:solidFill>
@@ -11312,11 +11303,9 @@
       <p:sp>
         <p:nvSpPr>
           <p:cNvPr id="3" name="Text 0"/>
-          <p:cNvSpPr>
-            <a:spLocks noGrp="1"/>
-          </p:cNvSpPr>
+          <p:cNvSpPr/>
           <p:nvPr>
-            <p:ph type="title" idx="101" hasCustomPrompt="1"/>
+            <p:ph idx="101" type="title" hasCustomPrompt="1"/>
           </p:nvPr>
         </p:nvSpPr>
         <p:spPr>
@@ -11334,7 +11323,7 @@
           <a:bodyPr wrap="square" lIns="0" tIns="0" rIns="0" bIns="0" rtlCol="0" anchor="t"/>
           <a:lstStyle/>
           <a:p>
-            <a:pPr marL="0" indent="0" algn="l">
+            <a:pPr algn="l" indent="0" marL="0">
               <a:buNone/>
             </a:pPr>
             <a:r>
@@ -11370,7 +11359,7 @@
           <a:bodyPr wrap="square" lIns="0" tIns="0" rIns="0" bIns="0" rtlCol="0" anchor="t"/>
           <a:lstStyle/>
           <a:p>
-            <a:pPr marL="0" indent="0">
+            <a:pPr indent="0" marL="0">
               <a:spcAft>
                 <a:spcPts val="800"/>
               </a:spcAft>
@@ -11390,7 +11379,7 @@
             <a:endParaRPr lang="en-US" sz="7200" dirty="0"/>
           </a:p>
           <a:p>
-            <a:pPr marL="0" indent="0">
+            <a:pPr indent="0" marL="0">
               <a:spcAft>
                 <a:spcPts val="800"/>
               </a:spcAft>
@@ -11429,7 +11418,7 @@
           <a:bodyPr wrap="square" lIns="0" tIns="0" rIns="0" bIns="0" rtlCol="0" anchor="t"/>
           <a:lstStyle/>
           <a:p>
-            <a:pPr marL="0" indent="0">
+            <a:pPr indent="0" marL="0">
               <a:spcAft>
                 <a:spcPts val="800"/>
               </a:spcAft>
@@ -11449,7 +11438,7 @@
             <a:endParaRPr lang="en-US" sz="7200" dirty="0"/>
           </a:p>
           <a:p>
-            <a:pPr marL="0" indent="0">
+            <a:pPr indent="0" marL="0">
               <a:spcAft>
                 <a:spcPts val="800"/>
               </a:spcAft>
@@ -11488,7 +11477,7 @@
           <a:bodyPr wrap="square" lIns="0" tIns="0" rIns="0" bIns="0" rtlCol="0" anchor="t"/>
           <a:lstStyle/>
           <a:p>
-            <a:pPr marL="0" indent="0">
+            <a:pPr indent="0" marL="0">
               <a:spcAft>
                 <a:spcPts val="800"/>
               </a:spcAft>
@@ -11508,7 +11497,7 @@
             <a:endParaRPr lang="en-US" sz="7200" dirty="0"/>
           </a:p>
           <a:p>
-            <a:pPr marL="0" indent="0">
+            <a:pPr indent="0" marL="0">
               <a:spcAft>
                 <a:spcPts val="800"/>
               </a:spcAft>
@@ -11547,7 +11536,7 @@
           <a:bodyPr wrap="square" lIns="0" tIns="0" rIns="0" bIns="0" rtlCol="0" anchor="ctr"/>
           <a:lstStyle/>
           <a:p>
-            <a:pPr marL="0" indent="0">
+            <a:pPr indent="0" marL="0">
               <a:buNone/>
             </a:pPr>
             <a:r>
@@ -11582,7 +11571,7 @@
           </a:prstGeom>
           <a:extLst>
             <a:ext uri="{C572A759-6A51-4108-AA02-DFA0A04FC94B}">
-              <ma14:wrappingTextBoxFlag xmlns:ma14="http://schemas.microsoft.com/office/mac/drawingml/2011/main" xmlns="" val="0"/>
+              <ma14:wrappingTextBoxFlag xmlns:ma14="http://schemas.microsoft.com/office/mac/drawingml/2011/main" val="0"/>
             </a:ext>
           </a:extLst>
         </p:spPr>
@@ -11600,7 +11589,7 @@
           <a:p>
             <a:pPr algn="r"/>
             <a:fld id="{F7021451-1387-4CA6-816F-3879F97B5CBC}" type="slidenum">
-              <a:rPr lang="en-US" b="0"/>
+              <a:rPr b="0" lang="en-US"/>
               <a:t>7</a:t>
             </a:fld>
             <a:endParaRPr lang="en-US"/>
@@ -11635,11 +11624,9 @@
       <p:sp>
         <p:nvSpPr>
           <p:cNvPr id="2" name="Text 0"/>
-          <p:cNvSpPr>
-            <a:spLocks noGrp="1"/>
-          </p:cNvSpPr>
+          <p:cNvSpPr/>
           <p:nvPr>
-            <p:ph type="body" idx="100" hasCustomPrompt="1"/>
+            <p:ph idx="100" type="body" hasCustomPrompt="1"/>
           </p:nvPr>
         </p:nvSpPr>
         <p:spPr>
@@ -11657,11 +11644,11 @@
           <a:bodyPr wrap="square" lIns="0" tIns="0" rIns="0" bIns="0" rtlCol="0" anchor="t"/>
           <a:lstStyle/>
           <a:p>
-            <a:pPr marL="0" indent="0" algn="l">
-              <a:buNone/>
-            </a:pPr>
-            <a:r>
-              <a:rPr lang="en-US" sz="1200" b="1" kern="0" spc="300" dirty="0">
+            <a:pPr algn="l" indent="0" marL="0">
+              <a:buNone/>
+            </a:pPr>
+            <a:r>
+              <a:rPr lang="en-US" sz="1200" b="1" spc="300" kern="0" dirty="0">
                 <a:solidFill>
                   <a:schemeClr val="accent3"/>
                 </a:solidFill>
@@ -11675,11 +11662,9 @@
       <p:sp>
         <p:nvSpPr>
           <p:cNvPr id="3" name="Text 0"/>
-          <p:cNvSpPr>
-            <a:spLocks noGrp="1"/>
-          </p:cNvSpPr>
+          <p:cNvSpPr/>
           <p:nvPr>
-            <p:ph type="title" idx="101" hasCustomPrompt="1"/>
+            <p:ph idx="101" type="title" hasCustomPrompt="1"/>
           </p:nvPr>
         </p:nvSpPr>
         <p:spPr>
@@ -11697,7 +11682,7 @@
           <a:bodyPr wrap="square" lIns="0" tIns="0" rIns="0" bIns="0" rtlCol="0" anchor="t"/>
           <a:lstStyle/>
           <a:p>
-            <a:pPr marL="0" indent="0" algn="l">
+            <a:pPr algn="l" indent="0" marL="0">
               <a:buNone/>
             </a:pPr>
             <a:r>
@@ -11728,34 +11713,16 @@
         </p:nvGraphicFramePr>
         <p:xfrm>
           <a:off x="548640" y="2103120"/>
-          <a:ext cx="11094415" cy="3389376"/>
+          <a:ext cx="11094415" cy="914400"/>
         </p:xfrm>
         <a:graphic>
           <a:graphicData uri="http://schemas.openxmlformats.org/drawingml/2006/table">
             <a:tbl>
               <a:tblPr/>
               <a:tblGrid>
-                <a:gridCol w="2011680">
-                  <a:extLst>
-                    <a:ext uri="{9D8B030D-6E8A-4147-A177-3AD203B41FA5}">
-                      <a16:colId xmlns:a16="http://schemas.microsoft.com/office/drawing/2014/main" val="20000"/>
-                    </a:ext>
-                  </a:extLst>
-                </a:gridCol>
-                <a:gridCol w="4023360">
-                  <a:extLst>
-                    <a:ext uri="{9D8B030D-6E8A-4147-A177-3AD203B41FA5}">
-                      <a16:colId xmlns:a16="http://schemas.microsoft.com/office/drawing/2014/main" val="20001"/>
-                    </a:ext>
-                  </a:extLst>
-                </a:gridCol>
-                <a:gridCol w="5059375">
-                  <a:extLst>
-                    <a:ext uri="{9D8B030D-6E8A-4147-A177-3AD203B41FA5}">
-                      <a16:colId xmlns:a16="http://schemas.microsoft.com/office/drawing/2014/main" val="20002"/>
-                    </a:ext>
-                  </a:extLst>
-                </a:gridCol>
+                <a:gridCol w="2011680"/>
+                <a:gridCol w="4023360"/>
+                <a:gridCol w="5059375"/>
               </a:tblGrid>
               <a:tr h="0">
                 <a:tc>
@@ -11763,7 +11730,7 @@
                     <a:bodyPr/>
                     <a:lstStyle/>
                     <a:p>
-                      <a:pPr marL="0" indent="0">
+                      <a:pPr indent="0" marL="0">
                         <a:buNone/>
                       </a:pPr>
                       <a:r>
@@ -11824,7 +11791,7 @@
                     <a:bodyPr/>
                     <a:lstStyle/>
                     <a:p>
-                      <a:pPr marL="0" indent="0">
+                      <a:pPr indent="0" marL="0">
                         <a:buNone/>
                       </a:pPr>
                       <a:r>
@@ -11885,7 +11852,7 @@
                     <a:bodyPr/>
                     <a:lstStyle/>
                     <a:p>
-                      <a:pPr marL="0" indent="0">
+                      <a:pPr indent="0" marL="0">
                         <a:buNone/>
                       </a:pPr>
                       <a:r>
@@ -11941,11 +11908,6 @@
                     </a:solidFill>
                   </a:tcPr>
                 </a:tc>
-                <a:extLst>
-                  <a:ext uri="{0D108BD9-81ED-4DB2-BD59-A6C34878D82A}">
-                    <a16:rowId xmlns:a16="http://schemas.microsoft.com/office/drawing/2014/main" val="10000"/>
-                  </a:ext>
-                </a:extLst>
               </a:tr>
               <a:tr h="0">
                 <a:tc>
@@ -11953,7 +11915,7 @@
                     <a:bodyPr/>
                     <a:lstStyle/>
                     <a:p>
-                      <a:pPr marL="0" indent="0">
+                      <a:pPr indent="0" marL="0">
                         <a:buNone/>
                       </a:pPr>
                       <a:r>
@@ -12014,7 +11976,7 @@
                     <a:bodyPr/>
                     <a:lstStyle/>
                     <a:p>
-                      <a:pPr marL="0" indent="0">
+                      <a:pPr indent="0" marL="0">
                         <a:buNone/>
                       </a:pPr>
                       <a:r>
@@ -12075,7 +12037,7 @@
                     <a:bodyPr/>
                     <a:lstStyle/>
                     <a:p>
-                      <a:pPr marL="0" indent="0">
+                      <a:pPr indent="0" marL="0">
                         <a:buNone/>
                       </a:pPr>
                       <a:r>
@@ -12131,11 +12093,6 @@
                     </a:solidFill>
                   </a:tcPr>
                 </a:tc>
-                <a:extLst>
-                  <a:ext uri="{0D108BD9-81ED-4DB2-BD59-A6C34878D82A}">
-                    <a16:rowId xmlns:a16="http://schemas.microsoft.com/office/drawing/2014/main" val="10001"/>
-                  </a:ext>
-                </a:extLst>
               </a:tr>
               <a:tr h="0">
                 <a:tc>
@@ -12143,7 +12100,7 @@
                     <a:bodyPr/>
                     <a:lstStyle/>
                     <a:p>
-                      <a:pPr marL="0" indent="0">
+                      <a:pPr indent="0" marL="0">
                         <a:buNone/>
                       </a:pPr>
                       <a:r>
@@ -12204,7 +12161,7 @@
                     <a:bodyPr/>
                     <a:lstStyle/>
                     <a:p>
-                      <a:pPr marL="0" indent="0">
+                      <a:pPr indent="0" marL="0">
                         <a:buNone/>
                       </a:pPr>
                       <a:r>
@@ -12265,7 +12222,7 @@
                     <a:bodyPr/>
                     <a:lstStyle/>
                     <a:p>
-                      <a:pPr marL="0" indent="0">
+                      <a:pPr indent="0" marL="0">
                         <a:buNone/>
                       </a:pPr>
                       <a:r>
@@ -12321,11 +12278,6 @@
                     </a:solidFill>
                   </a:tcPr>
                 </a:tc>
-                <a:extLst>
-                  <a:ext uri="{0D108BD9-81ED-4DB2-BD59-A6C34878D82A}">
-                    <a16:rowId xmlns:a16="http://schemas.microsoft.com/office/drawing/2014/main" val="10002"/>
-                  </a:ext>
-                </a:extLst>
               </a:tr>
               <a:tr h="0">
                 <a:tc>
@@ -12333,7 +12285,7 @@
                     <a:bodyPr/>
                     <a:lstStyle/>
                     <a:p>
-                      <a:pPr marL="0" indent="0">
+                      <a:pPr indent="0" marL="0">
                         <a:buNone/>
                       </a:pPr>
                       <a:r>
@@ -12394,7 +12346,7 @@
                     <a:bodyPr/>
                     <a:lstStyle/>
                     <a:p>
-                      <a:pPr marL="0" indent="0">
+                      <a:pPr indent="0" marL="0">
                         <a:buNone/>
                       </a:pPr>
                       <a:r>
@@ -12455,7 +12407,7 @@
                     <a:bodyPr/>
                     <a:lstStyle/>
                     <a:p>
-                      <a:pPr marL="0" indent="0">
+                      <a:pPr indent="0" marL="0">
                         <a:buNone/>
                       </a:pPr>
                       <a:r>
@@ -12511,11 +12463,6 @@
                     </a:solidFill>
                   </a:tcPr>
                 </a:tc>
-                <a:extLst>
-                  <a:ext uri="{0D108BD9-81ED-4DB2-BD59-A6C34878D82A}">
-                    <a16:rowId xmlns:a16="http://schemas.microsoft.com/office/drawing/2014/main" val="10003"/>
-                  </a:ext>
-                </a:extLst>
               </a:tr>
               <a:tr h="0">
                 <a:tc>
@@ -12523,7 +12470,7 @@
                     <a:bodyPr/>
                     <a:lstStyle/>
                     <a:p>
-                      <a:pPr marL="0" indent="0">
+                      <a:pPr indent="0" marL="0">
                         <a:buNone/>
                       </a:pPr>
                       <a:r>
@@ -12584,7 +12531,7 @@
                     <a:bodyPr/>
                     <a:lstStyle/>
                     <a:p>
-                      <a:pPr marL="0" indent="0">
+                      <a:pPr indent="0" marL="0">
                         <a:buNone/>
                       </a:pPr>
                       <a:r>
@@ -12645,7 +12592,7 @@
                     <a:bodyPr/>
                     <a:lstStyle/>
                     <a:p>
-                      <a:pPr marL="0" indent="0">
+                      <a:pPr indent="0" marL="0">
                         <a:buNone/>
                       </a:pPr>
                       <a:r>
@@ -12701,11 +12648,6 @@
                     </a:solidFill>
                   </a:tcPr>
                 </a:tc>
-                <a:extLst>
-                  <a:ext uri="{0D108BD9-81ED-4DB2-BD59-A6C34878D82A}">
-                    <a16:rowId xmlns:a16="http://schemas.microsoft.com/office/drawing/2014/main" val="10004"/>
-                  </a:ext>
-                </a:extLst>
               </a:tr>
               <a:tr h="0">
                 <a:tc>
@@ -12713,7 +12655,7 @@
                     <a:bodyPr/>
                     <a:lstStyle/>
                     <a:p>
-                      <a:pPr marL="0" indent="0">
+                      <a:pPr indent="0" marL="0">
                         <a:buNone/>
                       </a:pPr>
                       <a:r>
@@ -12774,7 +12716,7 @@
                     <a:bodyPr/>
                     <a:lstStyle/>
                     <a:p>
-                      <a:pPr marL="0" indent="0">
+                      <a:pPr indent="0" marL="0">
                         <a:buNone/>
                       </a:pPr>
                       <a:r>
@@ -12835,7 +12777,7 @@
                     <a:bodyPr/>
                     <a:lstStyle/>
                     <a:p>
-                      <a:pPr marL="0" indent="0">
+                      <a:pPr indent="0" marL="0">
                         <a:buNone/>
                       </a:pPr>
                       <a:r>
@@ -12891,11 +12833,6 @@
                     </a:solidFill>
                   </a:tcPr>
                 </a:tc>
-                <a:extLst>
-                  <a:ext uri="{0D108BD9-81ED-4DB2-BD59-A6C34878D82A}">
-                    <a16:rowId xmlns:a16="http://schemas.microsoft.com/office/drawing/2014/main" val="10005"/>
-                  </a:ext>
-                </a:extLst>
               </a:tr>
             </a:tbl>
           </a:graphicData>
@@ -12921,7 +12858,7 @@
           </a:prstGeom>
           <a:extLst>
             <a:ext uri="{C572A759-6A51-4108-AA02-DFA0A04FC94B}">
-              <ma14:wrappingTextBoxFlag xmlns:ma14="http://schemas.microsoft.com/office/mac/drawingml/2011/main" xmlns="" val="0"/>
+              <ma14:wrappingTextBoxFlag xmlns:ma14="http://schemas.microsoft.com/office/mac/drawingml/2011/main" val="0"/>
             </a:ext>
           </a:extLst>
         </p:spPr>
@@ -12939,7 +12876,7 @@
           <a:p>
             <a:pPr algn="r"/>
             <a:fld id="{F7021451-1387-4CA6-816F-3879F97B5CBC}" type="slidenum">
-              <a:rPr lang="en-US" b="0"/>
+              <a:rPr b="0" lang="en-US"/>
               <a:t>8</a:t>
             </a:fld>
             <a:endParaRPr lang="en-US"/>
@@ -12974,11 +12911,9 @@
       <p:sp>
         <p:nvSpPr>
           <p:cNvPr id="2" name="Text 0"/>
-          <p:cNvSpPr>
-            <a:spLocks noGrp="1"/>
-          </p:cNvSpPr>
+          <p:cNvSpPr/>
           <p:nvPr>
-            <p:ph type="body" idx="100" hasCustomPrompt="1"/>
+            <p:ph idx="100" type="body" hasCustomPrompt="1"/>
           </p:nvPr>
         </p:nvSpPr>
         <p:spPr>
@@ -12996,11 +12931,11 @@
           <a:bodyPr wrap="square" lIns="0" tIns="0" rIns="0" bIns="0" rtlCol="0" anchor="t"/>
           <a:lstStyle/>
           <a:p>
-            <a:pPr marL="0" indent="0" algn="l">
-              <a:buNone/>
-            </a:pPr>
-            <a:r>
-              <a:rPr lang="en-US" sz="1200" b="1" kern="0" spc="300" dirty="0">
+            <a:pPr algn="l" indent="0" marL="0">
+              <a:buNone/>
+            </a:pPr>
+            <a:r>
+              <a:rPr lang="en-US" sz="1200" b="1" spc="300" kern="0" dirty="0">
                 <a:solidFill>
                   <a:schemeClr val="accent3"/>
                 </a:solidFill>
@@ -13014,11 +12949,9 @@
       <p:sp>
         <p:nvSpPr>
           <p:cNvPr id="3" name="Text 0"/>
-          <p:cNvSpPr>
-            <a:spLocks noGrp="1"/>
-          </p:cNvSpPr>
+          <p:cNvSpPr/>
           <p:nvPr>
-            <p:ph type="title" idx="101" hasCustomPrompt="1"/>
+            <p:ph idx="101" type="title" hasCustomPrompt="1"/>
           </p:nvPr>
         </p:nvSpPr>
         <p:spPr>
@@ -13036,7 +12969,7 @@
           <a:bodyPr wrap="square" lIns="0" tIns="0" rIns="0" bIns="0" rtlCol="0" anchor="t"/>
           <a:lstStyle/>
           <a:p>
-            <a:pPr marL="0" indent="0" algn="l">
+            <a:pPr algn="l" indent="0" marL="0">
               <a:buNone/>
             </a:pPr>
             <a:r>
@@ -13072,7 +13005,7 @@
           <a:bodyPr wrap="square" lIns="0" tIns="0" rIns="0" bIns="0" rtlCol="0" anchor="t"/>
           <a:lstStyle/>
           <a:p>
-            <a:pPr marL="0" indent="0">
+            <a:pPr indent="0" marL="0">
               <a:spcAft>
                 <a:spcPts val="1400"/>
               </a:spcAft>
@@ -13086,43 +13019,24 @@
               </a:rPr>
               <a:t>15 Klang Valley areas built in,</a:t>
             </a:r>
-            <a:r>
-              <a:rPr lang="en-US" sz="1700" dirty="0">
-                <a:solidFill>
-                  <a:schemeClr val="tx1"/>
-                </a:solidFill>
-              </a:rPr>
-              <a:t> and any other place in about 40 seconds. Right: Ara Damansara.</a:t>
-            </a:r>
-            <a:endParaRPr lang="en-US" sz="1700" dirty="0"/>
-          </a:p>
-          <a:p>
-            <a:pPr marL="0" indent="0">
+            <a:pPr indent="0" marL="0">
               <a:spcAft>
                 <a:spcPts val="1400"/>
               </a:spcAft>
               <a:buNone/>
             </a:pPr>
             <a:r>
-              <a:rPr lang="en-US" sz="1700" b="1" dirty="0">
+              <a:rPr lang="en-US" sz="1700" dirty="0">
                 <a:solidFill>
                   <a:schemeClr val="tx1"/>
                 </a:solidFill>
               </a:rPr>
-              <a:t>Open data only:</a:t>
-            </a:r>
-            <a:r>
-              <a:rPr lang="en-US" sz="1700" dirty="0">
-                <a:solidFill>
-                  <a:schemeClr val="tx1"/>
-                </a:solidFill>
-              </a:rPr>
-              <a:t> OpenStreetMap and data.gov.my ridership. No sensors to install.</a:t>
+              <a:t> and any other place in about 40 seconds. Right: Ara Damansara.</a:t>
             </a:r>
             <a:endParaRPr lang="en-US" sz="1700" dirty="0"/>
           </a:p>
           <a:p>
-            <a:pPr marL="0" indent="0">
+            <a:pPr indent="0" marL="0">
               <a:spcAft>
                 <a:spcPts val="1400"/>
               </a:spcAft>
@@ -13134,33 +13048,76 @@
                   <a:schemeClr val="tx1"/>
                 </a:solidFill>
               </a:rPr>
-              <a:t>AI runs on a laptop</a:t>
-            </a:r>
-            <a:r>
-              <a:rPr lang="en-US" sz="1700" dirty="0">
-                <a:solidFill>
-                  <a:schemeClr val="tx1"/>
-                </a:solidFill>
-              </a:rPr>
-              <a:t> (an open vision model via Ollama), so photos stay local and cost nothing per call.</a:t>
-            </a:r>
-            <a:endParaRPr lang="en-US" sz="1700" dirty="0"/>
-          </a:p>
-          <a:p>
-            <a:pPr marL="0" indent="0">
+              <a:t>Open data only:</a:t>
+            </a:r>
+            <a:pPr indent="0" marL="0">
               <a:spcAft>
                 <a:spcPts val="1400"/>
               </a:spcAft>
               <a:buNone/>
             </a:pPr>
             <a:r>
+              <a:rPr lang="en-US" sz="1700" dirty="0">
+                <a:solidFill>
+                  <a:schemeClr val="tx1"/>
+                </a:solidFill>
+              </a:rPr>
+              <a:t> OpenStreetMap and data.gov.my ridership. No sensors to install.</a:t>
+            </a:r>
+            <a:endParaRPr lang="en-US" sz="1700" dirty="0"/>
+          </a:p>
+          <a:p>
+            <a:pPr indent="0" marL="0">
+              <a:spcAft>
+                <a:spcPts val="1400"/>
+              </a:spcAft>
+              <a:buNone/>
+            </a:pPr>
+            <a:r>
               <a:rPr lang="en-US" sz="1700" b="1" dirty="0">
                 <a:solidFill>
                   <a:schemeClr val="tx1"/>
                 </a:solidFill>
               </a:rPr>
+              <a:t>AI runs on a laptop</a:t>
+            </a:r>
+            <a:pPr indent="0" marL="0">
+              <a:spcAft>
+                <a:spcPts val="1400"/>
+              </a:spcAft>
+              <a:buNone/>
+            </a:pPr>
+            <a:r>
+              <a:rPr lang="en-US" sz="1700" dirty="0">
+                <a:solidFill>
+                  <a:schemeClr val="tx1"/>
+                </a:solidFill>
+              </a:rPr>
+              <a:t> (an open vision model via Ollama), so photos stay local and cost nothing per call.</a:t>
+            </a:r>
+            <a:endParaRPr lang="en-US" sz="1700" dirty="0"/>
+          </a:p>
+          <a:p>
+            <a:pPr indent="0" marL="0">
+              <a:spcAft>
+                <a:spcPts val="1400"/>
+              </a:spcAft>
+              <a:buNone/>
+            </a:pPr>
+            <a:r>
+              <a:rPr lang="en-US" sz="1700" b="1" dirty="0">
+                <a:solidFill>
+                  <a:schemeClr val="tx1"/>
+                </a:solidFill>
+              </a:rPr>
               <a:t>515 automated tests.</a:t>
             </a:r>
+            <a:pPr indent="0" marL="0">
+              <a:spcAft>
+                <a:spcPts val="1400"/>
+              </a:spcAft>
+              <a:buNone/>
+            </a:pPr>
             <a:r>
               <a:rPr lang="en-US" sz="1700" dirty="0">
                 <a:solidFill>
@@ -13175,14 +13132,14 @@
       </p:sp>
       <p:pic>
         <p:nvPicPr>
-          <p:cNvPr id="5" name="Ara Damansara screenshot" descr="Teduh after looking up Ara Damansara live: streets, bus stops, schools and the shopping mall with a recommended plan"/>
+          <p:cNvPr id="5" name="Ara Damansara screenshot" descr="Teduh after looking up Ara Damansara live: streets, bus stops, schools and the shopping mall with a recommended plan">    </p:cNvPr>
           <p:cNvPicPr>
             <a:picLocks noChangeAspect="1"/>
           </p:cNvPicPr>
           <p:nvPr/>
         </p:nvPicPr>
         <p:blipFill>
-          <a:blip r:embed="rId3"/>
+          <a:blip r:embed="rId1"/>
           <a:stretch>
             <a:fillRect/>
           </a:stretch>
@@ -13217,7 +13174,7 @@
           </a:prstGeom>
           <a:extLst>
             <a:ext uri="{C572A759-6A51-4108-AA02-DFA0A04FC94B}">
-              <ma14:wrappingTextBoxFlag xmlns:ma14="http://schemas.microsoft.com/office/mac/drawingml/2011/main" xmlns="" val="0"/>
+              <ma14:wrappingTextBoxFlag xmlns:ma14="http://schemas.microsoft.com/office/mac/drawingml/2011/main" val="0"/>
             </a:ext>
           </a:extLst>
         </p:spPr>
@@ -13235,7 +13192,7 @@
           <a:p>
             <a:pPr algn="r"/>
             <a:fld id="{F7021451-1387-4CA6-816F-3879F97B5CBC}" type="slidenum">
-              <a:rPr lang="en-US" b="0"/>
+              <a:rPr b="0" lang="en-US"/>
               <a:t>9</a:t>
             </a:fld>
             <a:endParaRPr lang="en-US"/>
@@ -13543,319 +13500,4 @@
     </a:ext>
   </a:extLst>
 </a:theme>
-</file>
-
-<file path=ppt/theme/theme2.xml><?xml version="1.0" encoding="utf-8"?>
-<a:theme xmlns:a="http://schemas.openxmlformats.org/drawingml/2006/main" name="Office Theme">
-  <a:themeElements>
-    <a:clrScheme name="Office">
-      <a:dk1>
-        <a:sysClr val="windowText" lastClr="000000"/>
-      </a:dk1>
-      <a:lt1>
-        <a:sysClr val="window" lastClr="FFFFFF"/>
-      </a:lt1>
-      <a:dk2>
-        <a:srgbClr val="0E2841"/>
-      </a:dk2>
-      <a:lt2>
-        <a:srgbClr val="E8E8E8"/>
-      </a:lt2>
-      <a:accent1>
-        <a:srgbClr val="156082"/>
-      </a:accent1>
-      <a:accent2>
-        <a:srgbClr val="E97132"/>
-      </a:accent2>
-      <a:accent3>
-        <a:srgbClr val="196B24"/>
-      </a:accent3>
-      <a:accent4>
-        <a:srgbClr val="0F9ED5"/>
-      </a:accent4>
-      <a:accent5>
-        <a:srgbClr val="A02B93"/>
-      </a:accent5>
-      <a:accent6>
-        <a:srgbClr val="4EA72E"/>
-      </a:accent6>
-      <a:hlink>
-        <a:srgbClr val="467886"/>
-      </a:hlink>
-      <a:folHlink>
-        <a:srgbClr val="96607D"/>
-      </a:folHlink>
-    </a:clrScheme>
-    <a:fontScheme name="Office">
-      <a:majorFont>
-        <a:latin typeface="Aptos Display" panose="02110004020202020204"/>
-        <a:ea typeface=""/>
-        <a:cs typeface=""/>
-        <a:font script="Jpan" typeface="游ゴシック Light"/>
-        <a:font script="Hang" typeface="맑은 고딕"/>
-        <a:font script="Hans" typeface="等线 Light"/>
-        <a:font script="Hant" typeface="新細明體"/>
-        <a:font script="Arab" typeface="Times New Roman"/>
-        <a:font script="Hebr" typeface="Times New Roman"/>
-        <a:font script="Thai" typeface="Angsana New"/>
-        <a:font script="Ethi" typeface="Nyala"/>
-        <a:font script="Beng" typeface="Vrinda"/>
-        <a:font script="Gujr" typeface="Shruti"/>
-        <a:font script="Khmr" typeface="MoolBoran"/>
-        <a:font script="Knda" typeface="Tunga"/>
-        <a:font script="Guru" typeface="Raavi"/>
-        <a:font script="Cans" typeface="Euphemia"/>
-        <a:font script="Cher" typeface="Plantagenet Cherokee"/>
-        <a:font script="Yiii" typeface="Microsoft Yi Baiti"/>
-        <a:font script="Tibt" typeface="Microsoft Himalaya"/>
-        <a:font script="Thaa" typeface="MV Boli"/>
-        <a:font script="Deva" typeface="Mangal"/>
-        <a:font script="Telu" typeface="Gautami"/>
-        <a:font script="Taml" typeface="Latha"/>
-        <a:font script="Syrc" typeface="Estrangelo Edessa"/>
-        <a:font script="Orya" typeface="Kalinga"/>
-        <a:font script="Mlym" typeface="Kartika"/>
-        <a:font script="Laoo" typeface="DokChampa"/>
-        <a:font script="Sinh" typeface="Iskoola Pota"/>
-        <a:font script="Mong" typeface="Mongolian Baiti"/>
-        <a:font script="Viet" typeface="Times New Roman"/>
-        <a:font script="Uigh" typeface="Microsoft Uighur"/>
-        <a:font script="Geor" typeface="Sylfaen"/>
-        <a:font script="Armn" typeface="Arial"/>
-        <a:font script="Bugi" typeface="Leelawadee UI"/>
-        <a:font script="Bopo" typeface="Microsoft JhengHei"/>
-        <a:font script="Java" typeface="Javanese Text"/>
-        <a:font script="Lisu" typeface="Segoe UI"/>
-        <a:font script="Mymr" typeface="Myanmar Text"/>
-        <a:font script="Nkoo" typeface="Ebrima"/>
-        <a:font script="Olck" typeface="Nirmala UI"/>
-        <a:font script="Osma" typeface="Ebrima"/>
-        <a:font script="Phag" typeface="Phagspa"/>
-        <a:font script="Syrn" typeface="Estrangelo Edessa"/>
-        <a:font script="Syrj" typeface="Estrangelo Edessa"/>
-        <a:font script="Syre" typeface="Estrangelo Edessa"/>
-        <a:font script="Sora" typeface="Nirmala UI"/>
-        <a:font script="Tale" typeface="Microsoft Tai Le"/>
-        <a:font script="Talu" typeface="Microsoft New Tai Lue"/>
-        <a:font script="Tfng" typeface="Ebrima"/>
-      </a:majorFont>
-      <a:minorFont>
-        <a:latin typeface="Aptos" panose="02110004020202020204"/>
-        <a:ea typeface=""/>
-        <a:cs typeface=""/>
-        <a:font script="Jpan" typeface="游ゴシック"/>
-        <a:font script="Hang" typeface="맑은 고딕"/>
-        <a:font script="Hans" typeface="等线"/>
-        <a:font script="Hant" typeface="新細明體"/>
-        <a:font script="Arab" typeface="Arial"/>
-        <a:font script="Hebr" typeface="Arial"/>
-        <a:font script="Thai" typeface="Cordia New"/>
-        <a:font script="Ethi" typeface="Nyala"/>
-        <a:font script="Beng" typeface="Vrinda"/>
-        <a:font script="Gujr" typeface="Shruti"/>
-        <a:font script="Khmr" typeface="DaunPenh"/>
-        <a:font script="Knda" typeface="Tunga"/>
-        <a:font script="Guru" typeface="Raavi"/>
-        <a:font script="Cans" typeface="Euphemia"/>
-        <a:font script="Cher" typeface="Plantagenet Cherokee"/>
-        <a:font script="Yiii" typeface="Microsoft Yi Baiti"/>
-        <a:font script="Tibt" typeface="Microsoft Himalaya"/>
-        <a:font script="Thaa" typeface="MV Boli"/>
-        <a:font script="Deva" typeface="Mangal"/>
-        <a:font script="Telu" typeface="Gautami"/>
-        <a:font script="Taml" typeface="Latha"/>
-        <a:font script="Syrc" typeface="Estrangelo Edessa"/>
-        <a:font script="Orya" typeface="Kalinga"/>
-        <a:font script="Mlym" typeface="Kartika"/>
-        <a:font script="Laoo" typeface="DokChampa"/>
-        <a:font script="Sinh" typeface="Iskoola Pota"/>
-        <a:font script="Mong" typeface="Mongolian Baiti"/>
-        <a:font script="Viet" typeface="Arial"/>
-        <a:font script="Uigh" typeface="Microsoft Uighur"/>
-        <a:font script="Geor" typeface="Sylfaen"/>
-        <a:font script="Armn" typeface="Arial"/>
-        <a:font script="Bugi" typeface="Leelawadee UI"/>
-        <a:font script="Bopo" typeface="Microsoft JhengHei"/>
-        <a:font script="Java" typeface="Javanese Text"/>
-        <a:font script="Lisu" typeface="Segoe UI"/>
-        <a:font script="Mymr" typeface="Myanmar Text"/>
-        <a:font script="Nkoo" typeface="Ebrima"/>
-        <a:font script="Olck" typeface="Nirmala UI"/>
-        <a:font script="Osma" typeface="Ebrima"/>
-        <a:font script="Phag" typeface="Phagspa"/>
-        <a:font script="Syrn" typeface="Estrangelo Edessa"/>
-        <a:font script="Syrj" typeface="Estrangelo Edessa"/>
-        <a:font script="Syre" typeface="Estrangelo Edessa"/>
-        <a:font script="Sora" typeface="Nirmala UI"/>
-        <a:font script="Tale" typeface="Microsoft Tai Le"/>
-        <a:font script="Talu" typeface="Microsoft New Tai Lue"/>
-        <a:font script="Tfng" typeface="Ebrima"/>
-      </a:minorFont>
-    </a:fontScheme>
-    <a:fmtScheme name="Office">
-      <a:fillStyleLst>
-        <a:solidFill>
-          <a:schemeClr val="phClr"/>
-        </a:solidFill>
-        <a:gradFill rotWithShape="1">
-          <a:gsLst>
-            <a:gs pos="0">
-              <a:schemeClr val="phClr">
-                <a:lumMod val="110000"/>
-                <a:satMod val="105000"/>
-                <a:tint val="67000"/>
-              </a:schemeClr>
-            </a:gs>
-            <a:gs pos="50000">
-              <a:schemeClr val="phClr">
-                <a:lumMod val="105000"/>
-                <a:satMod val="103000"/>
-                <a:tint val="73000"/>
-              </a:schemeClr>
-            </a:gs>
-            <a:gs pos="100000">
-              <a:schemeClr val="phClr">
-                <a:lumMod val="105000"/>
-                <a:satMod val="109000"/>
-                <a:tint val="81000"/>
-              </a:schemeClr>
-            </a:gs>
-          </a:gsLst>
-          <a:lin ang="5400000" scaled="0"/>
-        </a:gradFill>
-        <a:gradFill rotWithShape="1">
-          <a:gsLst>
-            <a:gs pos="0">
-              <a:schemeClr val="phClr">
-                <a:satMod val="103000"/>
-                <a:lumMod val="102000"/>
-                <a:tint val="94000"/>
-              </a:schemeClr>
-            </a:gs>
-            <a:gs pos="50000">
-              <a:schemeClr val="phClr">
-                <a:satMod val="110000"/>
-                <a:lumMod val="100000"/>
-                <a:shade val="100000"/>
-              </a:schemeClr>
-            </a:gs>
-            <a:gs pos="100000">
-              <a:schemeClr val="phClr">
-                <a:lumMod val="99000"/>
-                <a:satMod val="120000"/>
-                <a:shade val="78000"/>
-              </a:schemeClr>
-            </a:gs>
-          </a:gsLst>
-          <a:lin ang="5400000" scaled="0"/>
-        </a:gradFill>
-      </a:fillStyleLst>
-      <a:lnStyleLst>
-        <a:ln w="12700" cap="flat" cmpd="sng" algn="ctr">
-          <a:solidFill>
-            <a:schemeClr val="phClr"/>
-          </a:solidFill>
-          <a:prstDash val="solid"/>
-          <a:miter lim="800000"/>
-        </a:ln>
-        <a:ln w="19050" cap="flat" cmpd="sng" algn="ctr">
-          <a:solidFill>
-            <a:schemeClr val="phClr"/>
-          </a:solidFill>
-          <a:prstDash val="solid"/>
-          <a:miter lim="800000"/>
-        </a:ln>
-        <a:ln w="25400" cap="flat" cmpd="sng" algn="ctr">
-          <a:solidFill>
-            <a:schemeClr val="phClr"/>
-          </a:solidFill>
-          <a:prstDash val="solid"/>
-          <a:miter lim="800000"/>
-        </a:ln>
-      </a:lnStyleLst>
-      <a:effectStyleLst>
-        <a:effectStyle>
-          <a:effectLst/>
-        </a:effectStyle>
-        <a:effectStyle>
-          <a:effectLst/>
-        </a:effectStyle>
-        <a:effectStyle>
-          <a:effectLst>
-            <a:outerShdw blurRad="57150" dist="19050" dir="5400000" algn="ctr" rotWithShape="0">
-              <a:srgbClr val="000000">
-                <a:alpha val="63000"/>
-              </a:srgbClr>
-            </a:outerShdw>
-          </a:effectLst>
-        </a:effectStyle>
-      </a:effectStyleLst>
-      <a:bgFillStyleLst>
-        <a:solidFill>
-          <a:schemeClr val="phClr"/>
-        </a:solidFill>
-        <a:solidFill>
-          <a:schemeClr val="phClr">
-            <a:tint val="95000"/>
-            <a:satMod val="170000"/>
-          </a:schemeClr>
-        </a:solidFill>
-        <a:gradFill rotWithShape="1">
-          <a:gsLst>
-            <a:gs pos="0">
-              <a:schemeClr val="phClr">
-                <a:tint val="93000"/>
-                <a:satMod val="150000"/>
-                <a:shade val="98000"/>
-                <a:lumMod val="102000"/>
-              </a:schemeClr>
-            </a:gs>
-            <a:gs pos="50000">
-              <a:schemeClr val="phClr">
-                <a:tint val="98000"/>
-                <a:satMod val="130000"/>
-                <a:shade val="90000"/>
-                <a:lumMod val="103000"/>
-              </a:schemeClr>
-            </a:gs>
-            <a:gs pos="100000">
-              <a:schemeClr val="phClr">
-                <a:shade val="63000"/>
-                <a:satMod val="120000"/>
-              </a:schemeClr>
-            </a:gs>
-          </a:gsLst>
-          <a:lin ang="5400000" scaled="0"/>
-        </a:gradFill>
-      </a:bgFillStyleLst>
-    </a:fmtScheme>
-  </a:themeElements>
-  <a:objectDefaults>
-    <a:lnDef>
-      <a:spPr/>
-      <a:bodyPr/>
-      <a:lstStyle/>
-      <a:style>
-        <a:lnRef idx="2">
-          <a:schemeClr val="accent1"/>
-        </a:lnRef>
-        <a:fillRef idx="0">
-          <a:schemeClr val="accent1"/>
-        </a:fillRef>
-        <a:effectRef idx="1">
-          <a:schemeClr val="accent1"/>
-        </a:effectRef>
-        <a:fontRef idx="minor">
-          <a:schemeClr val="tx1"/>
-        </a:fontRef>
-      </a:style>
-    </a:lnDef>
-  </a:objectDefaults>
-  <a:extraClrSchemeLst/>
-  <a:extLst>
-    <a:ext uri="{05A4C25C-085E-4340-85A3-A5531E510DB2}">
-      <thm15:themeFamily xmlns:thm15="http://schemas.microsoft.com/office/thememl/2012/main" name="Office Theme" id="{2E142A2C-CD16-42D6-873A-C26D2A0506FA}" vid="{1BDDFF52-6CD6-40A5-AB3C-68EB2F1E4D0A}"/>
-    </a:ext>
-  </a:extLst>
-</a:theme>
 </file>